--- a/Planning docs/Slides/lesson-30-2-teacher-slides.pptx
+++ b/Planning docs/Slides/lesson-30-2-teacher-slides.pptx
@@ -18,9 +18,10 @@
     <p:sldId id="266" r:id="rId12"/>
     <p:sldId id="267" r:id="rId13"/>
     <p:sldId id="268" r:id="rId14"/>
+    <p:sldId id="269" r:id="rId15"/>
   </p:sldIdLst>
   <p:notesMasterIdLst>
-    <p:notesMasterId r:id="rId15"/>
+    <p:notesMasterId r:id="rId16"/>
   </p:notesMasterIdLst>
   <p:sldSz cx="9144000" cy="5143500"/>
   <p:notesSz cx="5143500" cy="9144000"/>
@@ -514,7 +515,7 @@
           <a:p>
             <a:r>
               <a:rPr lang="en-US" dirty="0"/>
-              <a:t>Title slide for Week 30 Day 2. The Lion, the Witch and the Wardrobe.</a:t>
+              <a:t>Lesson 30.2. Reading: Reading: Ch. 16–17 + Synthesis.</a:t>
             </a:r>
             <a:endParaRPr lang="en-US" dirty="0"/>
           </a:p>
@@ -602,7 +603,7 @@
           <a:p>
             <a:r>
               <a:rPr lang="en-US" dirty="0"/>
-              <a:t>Review morphology focus. Have students identify the base word and affix in each example.</a:t>
+              <a:t>Break the word into base + word part. Ask what the part adds to the meaning.</a:t>
             </a:r>
             <a:endParaRPr lang="en-US" dirty="0"/>
           </a:p>
@@ -690,7 +691,7 @@
           <a:p>
             <a:r>
               <a:rPr lang="en-US" dirty="0"/>
-              <a:t>Go through each vocabulary word. For flip cards, have students guess the definition before revealing.</a:t>
+              <a:t>Each word appears in the chapters read this week, in the author’s own sentence.</a:t>
             </a:r>
             <a:endParaRPr lang="en-US" dirty="0"/>
           </a:p>
@@ -778,7 +779,7 @@
           <a:p>
             <a:r>
               <a:rPr lang="en-US" dirty="0"/>
-              <a:t>Reading focus slide. Use pause-and-think questions during reading. Copywork can be done after reading.</a:t>
+              <a:t>Answers: Aslan — proper noun, needs capital A., The White Witch — proper noun title, both words capitalized., Peter — proper noun, needs capital P., Already correct — Edmund and Witch are capitalized.</a:t>
             </a:r>
             <a:endParaRPr lang="en-US" dirty="0"/>
           </a:p>
@@ -866,7 +867,7 @@
           <a:p>
             <a:r>
               <a:rPr lang="en-US" dirty="0"/>
-              <a:t>Transition to the writing workshop assignment in Canvas.</a:t>
+              <a:t>Answers: Aslan — proper noun, needs capital A., The White Witch — proper noun title, both words capitalized., Peter — proper noun, needs capital P., Already correct — Edmund and Witch are capitalized.</a:t>
             </a:r>
             <a:endParaRPr lang="en-US" dirty="0"/>
           </a:p>
@@ -890,6 +891,94 @@
             <a:fld id="{F7021451-1387-4CA6-816F-3879F97B5CBC}" type="slidenum">
               <a:rPr lang="en-US"/>
               <a:t>13</a:t>
+            </a:fld>
+            <a:endParaRPr lang="en-US"/>
+          </a:p>
+        </p:txBody>
+      </p:sp>
+    </p:spTree>
+    <p:extLst>
+      <p:ext uri="{BB962C8B-B14F-4D97-AF65-F5344CB8AC3E}">
+        <p14:creationId xmlns:p14="http://schemas.microsoft.com/office/powerpoint/2010/main" val="1024086991"/>
+      </p:ext>
+    </p:extLst>
+  </p:cSld>
+  <p:clrMapOvr>
+    <a:masterClrMapping/>
+  </p:clrMapOvr>
+</p:notes>
+</file>
+
+<file path=ppt/notesSlides/notesSlide14.xml><?xml version="1.0" encoding="utf-8"?>
+<p:notes xmlns:a="http://schemas.openxmlformats.org/drawingml/2006/main" xmlns:r="http://schemas.openxmlformats.org/officeDocument/2006/relationships" xmlns:p="http://schemas.openxmlformats.org/presentationml/2006/main">
+  <p:cSld>
+    <p:spTree>
+      <p:nvGrpSpPr>
+        <p:cNvPr id="1" name=""/>
+        <p:cNvGrpSpPr/>
+        <p:nvPr/>
+      </p:nvGrpSpPr>
+      <p:grpSpPr>
+        <a:xfrm>
+          <a:off x="0" y="0"/>
+          <a:ext cx="0" cy="0"/>
+          <a:chOff x="0" y="0"/>
+          <a:chExt cx="0" cy="0"/>
+        </a:xfrm>
+      </p:grpSpPr>
+      <p:sp>
+        <p:nvSpPr>
+          <p:cNvPr id="2" name="Slide Image Placeholder 1"/>
+          <p:cNvSpPr>
+            <a:spLocks noGrp="1" noRot="1" noChangeAspect="1"/>
+          </p:cNvSpPr>
+          <p:nvPr>
+            <p:ph type="sldImg"/>
+          </p:nvPr>
+        </p:nvSpPr>
+        <p:spPr/>
+      </p:sp>
+      <p:sp>
+        <p:nvSpPr>
+          <p:cNvPr id="3" name="Notes Placeholder 2"/>
+          <p:cNvSpPr>
+            <a:spLocks noGrp="1"/>
+          </p:cNvSpPr>
+          <p:nvPr>
+            <p:ph type="body" idx="1"/>
+          </p:nvPr>
+        </p:nvSpPr>
+        <p:spPr/>
+        <p:txBody>
+          <a:bodyPr/>
+          <a:lstStyle/>
+          <a:p>
+            <a:r>
+              <a:rPr lang="en-US" dirty="0"/>
+              <a:t>Read the chapters, then return to the pause questions.</a:t>
+            </a:r>
+            <a:endParaRPr lang="en-US" dirty="0"/>
+          </a:p>
+        </p:txBody>
+      </p:sp>
+      <p:sp>
+        <p:nvSpPr>
+          <p:cNvPr id="4" name="Slide Number Placeholder 3"/>
+          <p:cNvSpPr>
+            <a:spLocks noGrp="1"/>
+          </p:cNvSpPr>
+          <p:nvPr>
+            <p:ph type="sldNum" sz="quarter" idx="10"/>
+          </p:nvPr>
+        </p:nvSpPr>
+        <p:spPr/>
+        <p:txBody>
+          <a:bodyPr/>
+          <a:lstStyle/>
+          <a:p>
+            <a:fld id="{F7021451-1387-4CA6-816F-3879F97B5CBC}" type="slidenum">
+              <a:rPr lang="en-US"/>
+              <a:t>14</a:t>
             </a:fld>
             <a:endParaRPr lang="en-US"/>
           </a:p>
@@ -954,7 +1043,7 @@
           <a:p>
             <a:r>
               <a:rPr lang="en-US" dirty="0"/>
-              <a:t>Read the prompt aloud once. Give students about 1 minute to read it again silently and think. Remind them: there is no wrong answer — just write what comes to mind. Advance to the writing slide when ready.</a:t>
+              <a:t>Read the prompt aloud. Give students a moment to think before writing.</a:t>
             </a:r>
             <a:endParaRPr lang="en-US" dirty="0"/>
           </a:p>
@@ -1042,7 +1131,7 @@
           <a:p>
             <a:r>
               <a:rPr lang="en-US" dirty="0"/>
-              <a:t>Set a 5-minute timer. Walk the room quietly. If a student stops, gently encourage them: "Keep writing — even one more sentence." The goal is sustained writing, not perfection. Do not interrupt to correct spelling or grammar during this time.</a:t>
+              <a:t>Five minutes of sustained writing. Stamina over polish. Do not correct spelling now.</a:t>
             </a:r>
             <a:endParaRPr lang="en-US" dirty="0"/>
           </a:p>
@@ -1130,7 +1219,7 @@
           <a:p>
             <a:r>
               <a:rPr lang="en-US" dirty="0"/>
-              <a:t>Set a 1-minute timer. Remind students: we are only fixing ONE thing today — Did I explain how I changed, not just that I changed?. They should also do a quick conventions check (capitals, punctuation, spelling). They do NOT need to rewrite — just fix and improve. Revision = improving ideas; Editing = fixing conventions. Keep them separate in your language.</a:t>
+              <a:t>One fix only. Editing is conventions; revision is ideas. Name which one you are asking for.</a:t>
             </a:r>
             <a:endParaRPr lang="en-US" dirty="0"/>
           </a:p>
@@ -1218,7 +1307,7 @@
           <a:p>
             <a:r>
               <a:rPr lang="en-US" dirty="0"/>
-              <a:t>Call on 3-5 students to share. Respond with genuine interest: "I love how you described that" or "That's a really interesting idea." Avoid correcting grammar or spelling during share time — this is about celebrating writing. If time is short, have 2-3 students share in chat instead.</a:t>
+              <a:t>Two or three volunteers. Praise something specific in each.</a:t>
             </a:r>
             <a:endParaRPr lang="en-US" dirty="0"/>
           </a:p>
@@ -1306,7 +1395,7 @@
           <a:p>
             <a:r>
               <a:rPr lang="en-US" dirty="0"/>
-              <a:t>Review the big question and reading lens with students before reading.</a:t>
+              <a:t>Reading lens: Good readers in a fantasy story slow down and pay attention to how the author builds the world . Details of setting, character, and pattern all work together to create meaning.</a:t>
             </a:r>
             <a:endParaRPr lang="en-US" dirty="0"/>
           </a:p>
@@ -1394,7 +1483,8 @@
           <a:p>
             <a:r>
               <a:rPr lang="en-US" dirty="0"/>
-              <a:t>Read the model sentence aloud. Ask students: what do you notice about the punctuation and capitalization?</a:t>
+              <a:t>Model sentence in the lesson: Edmund fought bravely battle, Peter battlefield.
+Tap through each highlighted word in the lesson and name what it does right before moving to the fix-it.</a:t>
             </a:r>
             <a:endParaRPr lang="en-US" dirty="0"/>
           </a:p>
@@ -1482,7 +1572,8 @@
           <a:p>
             <a:r>
               <a:rPr lang="en-US" dirty="0"/>
-              <a:t>Give students 1-2 minutes to fix the sentence. Walk the room and check.</a:t>
+              <a:t>Corrected: Corrected: The White Witch was defeated at last, and Narnia had four kings and queens for the first time. 
+Look for: The White Witch = proper noun (capital W for Witch); comma before and joining two clauses; Narnia = proper noun (capital N); period ends.</a:t>
             </a:r>
             <a:endParaRPr lang="en-US" dirty="0"/>
           </a:p>
@@ -1570,7 +1661,8 @@
           <a:p>
             <a:r>
               <a:rPr lang="en-US" dirty="0"/>
-              <a:t>Reveal the corrected version. Point out each fix: capitalization, punctuation, spelling.</a:t>
+              <a:t>Corrected: Corrected: The White Witch was defeated at last, and Narnia had four kings and queens for the first time. 
+Look for: The White Witch = proper noun (capital W for Witch); comma before and joining two clauses; Narnia = proper noun (capital N); period ends.</a:t>
             </a:r>
             <a:endParaRPr lang="en-US" dirty="0"/>
           </a:p>
@@ -1951,8 +2043,8 @@
         </p:nvSpPr>
         <p:spPr>
           <a:xfrm>
-            <a:off x="457200" y="914400"/>
-            <a:ext cx="8229600" cy="1097280"/>
+            <a:off x="0" y="822960"/>
+            <a:ext cx="9144000" cy="822960"/>
           </a:xfrm>
           <a:prstGeom prst="rect">
             <a:avLst/>
@@ -1968,7 +2060,43 @@
               <a:buNone/>
             </a:pPr>
             <a:r>
-              <a:rPr lang="en-US" sz="4000" b="1" dirty="0">
+              <a:rPr lang="en-US" sz="5200" dirty="0">
+                <a:solidFill>
+                  <a:srgbClr val="000000"/>
+                </a:solidFill>
+              </a:rPr>
+              <a:t>🦁</a:t>
+            </a:r>
+            <a:endParaRPr lang="en-US" sz="5200" dirty="0"/>
+          </a:p>
+        </p:txBody>
+      </p:sp>
+      <p:sp>
+        <p:nvSpPr>
+          <p:cNvPr id="3" name="Text 1"/>
+          <p:cNvSpPr/>
+          <p:nvPr/>
+        </p:nvSpPr>
+        <p:spPr>
+          <a:xfrm>
+            <a:off x="457200" y="1691640"/>
+            <a:ext cx="8229600" cy="566928"/>
+          </a:xfrm>
+          <a:prstGeom prst="rect">
+            <a:avLst/>
+          </a:prstGeom>
+          <a:noFill/>
+          <a:ln/>
+        </p:spPr>
+        <p:txBody>
+          <a:bodyPr wrap="square" lIns="0" tIns="0" rIns="0" bIns="0" rtlCol="0" anchor="ctr"/>
+          <a:lstStyle/>
+          <a:p>
+            <a:pPr algn="ctr" indent="0" marL="0">
+              <a:buNone/>
+            </a:pPr>
+            <a:r>
+              <a:rPr lang="en-US" sz="2600" b="1" dirty="0">
                 <a:solidFill>
                   <a:srgbClr val="FFFFFF"/>
                 </a:solidFill>
@@ -1976,22 +2104,22 @@
                 <a:ea typeface="Calibri" pitchFamily="34" charset="-122"/>
                 <a:cs typeface="Calibri" pitchFamily="34" charset="-120"/>
               </a:rPr>
-              <a:t>🦁  Week 30 · Day 2</a:t>
-            </a:r>
-            <a:endParaRPr lang="en-US" sz="4000" dirty="0"/>
-          </a:p>
-        </p:txBody>
-      </p:sp>
-      <p:sp>
-        <p:nvSpPr>
-          <p:cNvPr id="3" name="Text 1"/>
-          <p:cNvSpPr/>
-          <p:nvPr/>
-        </p:nvSpPr>
-        <p:spPr>
-          <a:xfrm>
-            <a:off x="457200" y="2103120"/>
-            <a:ext cx="8229600" cy="731520"/>
+              <a:t>The Lion, the Witch and the Wardrobe</a:t>
+            </a:r>
+            <a:endParaRPr lang="en-US" sz="2600" dirty="0"/>
+          </a:p>
+        </p:txBody>
+      </p:sp>
+      <p:sp>
+        <p:nvSpPr>
+          <p:cNvPr id="4" name="Text 2"/>
+          <p:cNvSpPr/>
+          <p:nvPr/>
+        </p:nvSpPr>
+        <p:spPr>
+          <a:xfrm>
+            <a:off x="457200" y="2331720"/>
+            <a:ext cx="8229600" cy="411480"/>
           </a:xfrm>
           <a:prstGeom prst="rect">
             <a:avLst/>
@@ -2007,7 +2135,7 @@
               <a:buNone/>
             </a:pPr>
             <a:r>
-              <a:rPr lang="en-US" sz="1800" dirty="0">
+              <a:rPr lang="en-US" sz="2000" dirty="0">
                 <a:solidFill>
                   <a:srgbClr val="4A90D9"/>
                 </a:solidFill>
@@ -2015,22 +2143,22 @@
                 <a:ea typeface="Calibri" pitchFamily="34" charset="-122"/>
                 <a:cs typeface="Calibri" pitchFamily="34" charset="-120"/>
               </a:rPr>
-              <a:t>The Lion, the Witch and the Wardrobe — Lesson 30.2</a:t>
-            </a:r>
-            <a:endParaRPr lang="en-US" sz="1800" dirty="0"/>
-          </a:p>
-        </p:txBody>
-      </p:sp>
-      <p:sp>
-        <p:nvSpPr>
-          <p:cNvPr id="4" name="Text 2"/>
-          <p:cNvSpPr/>
-          <p:nvPr/>
-        </p:nvSpPr>
-        <p:spPr>
-          <a:xfrm>
-            <a:off x="457200" y="4114800"/>
-            <a:ext cx="8229600" cy="457200"/>
+              <a:t>Lesson 30.2  ·  Reading: Ch. 16–17 + Synthesis</a:t>
+            </a:r>
+            <a:endParaRPr lang="en-US" sz="2000" dirty="0"/>
+          </a:p>
+        </p:txBody>
+      </p:sp>
+      <p:sp>
+        <p:nvSpPr>
+          <p:cNvPr id="5" name="Text 3"/>
+          <p:cNvSpPr/>
+          <p:nvPr/>
+        </p:nvSpPr>
+        <p:spPr>
+          <a:xfrm>
+            <a:off x="457200" y="2880360"/>
+            <a:ext cx="8229600" cy="320040"/>
           </a:xfrm>
           <a:prstGeom prst="rect">
             <a:avLst/>
@@ -2046,17 +2174,17 @@
               <a:buNone/>
             </a:pPr>
             <a:r>
-              <a:rPr lang="en-US" sz="1300" dirty="0">
-                <a:solidFill>
-                  <a:srgbClr val="AAAAAA"/>
-                </a:solidFill>
-                <a:latin typeface="Calibri" pitchFamily="34" charset="0"/>
-                <a:ea typeface="Calibri" pitchFamily="34" charset="-122"/>
-                <a:cs typeface="Calibri" pitchFamily="34" charset="-120"/>
-              </a:rPr>
-              <a:t>Optima Academy Online · 3rd Grade ELA</a:t>
-            </a:r>
-            <a:endParaRPr lang="en-US" sz="1300" dirty="0"/>
+              <a:rPr lang="en-US" sz="1400" dirty="0">
+                <a:solidFill>
+                  <a:srgbClr val="C9BCE4"/>
+                </a:solidFill>
+                <a:latin typeface="Calibri" pitchFamily="34" charset="0"/>
+                <a:ea typeface="Calibri" pitchFamily="34" charset="-122"/>
+                <a:cs typeface="Calibri" pitchFamily="34" charset="-120"/>
+              </a:rPr>
+              <a:t>Grade 3 ELA  ·  Virtue: Loyalty</a:t>
+            </a:r>
+            <a:endParaRPr lang="en-US" sz="1400" dirty="0"/>
           </a:p>
         </p:txBody>
       </p:sp>
@@ -2094,65 +2222,62 @@
       </p:grpSpPr>
       <p:sp>
         <p:nvSpPr>
-          <p:cNvPr id="2" name="Text 0"/>
-          <p:cNvSpPr/>
-          <p:nvPr/>
-        </p:nvSpPr>
-        <p:spPr>
-          <a:xfrm>
-            <a:off x="365760" y="164592"/>
-            <a:ext cx="8412480" cy="566928"/>
-          </a:xfrm>
-          <a:prstGeom prst="rect">
-            <a:avLst/>
-          </a:prstGeom>
-          <a:noFill/>
-          <a:ln/>
-        </p:spPr>
-        <p:txBody>
-          <a:bodyPr wrap="square" lIns="0" tIns="0" rIns="0" bIns="0" rtlCol="0" anchor="ctr"/>
-          <a:lstStyle/>
-          <a:p>
-            <a:pPr algn="l" indent="0" marL="0">
-              <a:buNone/>
-            </a:pPr>
-            <a:r>
-              <a:rPr lang="en-US" sz="2800" b="1" dirty="0">
-                <a:solidFill>
-                  <a:srgbClr val="0E1C42"/>
-                </a:solidFill>
-                <a:latin typeface="Calibri" pitchFamily="34" charset="0"/>
-                <a:ea typeface="Calibri" pitchFamily="34" charset="-122"/>
-                <a:cs typeface="Calibri" pitchFamily="34" charset="-120"/>
-              </a:rPr>
-              <a:t>🌱 Morphology: Review roots and bases from the year</a:t>
-            </a:r>
-            <a:endParaRPr lang="en-US" sz="2800" dirty="0"/>
-          </a:p>
-        </p:txBody>
-      </p:sp>
-      <p:sp>
-        <p:nvSpPr>
-          <p:cNvPr id="3" name="Shape 1"/>
-          <p:cNvSpPr/>
-          <p:nvPr/>
-        </p:nvSpPr>
-        <p:spPr>
-          <a:xfrm>
-            <a:off x="365760" y="749808"/>
-            <a:ext cx="8412480" cy="0"/>
-          </a:xfrm>
-          <a:prstGeom prst="line">
-            <a:avLst/>
-          </a:prstGeom>
-          <a:noFill/>
-          <a:ln w="19050">
-            <a:solidFill>
-              <a:srgbClr val="8B6FC0"/>
-            </a:solidFill>
-            <a:prstDash val="solid"/>
-          </a:ln>
-        </p:spPr>
+          <p:cNvPr id="2" name="Shape 0"/>
+          <p:cNvSpPr/>
+          <p:nvPr/>
+        </p:nvSpPr>
+        <p:spPr>
+          <a:xfrm>
+            <a:off x="0" y="0"/>
+            <a:ext cx="9144000" cy="566928"/>
+          </a:xfrm>
+          <a:prstGeom prst="rect">
+            <a:avLst/>
+          </a:prstGeom>
+          <a:solidFill>
+            <a:srgbClr val="4A90D9"/>
+          </a:solidFill>
+          <a:ln/>
+        </p:spPr>
+      </p:sp>
+      <p:sp>
+        <p:nvSpPr>
+          <p:cNvPr id="3" name="Text 1"/>
+          <p:cNvSpPr/>
+          <p:nvPr/>
+        </p:nvSpPr>
+        <p:spPr>
+          <a:xfrm>
+            <a:off x="365760" y="54864"/>
+            <a:ext cx="8412480" cy="457200"/>
+          </a:xfrm>
+          <a:prstGeom prst="rect">
+            <a:avLst/>
+          </a:prstGeom>
+          <a:noFill/>
+          <a:ln/>
+        </p:spPr>
+        <p:txBody>
+          <a:bodyPr wrap="square" lIns="0" tIns="0" rIns="0" bIns="0" rtlCol="0" anchor="ctr"/>
+          <a:lstStyle/>
+          <a:p>
+            <a:pPr indent="0" marL="0">
+              <a:buNone/>
+            </a:pPr>
+            <a:r>
+              <a:rPr lang="en-US" sz="2200" b="1" dirty="0">
+                <a:solidFill>
+                  <a:srgbClr val="FFFFFF"/>
+                </a:solidFill>
+                <a:latin typeface="Calibri" pitchFamily="34" charset="0"/>
+                <a:ea typeface="Calibri" pitchFamily="34" charset="-122"/>
+                <a:cs typeface="Calibri" pitchFamily="34" charset="-120"/>
+              </a:rPr>
+              <a:t>🌱  Morphology</a:t>
+            </a:r>
+            <a:endParaRPr lang="en-US" sz="2200" dirty="0"/>
+          </a:p>
+        </p:txBody>
       </p:sp>
       <p:sp>
         <p:nvSpPr>
@@ -2162,32 +2287,32 @@
         </p:nvSpPr>
         <p:spPr>
           <a:xfrm>
-            <a:off x="457200" y="1005840"/>
-            <a:ext cx="8046720" cy="292608"/>
-          </a:xfrm>
-          <a:prstGeom prst="rect">
-            <a:avLst/>
-          </a:prstGeom>
-          <a:noFill/>
-          <a:ln/>
-        </p:spPr>
-        <p:txBody>
-          <a:bodyPr wrap="square" lIns="0" tIns="0" rIns="0" bIns="0" rtlCol="0" anchor="ctr"/>
-          <a:lstStyle/>
-          <a:p>
-            <a:pPr indent="0" marL="0">
-              <a:buNone/>
-            </a:pPr>
-            <a:r>
-              <a:rPr lang="en-US" sz="1100" b="1" spc="200" kern="0" dirty="0">
-                <a:solidFill>
-                  <a:srgbClr val="64748B"/>
-                </a:solidFill>
-                <a:latin typeface="Calibri" pitchFamily="34" charset="0"/>
-                <a:ea typeface="Calibri" pitchFamily="34" charset="-122"/>
-                <a:cs typeface="Calibri" pitchFamily="34" charset="-120"/>
-              </a:rPr>
-              <a:t>CONCEPT EXAMPLES</a:t>
+            <a:off x="365760" y="804672"/>
+            <a:ext cx="8229600" cy="237744"/>
+          </a:xfrm>
+          <a:prstGeom prst="rect">
+            <a:avLst/>
+          </a:prstGeom>
+          <a:noFill/>
+          <a:ln/>
+        </p:spPr>
+        <p:txBody>
+          <a:bodyPr wrap="square" lIns="0" tIns="0" rIns="0" bIns="0" rtlCol="0" anchor="ctr"/>
+          <a:lstStyle/>
+          <a:p>
+            <a:pPr indent="0" marL="0">
+              <a:buNone/>
+            </a:pPr>
+            <a:r>
+              <a:rPr lang="en-US" sz="1100" b="1" spc="100" kern="0" dirty="0">
+                <a:solidFill>
+                  <a:srgbClr val="8B6FC0"/>
+                </a:solidFill>
+                <a:latin typeface="Calibri" pitchFamily="34" charset="0"/>
+                <a:ea typeface="Calibri" pitchFamily="34" charset="-122"/>
+                <a:cs typeface="Calibri" pitchFamily="34" charset="-120"/>
+              </a:rPr>
+              <a:t>REVIEW ROOTS AND BASES FROM THE YEAR</a:t>
             </a:r>
             <a:endParaRPr lang="en-US" sz="1100" dirty="0"/>
           </a:p>
@@ -2195,30 +2320,59 @@
       </p:sp>
       <p:sp>
         <p:nvSpPr>
-          <p:cNvPr id="5" name="Text 3"/>
-          <p:cNvSpPr/>
-          <p:nvPr/>
-        </p:nvSpPr>
-        <p:spPr>
-          <a:xfrm>
-            <a:off x="640080" y="1325880"/>
-            <a:ext cx="7863840" cy="320040"/>
-          </a:xfrm>
-          <a:prstGeom prst="rect">
-            <a:avLst/>
-          </a:prstGeom>
-          <a:noFill/>
-          <a:ln/>
-        </p:spPr>
-        <p:txBody>
-          <a:bodyPr wrap="square" lIns="0" tIns="0" rIns="0" bIns="0" rtlCol="0" anchor="ctr"/>
-          <a:lstStyle/>
-          <a:p>
-            <a:pPr indent="0" marL="0">
-              <a:buNone/>
-            </a:pPr>
-            <a:r>
-              <a:rPr lang="en-US" sz="1300" dirty="0">
+          <p:cNvPr id="5" name="Shape 3"/>
+          <p:cNvSpPr/>
+          <p:nvPr/>
+        </p:nvSpPr>
+        <p:spPr>
+          <a:xfrm>
+            <a:off x="365760" y="1097280"/>
+            <a:ext cx="8412480" cy="621792"/>
+          </a:xfrm>
+          <a:prstGeom prst="roundRect">
+            <a:avLst>
+              <a:gd name="adj" fmla="val 14706"/>
+            </a:avLst>
+          </a:prstGeom>
+          <a:solidFill>
+            <a:srgbClr val="F0E8FF"/>
+          </a:solidFill>
+          <a:ln/>
+          <a:effectLst>
+            <a:outerShdw sx="100000" sy="100000" kx="0" ky="0" algn="bl" rotWithShape="0" blurRad="101600" dist="38100" dir="2700000">
+              <a:srgbClr val="000000">
+                <a:alpha val="12000"/>
+              </a:srgbClr>
+            </a:outerShdw>
+          </a:effectLst>
+        </p:spPr>
+      </p:sp>
+      <p:sp>
+        <p:nvSpPr>
+          <p:cNvPr id="6" name="Text 4"/>
+          <p:cNvSpPr/>
+          <p:nvPr/>
+        </p:nvSpPr>
+        <p:spPr>
+          <a:xfrm>
+            <a:off x="594360" y="1216152"/>
+            <a:ext cx="7863840" cy="384048"/>
+          </a:xfrm>
+          <a:prstGeom prst="rect">
+            <a:avLst/>
+          </a:prstGeom>
+          <a:noFill/>
+          <a:ln/>
+        </p:spPr>
+        <p:txBody>
+          <a:bodyPr wrap="square" lIns="0" tIns="0" rIns="0" bIns="0" rtlCol="0" anchor="ctr"/>
+          <a:lstStyle/>
+          <a:p>
+            <a:pPr indent="0" marL="0">
+              <a:buNone/>
+            </a:pPr>
+            <a:r>
+              <a:rPr lang="en-US" sz="1500" dirty="0">
                 <a:solidFill>
                   <a:srgbClr val="1E293B"/>
                 </a:solidFill>
@@ -2226,9 +2380,9 @@
                 <a:ea typeface="Calibri" pitchFamily="34" charset="-122"/>
                 <a:cs typeface="Calibri" pitchFamily="34" charset="-120"/>
               </a:rPr>
-              <a:t>• 📌 Identify: Does this word use Review ?</a:t>
-            </a:r>
-            <a:endParaRPr lang="en-US" sz="1300" dirty="0"/>
+              <a:t>🌱  Review roots and bases from the year. Look at each word carefully.</a:t>
+            </a:r>
+            <a:endParaRPr lang="en-US" sz="1500" dirty="0"/>
           </a:p>
         </p:txBody>
       </p:sp>
@@ -2266,84 +2420,120 @@
       </p:grpSpPr>
       <p:sp>
         <p:nvSpPr>
-          <p:cNvPr id="2" name="Text 0"/>
-          <p:cNvSpPr/>
-          <p:nvPr/>
-        </p:nvSpPr>
-        <p:spPr>
-          <a:xfrm>
-            <a:off x="365760" y="164592"/>
-            <a:ext cx="8412480" cy="566928"/>
-          </a:xfrm>
-          <a:prstGeom prst="rect">
-            <a:avLst/>
-          </a:prstGeom>
-          <a:noFill/>
-          <a:ln/>
-        </p:spPr>
-        <p:txBody>
-          <a:bodyPr wrap="square" lIns="0" tIns="0" rIns="0" bIns="0" rtlCol="0" anchor="ctr"/>
-          <a:lstStyle/>
-          <a:p>
-            <a:pPr algn="l" indent="0" marL="0">
-              <a:buNone/>
-            </a:pPr>
-            <a:r>
-              <a:rPr lang="en-US" sz="2800" b="1" dirty="0">
-                <a:solidFill>
-                  <a:srgbClr val="0E1C42"/>
-                </a:solidFill>
-                <a:latin typeface="Calibri" pitchFamily="34" charset="0"/>
-                <a:ea typeface="Calibri" pitchFamily="34" charset="-122"/>
-                <a:cs typeface="Calibri" pitchFamily="34" charset="-120"/>
-              </a:rPr>
-              <a:t>🔤 Vocabulary</a:t>
-            </a:r>
-            <a:endParaRPr lang="en-US" sz="2800" dirty="0"/>
-          </a:p>
-        </p:txBody>
-      </p:sp>
-      <p:sp>
-        <p:nvSpPr>
-          <p:cNvPr id="3" name="Shape 1"/>
-          <p:cNvSpPr/>
-          <p:nvPr/>
-        </p:nvSpPr>
-        <p:spPr>
-          <a:xfrm>
-            <a:off x="365760" y="749808"/>
-            <a:ext cx="8412480" cy="0"/>
-          </a:xfrm>
-          <a:prstGeom prst="line">
-            <a:avLst/>
-          </a:prstGeom>
-          <a:noFill/>
-          <a:ln w="19050">
-            <a:solidFill>
-              <a:srgbClr val="55C8E8"/>
-            </a:solidFill>
-            <a:prstDash val="solid"/>
-          </a:ln>
-        </p:spPr>
-      </p:sp>
-      <p:sp>
-        <p:nvSpPr>
-          <p:cNvPr id="4" name="Shape 2"/>
-          <p:cNvSpPr/>
-          <p:nvPr/>
-        </p:nvSpPr>
-        <p:spPr>
-          <a:xfrm>
-            <a:off x="457200" y="1005840"/>
-            <a:ext cx="3840480" cy="640080"/>
+          <p:cNvPr id="2" name="Shape 0"/>
+          <p:cNvSpPr/>
+          <p:nvPr/>
+        </p:nvSpPr>
+        <p:spPr>
+          <a:xfrm>
+            <a:off x="0" y="0"/>
+            <a:ext cx="9144000" cy="566928"/>
+          </a:xfrm>
+          <a:prstGeom prst="rect">
+            <a:avLst/>
+          </a:prstGeom>
+          <a:solidFill>
+            <a:srgbClr val="55C8E8"/>
+          </a:solidFill>
+          <a:ln/>
+        </p:spPr>
+      </p:sp>
+      <p:sp>
+        <p:nvSpPr>
+          <p:cNvPr id="3" name="Text 1"/>
+          <p:cNvSpPr/>
+          <p:nvPr/>
+        </p:nvSpPr>
+        <p:spPr>
+          <a:xfrm>
+            <a:off x="365760" y="54864"/>
+            <a:ext cx="8412480" cy="457200"/>
+          </a:xfrm>
+          <a:prstGeom prst="rect">
+            <a:avLst/>
+          </a:prstGeom>
+          <a:noFill/>
+          <a:ln/>
+        </p:spPr>
+        <p:txBody>
+          <a:bodyPr wrap="square" lIns="0" tIns="0" rIns="0" bIns="0" rtlCol="0" anchor="ctr"/>
+          <a:lstStyle/>
+          <a:p>
+            <a:pPr indent="0" marL="0">
+              <a:buNone/>
+            </a:pPr>
+            <a:r>
+              <a:rPr lang="en-US" sz="2200" b="1" dirty="0">
+                <a:solidFill>
+                  <a:srgbClr val="FFFFFF"/>
+                </a:solidFill>
+                <a:latin typeface="Calibri" pitchFamily="34" charset="0"/>
+                <a:ea typeface="Calibri" pitchFamily="34" charset="-122"/>
+                <a:cs typeface="Calibri" pitchFamily="34" charset="-120"/>
+              </a:rPr>
+              <a:t>🔤  Vocabulary</a:t>
+            </a:r>
+            <a:endParaRPr lang="en-US" sz="2200" dirty="0"/>
+          </a:p>
+        </p:txBody>
+      </p:sp>
+      <p:sp>
+        <p:nvSpPr>
+          <p:cNvPr id="4" name="Text 2"/>
+          <p:cNvSpPr/>
+          <p:nvPr/>
+        </p:nvSpPr>
+        <p:spPr>
+          <a:xfrm>
+            <a:off x="365760" y="804672"/>
+            <a:ext cx="8229600" cy="237744"/>
+          </a:xfrm>
+          <a:prstGeom prst="rect">
+            <a:avLst/>
+          </a:prstGeom>
+          <a:noFill/>
+          <a:ln/>
+        </p:spPr>
+        <p:txBody>
+          <a:bodyPr wrap="square" lIns="0" tIns="0" rIns="0" bIns="0" rtlCol="0" anchor="ctr"/>
+          <a:lstStyle/>
+          <a:p>
+            <a:pPr indent="0" marL="0">
+              <a:buNone/>
+            </a:pPr>
+            <a:r>
+              <a:rPr lang="en-US" sz="1100" b="1" spc="100" kern="0" dirty="0">
+                <a:solidFill>
+                  <a:srgbClr val="55C8E8"/>
+                </a:solidFill>
+                <a:latin typeface="Calibri" pitchFamily="34" charset="0"/>
+                <a:ea typeface="Calibri" pitchFamily="34" charset="-122"/>
+                <a:cs typeface="Calibri" pitchFamily="34" charset="-120"/>
+              </a:rPr>
+              <a:t>IDENTIFY &amp; MATCH</a:t>
+            </a:r>
+            <a:endParaRPr lang="en-US" sz="1100" dirty="0"/>
+          </a:p>
+        </p:txBody>
+      </p:sp>
+      <p:sp>
+        <p:nvSpPr>
+          <p:cNvPr id="5" name="Shape 3"/>
+          <p:cNvSpPr/>
+          <p:nvPr/>
+        </p:nvSpPr>
+        <p:spPr>
+          <a:xfrm>
+            <a:off x="365760" y="1097280"/>
+            <a:ext cx="8412480" cy="658368"/>
           </a:xfrm>
           <a:prstGeom prst="roundRect">
             <a:avLst>
-              <a:gd name="adj" fmla="val 14286"/>
+              <a:gd name="adj" fmla="val 13889"/>
             </a:avLst>
           </a:prstGeom>
           <a:solidFill>
-            <a:srgbClr val="FEF6E8"/>
+            <a:srgbClr val="E5F7FC"/>
           </a:solidFill>
           <a:ln/>
           <a:effectLst>
@@ -2357,30 +2547,30 @@
       </p:sp>
       <p:sp>
         <p:nvSpPr>
-          <p:cNvPr id="5" name="Text 3"/>
-          <p:cNvSpPr/>
-          <p:nvPr/>
-        </p:nvSpPr>
-        <p:spPr>
-          <a:xfrm>
-            <a:off x="594360" y="1060704"/>
-            <a:ext cx="3566160" cy="530352"/>
-          </a:xfrm>
-          <a:prstGeom prst="rect">
-            <a:avLst/>
-          </a:prstGeom>
-          <a:noFill/>
-          <a:ln/>
-        </p:spPr>
-        <p:txBody>
-          <a:bodyPr wrap="square" lIns="0" tIns="0" rIns="0" bIns="0" rtlCol="0" anchor="ctr"/>
-          <a:lstStyle/>
-          <a:p>
-            <a:pPr indent="0" marL="0">
-              <a:buNone/>
-            </a:pPr>
-            <a:r>
-              <a:rPr lang="en-US" sz="1500" b="1" dirty="0">
+          <p:cNvPr id="6" name="Text 4"/>
+          <p:cNvSpPr/>
+          <p:nvPr/>
+        </p:nvSpPr>
+        <p:spPr>
+          <a:xfrm>
+            <a:off x="594360" y="1225296"/>
+            <a:ext cx="7863840" cy="420624"/>
+          </a:xfrm>
+          <a:prstGeom prst="rect">
+            <a:avLst/>
+          </a:prstGeom>
+          <a:noFill/>
+          <a:ln/>
+        </p:spPr>
+        <p:txBody>
+          <a:bodyPr wrap="square" lIns="0" tIns="0" rIns="0" bIns="0" rtlCol="0" anchor="ctr"/>
+          <a:lstStyle/>
+          <a:p>
+            <a:pPr indent="0" marL="0">
+              <a:buNone/>
+            </a:pPr>
+            <a:r>
+              <a:rPr lang="en-US" sz="1700" b="1" dirty="0">
                 <a:solidFill>
                   <a:srgbClr val="0E1C42"/>
                 </a:solidFill>
@@ -2388,19 +2578,13 @@
                 <a:ea typeface="Calibri" pitchFamily="34" charset="-122"/>
                 <a:cs typeface="Calibri" pitchFamily="34" charset="-120"/>
               </a:rPr>
-              <a:t>sovereign</a:t>
-            </a:r>
-            <a:pPr indent="0" marL="0">
-              <a:buNone/>
-            </a:pPr>
-            <a:endParaRPr lang="en-US" sz="1500" dirty="0"/>
-          </a:p>
-          <a:p>
-            <a:pPr indent="0" marL="0">
-              <a:buNone/>
-            </a:pPr>
-            <a:r>
-              <a:rPr lang="en-US" sz="1200" dirty="0">
+              <a:t>sovereign  </a:t>
+            </a:r>
+            <a:pPr indent="0" marL="0">
+              <a:buNone/>
+            </a:pPr>
+            <a:r>
+              <a:rPr lang="en-US" sz="1400" dirty="0">
                 <a:solidFill>
                   <a:srgbClr val="1E293B"/>
                 </a:solidFill>
@@ -2410,28 +2594,28 @@
               </a:rPr>
               <a:t>The supreme ruler of a country or kingdom.</a:t>
             </a:r>
-            <a:endParaRPr lang="en-US" sz="1500" dirty="0"/>
-          </a:p>
-        </p:txBody>
-      </p:sp>
-      <p:sp>
-        <p:nvSpPr>
-          <p:cNvPr id="6" name="Shape 4"/>
-          <p:cNvSpPr/>
-          <p:nvPr/>
-        </p:nvSpPr>
-        <p:spPr>
-          <a:xfrm>
-            <a:off x="4572000" y="1005840"/>
-            <a:ext cx="3840480" cy="640080"/>
+            <a:endParaRPr lang="en-US" sz="1700" dirty="0"/>
+          </a:p>
+        </p:txBody>
+      </p:sp>
+      <p:sp>
+        <p:nvSpPr>
+          <p:cNvPr id="7" name="Shape 5"/>
+          <p:cNvSpPr/>
+          <p:nvPr/>
+        </p:nvSpPr>
+        <p:spPr>
+          <a:xfrm>
+            <a:off x="365760" y="1828800"/>
+            <a:ext cx="8412480" cy="658368"/>
           </a:xfrm>
           <a:prstGeom prst="roundRect">
             <a:avLst>
-              <a:gd name="adj" fmla="val 14286"/>
+              <a:gd name="adj" fmla="val 13889"/>
             </a:avLst>
           </a:prstGeom>
           <a:solidFill>
-            <a:srgbClr val="FEF6E8"/>
+            <a:srgbClr val="FFFFFF"/>
           </a:solidFill>
           <a:ln/>
           <a:effectLst>
@@ -2445,30 +2629,30 @@
       </p:sp>
       <p:sp>
         <p:nvSpPr>
-          <p:cNvPr id="7" name="Text 5"/>
-          <p:cNvSpPr/>
-          <p:nvPr/>
-        </p:nvSpPr>
-        <p:spPr>
-          <a:xfrm>
-            <a:off x="4709160" y="1060704"/>
-            <a:ext cx="3566160" cy="530352"/>
-          </a:xfrm>
-          <a:prstGeom prst="rect">
-            <a:avLst/>
-          </a:prstGeom>
-          <a:noFill/>
-          <a:ln/>
-        </p:spPr>
-        <p:txBody>
-          <a:bodyPr wrap="square" lIns="0" tIns="0" rIns="0" bIns="0" rtlCol="0" anchor="ctr"/>
-          <a:lstStyle/>
-          <a:p>
-            <a:pPr indent="0" marL="0">
-              <a:buNone/>
-            </a:pPr>
-            <a:r>
-              <a:rPr lang="en-US" sz="1500" b="1" dirty="0">
+          <p:cNvPr id="8" name="Text 6"/>
+          <p:cNvSpPr/>
+          <p:nvPr/>
+        </p:nvSpPr>
+        <p:spPr>
+          <a:xfrm>
+            <a:off x="594360" y="1956816"/>
+            <a:ext cx="7863840" cy="420624"/>
+          </a:xfrm>
+          <a:prstGeom prst="rect">
+            <a:avLst/>
+          </a:prstGeom>
+          <a:noFill/>
+          <a:ln/>
+        </p:spPr>
+        <p:txBody>
+          <a:bodyPr wrap="square" lIns="0" tIns="0" rIns="0" bIns="0" rtlCol="0" anchor="ctr"/>
+          <a:lstStyle/>
+          <a:p>
+            <a:pPr indent="0" marL="0">
+              <a:buNone/>
+            </a:pPr>
+            <a:r>
+              <a:rPr lang="en-US" sz="1700" b="1" dirty="0">
                 <a:solidFill>
                   <a:srgbClr val="0E1C42"/>
                 </a:solidFill>
@@ -2476,19 +2660,13 @@
                 <a:ea typeface="Calibri" pitchFamily="34" charset="-122"/>
                 <a:cs typeface="Calibri" pitchFamily="34" charset="-120"/>
               </a:rPr>
-              <a:t>coronation</a:t>
-            </a:r>
-            <a:pPr indent="0" marL="0">
-              <a:buNone/>
-            </a:pPr>
-            <a:endParaRPr lang="en-US" sz="1500" dirty="0"/>
-          </a:p>
-          <a:p>
-            <a:pPr indent="0" marL="0">
-              <a:buNone/>
-            </a:pPr>
-            <a:r>
-              <a:rPr lang="en-US" sz="1200" dirty="0">
+              <a:t>coronation  </a:t>
+            </a:r>
+            <a:pPr indent="0" marL="0">
+              <a:buNone/>
+            </a:pPr>
+            <a:r>
+              <a:rPr lang="en-US" sz="1400" dirty="0">
                 <a:solidFill>
                   <a:srgbClr val="1E293B"/>
                 </a:solidFill>
@@ -2498,28 +2676,28 @@
               </a:rPr>
               <a:t>The ceremony in which a ruler is officially crowned.</a:t>
             </a:r>
-            <a:endParaRPr lang="en-US" sz="1500" dirty="0"/>
-          </a:p>
-        </p:txBody>
-      </p:sp>
-      <p:sp>
-        <p:nvSpPr>
-          <p:cNvPr id="8" name="Shape 6"/>
-          <p:cNvSpPr/>
-          <p:nvPr/>
-        </p:nvSpPr>
-        <p:spPr>
-          <a:xfrm>
-            <a:off x="457200" y="1755648"/>
-            <a:ext cx="3840480" cy="640080"/>
+            <a:endParaRPr lang="en-US" sz="1700" dirty="0"/>
+          </a:p>
+        </p:txBody>
+      </p:sp>
+      <p:sp>
+        <p:nvSpPr>
+          <p:cNvPr id="9" name="Shape 7"/>
+          <p:cNvSpPr/>
+          <p:nvPr/>
+        </p:nvSpPr>
+        <p:spPr>
+          <a:xfrm>
+            <a:off x="365760" y="2560320"/>
+            <a:ext cx="8412480" cy="658368"/>
           </a:xfrm>
           <a:prstGeom prst="roundRect">
             <a:avLst>
-              <a:gd name="adj" fmla="val 14286"/>
+              <a:gd name="adj" fmla="val 13889"/>
             </a:avLst>
           </a:prstGeom>
           <a:solidFill>
-            <a:srgbClr val="FEF6E8"/>
+            <a:srgbClr val="E5F7FC"/>
           </a:solidFill>
           <a:ln/>
           <a:effectLst>
@@ -2533,30 +2711,30 @@
       </p:sp>
       <p:sp>
         <p:nvSpPr>
-          <p:cNvPr id="9" name="Text 7"/>
-          <p:cNvSpPr/>
-          <p:nvPr/>
-        </p:nvSpPr>
-        <p:spPr>
-          <a:xfrm>
-            <a:off x="594360" y="1810512"/>
-            <a:ext cx="3566160" cy="530352"/>
-          </a:xfrm>
-          <a:prstGeom prst="rect">
-            <a:avLst/>
-          </a:prstGeom>
-          <a:noFill/>
-          <a:ln/>
-        </p:spPr>
-        <p:txBody>
-          <a:bodyPr wrap="square" lIns="0" tIns="0" rIns="0" bIns="0" rtlCol="0" anchor="ctr"/>
-          <a:lstStyle/>
-          <a:p>
-            <a:pPr indent="0" marL="0">
-              <a:buNone/>
-            </a:pPr>
-            <a:r>
-              <a:rPr lang="en-US" sz="1500" b="1" dirty="0">
+          <p:cNvPr id="10" name="Text 8"/>
+          <p:cNvSpPr/>
+          <p:nvPr/>
+        </p:nvSpPr>
+        <p:spPr>
+          <a:xfrm>
+            <a:off x="594360" y="2688336"/>
+            <a:ext cx="7863840" cy="420624"/>
+          </a:xfrm>
+          <a:prstGeom prst="rect">
+            <a:avLst/>
+          </a:prstGeom>
+          <a:noFill/>
+          <a:ln/>
+        </p:spPr>
+        <p:txBody>
+          <a:bodyPr wrap="square" lIns="0" tIns="0" rIns="0" bIns="0" rtlCol="0" anchor="ctr"/>
+          <a:lstStyle/>
+          <a:p>
+            <a:pPr indent="0" marL="0">
+              <a:buNone/>
+            </a:pPr>
+            <a:r>
+              <a:rPr lang="en-US" sz="1700" b="1" dirty="0">
                 <a:solidFill>
                   <a:srgbClr val="0E1C42"/>
                 </a:solidFill>
@@ -2564,19 +2742,13 @@
                 <a:ea typeface="Calibri" pitchFamily="34" charset="-122"/>
                 <a:cs typeface="Calibri" pitchFamily="34" charset="-120"/>
               </a:rPr>
-              <a:t>reconciled</a:t>
-            </a:r>
-            <a:pPr indent="0" marL="0">
-              <a:buNone/>
-            </a:pPr>
-            <a:endParaRPr lang="en-US" sz="1500" dirty="0"/>
-          </a:p>
-          <a:p>
-            <a:pPr indent="0" marL="0">
-              <a:buNone/>
-            </a:pPr>
-            <a:r>
-              <a:rPr lang="en-US" sz="1200" dirty="0">
+              <a:t>reconciled  </a:t>
+            </a:r>
+            <a:pPr indent="0" marL="0">
+              <a:buNone/>
+            </a:pPr>
+            <a:r>
+              <a:rPr lang="en-US" sz="1400" dirty="0">
                 <a:solidFill>
                   <a:srgbClr val="1E293B"/>
                 </a:solidFill>
@@ -2586,28 +2758,28 @@
               </a:rPr>
               <a:t>Restored to friendship or peace after a conflict.</a:t>
             </a:r>
-            <a:endParaRPr lang="en-US" sz="1500" dirty="0"/>
-          </a:p>
-        </p:txBody>
-      </p:sp>
-      <p:sp>
-        <p:nvSpPr>
-          <p:cNvPr id="10" name="Shape 8"/>
-          <p:cNvSpPr/>
-          <p:nvPr/>
-        </p:nvSpPr>
-        <p:spPr>
-          <a:xfrm>
-            <a:off x="4572000" y="1755648"/>
-            <a:ext cx="3840480" cy="640080"/>
+            <a:endParaRPr lang="en-US" sz="1700" dirty="0"/>
+          </a:p>
+        </p:txBody>
+      </p:sp>
+      <p:sp>
+        <p:nvSpPr>
+          <p:cNvPr id="11" name="Shape 9"/>
+          <p:cNvSpPr/>
+          <p:nvPr/>
+        </p:nvSpPr>
+        <p:spPr>
+          <a:xfrm>
+            <a:off x="365760" y="3291840"/>
+            <a:ext cx="8412480" cy="658368"/>
           </a:xfrm>
           <a:prstGeom prst="roundRect">
             <a:avLst>
-              <a:gd name="adj" fmla="val 14286"/>
+              <a:gd name="adj" fmla="val 13889"/>
             </a:avLst>
           </a:prstGeom>
           <a:solidFill>
-            <a:srgbClr val="FEF6E8"/>
+            <a:srgbClr val="FFFFFF"/>
           </a:solidFill>
           <a:ln/>
           <a:effectLst>
@@ -2621,30 +2793,30 @@
       </p:sp>
       <p:sp>
         <p:nvSpPr>
-          <p:cNvPr id="11" name="Text 9"/>
-          <p:cNvSpPr/>
-          <p:nvPr/>
-        </p:nvSpPr>
-        <p:spPr>
-          <a:xfrm>
-            <a:off x="4709160" y="1810512"/>
-            <a:ext cx="3566160" cy="530352"/>
-          </a:xfrm>
-          <a:prstGeom prst="rect">
-            <a:avLst/>
-          </a:prstGeom>
-          <a:noFill/>
-          <a:ln/>
-        </p:spPr>
-        <p:txBody>
-          <a:bodyPr wrap="square" lIns="0" tIns="0" rIns="0" bIns="0" rtlCol="0" anchor="ctr"/>
-          <a:lstStyle/>
-          <a:p>
-            <a:pPr indent="0" marL="0">
-              <a:buNone/>
-            </a:pPr>
-            <a:r>
-              <a:rPr lang="en-US" sz="1500" b="1" dirty="0">
+          <p:cNvPr id="12" name="Text 10"/>
+          <p:cNvSpPr/>
+          <p:nvPr/>
+        </p:nvSpPr>
+        <p:spPr>
+          <a:xfrm>
+            <a:off x="594360" y="3419856"/>
+            <a:ext cx="7863840" cy="420624"/>
+          </a:xfrm>
+          <a:prstGeom prst="rect">
+            <a:avLst/>
+          </a:prstGeom>
+          <a:noFill/>
+          <a:ln/>
+        </p:spPr>
+        <p:txBody>
+          <a:bodyPr wrap="square" lIns="0" tIns="0" rIns="0" bIns="0" rtlCol="0" anchor="ctr"/>
+          <a:lstStyle/>
+          <a:p>
+            <a:pPr indent="0" marL="0">
+              <a:buNone/>
+            </a:pPr>
+            <a:r>
+              <a:rPr lang="en-US" sz="1700" b="1" dirty="0">
                 <a:solidFill>
                   <a:srgbClr val="0E1C42"/>
                 </a:solidFill>
@@ -2652,19 +2824,13 @@
                 <a:ea typeface="Calibri" pitchFamily="34" charset="-122"/>
                 <a:cs typeface="Calibri" pitchFamily="34" charset="-120"/>
               </a:rPr>
-              <a:t>vanquished</a:t>
-            </a:r>
-            <a:pPr indent="0" marL="0">
-              <a:buNone/>
-            </a:pPr>
-            <a:endParaRPr lang="en-US" sz="1500" dirty="0"/>
-          </a:p>
-          <a:p>
-            <a:pPr indent="0" marL="0">
-              <a:buNone/>
-            </a:pPr>
-            <a:r>
-              <a:rPr lang="en-US" sz="1200" dirty="0">
+              <a:t>vanquished  </a:t>
+            </a:r>
+            <a:pPr indent="0" marL="0">
+              <a:buNone/>
+            </a:pPr>
+            <a:r>
+              <a:rPr lang="en-US" sz="1400" dirty="0">
                 <a:solidFill>
                   <a:srgbClr val="1E293B"/>
                 </a:solidFill>
@@ -2674,7 +2840,7 @@
               </a:rPr>
               <a:t>Defeated completely in battle.</a:t>
             </a:r>
-            <a:endParaRPr lang="en-US" sz="1500" dirty="0"/>
+            <a:endParaRPr lang="en-US" sz="1700" dirty="0"/>
           </a:p>
         </p:txBody>
       </p:sp>
@@ -2689,6 +2855,888 @@
 <file path=ppt/slides/slide12.xml><?xml version="1.0" encoding="utf-8"?>
 <p:sld xmlns:a="http://schemas.openxmlformats.org/drawingml/2006/main" xmlns:r="http://schemas.openxmlformats.org/officeDocument/2006/relationships" xmlns:p="http://schemas.openxmlformats.org/presentationml/2006/main">
   <p:cSld name="Slide 12">
+    <p:bg>
+      <p:bgPr>
+        <a:solidFill>
+          <a:srgbClr val="F8FAFC"/>
+        </a:solidFill>
+      </p:bgPr>
+    </p:bg>
+    <p:spTree>
+      <p:nvGrpSpPr>
+        <p:cNvPr id="1" name=""/>
+        <p:cNvGrpSpPr/>
+        <p:nvPr/>
+      </p:nvGrpSpPr>
+      <p:grpSpPr>
+        <a:xfrm>
+          <a:off x="0" y="0"/>
+          <a:ext cx="0" cy="0"/>
+          <a:chOff x="0" y="0"/>
+          <a:chExt cx="0" cy="0"/>
+        </a:xfrm>
+      </p:grpSpPr>
+      <p:sp>
+        <p:nvSpPr>
+          <p:cNvPr id="2" name="Shape 0"/>
+          <p:cNvSpPr/>
+          <p:nvPr/>
+        </p:nvSpPr>
+        <p:spPr>
+          <a:xfrm>
+            <a:off x="0" y="0"/>
+            <a:ext cx="9144000" cy="566928"/>
+          </a:xfrm>
+          <a:prstGeom prst="rect">
+            <a:avLst/>
+          </a:prstGeom>
+          <a:solidFill>
+            <a:srgbClr val="C7922C"/>
+          </a:solidFill>
+          <a:ln/>
+        </p:spPr>
+      </p:sp>
+      <p:sp>
+        <p:nvSpPr>
+          <p:cNvPr id="3" name="Text 1"/>
+          <p:cNvSpPr/>
+          <p:nvPr/>
+        </p:nvSpPr>
+        <p:spPr>
+          <a:xfrm>
+            <a:off x="365760" y="54864"/>
+            <a:ext cx="8412480" cy="457200"/>
+          </a:xfrm>
+          <a:prstGeom prst="rect">
+            <a:avLst/>
+          </a:prstGeom>
+          <a:noFill/>
+          <a:ln/>
+        </p:spPr>
+        <p:txBody>
+          <a:bodyPr wrap="square" lIns="0" tIns="0" rIns="0" bIns="0" rtlCol="0" anchor="ctr"/>
+          <a:lstStyle/>
+          <a:p>
+            <a:pPr indent="0" marL="0">
+              <a:buNone/>
+            </a:pPr>
+            <a:r>
+              <a:rPr lang="en-US" sz="2200" b="1" dirty="0">
+                <a:solidFill>
+                  <a:srgbClr val="FFFFFF"/>
+                </a:solidFill>
+                <a:latin typeface="Calibri" pitchFamily="34" charset="0"/>
+                <a:ea typeface="Calibri" pitchFamily="34" charset="-122"/>
+                <a:cs typeface="Calibri" pitchFamily="34" charset="-120"/>
+              </a:rPr>
+              <a:t>✏️  Grammar</a:t>
+            </a:r>
+            <a:endParaRPr lang="en-US" sz="2200" dirty="0"/>
+          </a:p>
+        </p:txBody>
+      </p:sp>
+      <p:sp>
+        <p:nvSpPr>
+          <p:cNvPr id="4" name="Text 2"/>
+          <p:cNvSpPr/>
+          <p:nvPr/>
+        </p:nvSpPr>
+        <p:spPr>
+          <a:xfrm>
+            <a:off x="365760" y="777240"/>
+            <a:ext cx="8229600" cy="237744"/>
+          </a:xfrm>
+          <a:prstGeom prst="rect">
+            <a:avLst/>
+          </a:prstGeom>
+          <a:noFill/>
+          <a:ln/>
+        </p:spPr>
+        <p:txBody>
+          <a:bodyPr wrap="square" lIns="0" tIns="0" rIns="0" bIns="0" rtlCol="0" anchor="ctr"/>
+          <a:lstStyle/>
+          <a:p>
+            <a:pPr indent="0" marL="0">
+              <a:buNone/>
+            </a:pPr>
+            <a:r>
+              <a:rPr lang="en-US" sz="1100" b="1" spc="100" kern="0" dirty="0">
+                <a:solidFill>
+                  <a:srgbClr val="C7922C"/>
+                </a:solidFill>
+                <a:latin typeface="Calibri" pitchFamily="34" charset="0"/>
+                <a:ea typeface="Calibri" pitchFamily="34" charset="-122"/>
+                <a:cs typeface="Calibri" pitchFamily="34" charset="-120"/>
+              </a:rPr>
+              <a:t>EDITING FOR PUNCTUATION AND CAPITALIZATION</a:t>
+            </a:r>
+            <a:endParaRPr lang="en-US" sz="1100" dirty="0"/>
+          </a:p>
+        </p:txBody>
+      </p:sp>
+      <p:sp>
+        <p:nvSpPr>
+          <p:cNvPr id="5" name="Shape 3"/>
+          <p:cNvSpPr/>
+          <p:nvPr/>
+        </p:nvSpPr>
+        <p:spPr>
+          <a:xfrm>
+            <a:off x="365760" y="1078992"/>
+            <a:ext cx="8412480" cy="658368"/>
+          </a:xfrm>
+          <a:prstGeom prst="roundRect">
+            <a:avLst>
+              <a:gd name="adj" fmla="val 13889"/>
+            </a:avLst>
+          </a:prstGeom>
+          <a:solidFill>
+            <a:srgbClr val="FEF6E8"/>
+          </a:solidFill>
+          <a:ln/>
+          <a:effectLst>
+            <a:outerShdw sx="100000" sy="100000" kx="0" ky="0" algn="bl" rotWithShape="0" blurRad="101600" dist="38100" dir="2700000">
+              <a:srgbClr val="000000">
+                <a:alpha val="12000"/>
+              </a:srgbClr>
+            </a:outerShdw>
+          </a:effectLst>
+        </p:spPr>
+      </p:sp>
+      <p:sp>
+        <p:nvSpPr>
+          <p:cNvPr id="6" name="Text 4"/>
+          <p:cNvSpPr/>
+          <p:nvPr/>
+        </p:nvSpPr>
+        <p:spPr>
+          <a:xfrm>
+            <a:off x="594360" y="1225296"/>
+            <a:ext cx="7863840" cy="402336"/>
+          </a:xfrm>
+          <a:prstGeom prst="rect">
+            <a:avLst/>
+          </a:prstGeom>
+          <a:noFill/>
+          <a:ln/>
+        </p:spPr>
+        <p:txBody>
+          <a:bodyPr wrap="square" lIns="0" tIns="0" rIns="0" bIns="0" rtlCol="0" anchor="ctr"/>
+          <a:lstStyle/>
+          <a:p>
+            <a:pPr indent="0" marL="0">
+              <a:buNone/>
+            </a:pPr>
+            <a:r>
+              <a:rPr lang="en-US" sz="1600" dirty="0">
+                <a:solidFill>
+                  <a:srgbClr val="1E293B"/>
+                </a:solidFill>
+                <a:latin typeface="Calibri" pitchFamily="34" charset="0"/>
+                <a:ea typeface="Calibri" pitchFamily="34" charset="-122"/>
+                <a:cs typeface="Calibri" pitchFamily="34" charset="-120"/>
+              </a:rPr>
+              <a:t>aslan led the army across the field.</a:t>
+            </a:r>
+            <a:endParaRPr lang="en-US" sz="1600" dirty="0"/>
+          </a:p>
+        </p:txBody>
+      </p:sp>
+      <p:sp>
+        <p:nvSpPr>
+          <p:cNvPr id="7" name="Shape 5"/>
+          <p:cNvSpPr/>
+          <p:nvPr/>
+        </p:nvSpPr>
+        <p:spPr>
+          <a:xfrm>
+            <a:off x="365760" y="1810512"/>
+            <a:ext cx="8412480" cy="658368"/>
+          </a:xfrm>
+          <a:prstGeom prst="roundRect">
+            <a:avLst>
+              <a:gd name="adj" fmla="val 13889"/>
+            </a:avLst>
+          </a:prstGeom>
+          <a:solidFill>
+            <a:srgbClr val="FFFFFF"/>
+          </a:solidFill>
+          <a:ln/>
+          <a:effectLst>
+            <a:outerShdw sx="100000" sy="100000" kx="0" ky="0" algn="bl" rotWithShape="0" blurRad="101600" dist="38100" dir="2700000">
+              <a:srgbClr val="000000">
+                <a:alpha val="12000"/>
+              </a:srgbClr>
+            </a:outerShdw>
+          </a:effectLst>
+        </p:spPr>
+      </p:sp>
+      <p:sp>
+        <p:nvSpPr>
+          <p:cNvPr id="8" name="Text 6"/>
+          <p:cNvSpPr/>
+          <p:nvPr/>
+        </p:nvSpPr>
+        <p:spPr>
+          <a:xfrm>
+            <a:off x="594360" y="1956816"/>
+            <a:ext cx="7863840" cy="402336"/>
+          </a:xfrm>
+          <a:prstGeom prst="rect">
+            <a:avLst/>
+          </a:prstGeom>
+          <a:noFill/>
+          <a:ln/>
+        </p:spPr>
+        <p:txBody>
+          <a:bodyPr wrap="square" lIns="0" tIns="0" rIns="0" bIns="0" rtlCol="0" anchor="ctr"/>
+          <a:lstStyle/>
+          <a:p>
+            <a:pPr indent="0" marL="0">
+              <a:buNone/>
+            </a:pPr>
+            <a:r>
+              <a:rPr lang="en-US" sz="1600" dirty="0">
+                <a:solidFill>
+                  <a:srgbClr val="1E293B"/>
+                </a:solidFill>
+                <a:latin typeface="Calibri" pitchFamily="34" charset="0"/>
+                <a:ea typeface="Calibri" pitchFamily="34" charset="-122"/>
+                <a:cs typeface="Calibri" pitchFamily="34" charset="-120"/>
+              </a:rPr>
+              <a:t>the white witch raised her wand.</a:t>
+            </a:r>
+            <a:endParaRPr lang="en-US" sz="1600" dirty="0"/>
+          </a:p>
+        </p:txBody>
+      </p:sp>
+      <p:sp>
+        <p:nvSpPr>
+          <p:cNvPr id="9" name="Shape 7"/>
+          <p:cNvSpPr/>
+          <p:nvPr/>
+        </p:nvSpPr>
+        <p:spPr>
+          <a:xfrm>
+            <a:off x="365760" y="2542032"/>
+            <a:ext cx="8412480" cy="658368"/>
+          </a:xfrm>
+          <a:prstGeom prst="roundRect">
+            <a:avLst>
+              <a:gd name="adj" fmla="val 13889"/>
+            </a:avLst>
+          </a:prstGeom>
+          <a:solidFill>
+            <a:srgbClr val="FEF6E8"/>
+          </a:solidFill>
+          <a:ln/>
+          <a:effectLst>
+            <a:outerShdw sx="100000" sy="100000" kx="0" ky="0" algn="bl" rotWithShape="0" blurRad="101600" dist="38100" dir="2700000">
+              <a:srgbClr val="000000">
+                <a:alpha val="12000"/>
+              </a:srgbClr>
+            </a:outerShdw>
+          </a:effectLst>
+        </p:spPr>
+      </p:sp>
+      <p:sp>
+        <p:nvSpPr>
+          <p:cNvPr id="10" name="Text 8"/>
+          <p:cNvSpPr/>
+          <p:nvPr/>
+        </p:nvSpPr>
+        <p:spPr>
+          <a:xfrm>
+            <a:off x="594360" y="2688336"/>
+            <a:ext cx="7863840" cy="402336"/>
+          </a:xfrm>
+          <a:prstGeom prst="rect">
+            <a:avLst/>
+          </a:prstGeom>
+          <a:noFill/>
+          <a:ln/>
+        </p:spPr>
+        <p:txBody>
+          <a:bodyPr wrap="square" lIns="0" tIns="0" rIns="0" bIns="0" rtlCol="0" anchor="ctr"/>
+          <a:lstStyle/>
+          <a:p>
+            <a:pPr indent="0" marL="0">
+              <a:buNone/>
+            </a:pPr>
+            <a:r>
+              <a:rPr lang="en-US" sz="1600" dirty="0">
+                <a:solidFill>
+                  <a:srgbClr val="1E293B"/>
+                </a:solidFill>
+                <a:latin typeface="Calibri" pitchFamily="34" charset="0"/>
+                <a:ea typeface="Calibri" pitchFamily="34" charset="-122"/>
+                <a:cs typeface="Calibri" pitchFamily="34" charset="-120"/>
+              </a:rPr>
+              <a:t>peter fought bravely.</a:t>
+            </a:r>
+            <a:endParaRPr lang="en-US" sz="1600" dirty="0"/>
+          </a:p>
+        </p:txBody>
+      </p:sp>
+      <p:sp>
+        <p:nvSpPr>
+          <p:cNvPr id="11" name="Shape 9"/>
+          <p:cNvSpPr/>
+          <p:nvPr/>
+        </p:nvSpPr>
+        <p:spPr>
+          <a:xfrm>
+            <a:off x="365760" y="3273552"/>
+            <a:ext cx="8412480" cy="658368"/>
+          </a:xfrm>
+          <a:prstGeom prst="roundRect">
+            <a:avLst>
+              <a:gd name="adj" fmla="val 13889"/>
+            </a:avLst>
+          </a:prstGeom>
+          <a:solidFill>
+            <a:srgbClr val="FFFFFF"/>
+          </a:solidFill>
+          <a:ln/>
+          <a:effectLst>
+            <a:outerShdw sx="100000" sy="100000" kx="0" ky="0" algn="bl" rotWithShape="0" blurRad="101600" dist="38100" dir="2700000">
+              <a:srgbClr val="000000">
+                <a:alpha val="12000"/>
+              </a:srgbClr>
+            </a:outerShdw>
+          </a:effectLst>
+        </p:spPr>
+      </p:sp>
+      <p:sp>
+        <p:nvSpPr>
+          <p:cNvPr id="12" name="Text 10"/>
+          <p:cNvSpPr/>
+          <p:nvPr/>
+        </p:nvSpPr>
+        <p:spPr>
+          <a:xfrm>
+            <a:off x="594360" y="3419856"/>
+            <a:ext cx="7863840" cy="402336"/>
+          </a:xfrm>
+          <a:prstGeom prst="rect">
+            <a:avLst/>
+          </a:prstGeom>
+          <a:noFill/>
+          <a:ln/>
+        </p:spPr>
+        <p:txBody>
+          <a:bodyPr wrap="square" lIns="0" tIns="0" rIns="0" bIns="0" rtlCol="0" anchor="ctr"/>
+          <a:lstStyle/>
+          <a:p>
+            <a:pPr indent="0" marL="0">
+              <a:buNone/>
+            </a:pPr>
+            <a:r>
+              <a:rPr lang="en-US" sz="1600" dirty="0">
+                <a:solidFill>
+                  <a:srgbClr val="1E293B"/>
+                </a:solidFill>
+                <a:latin typeface="Calibri" pitchFamily="34" charset="0"/>
+                <a:ea typeface="Calibri" pitchFamily="34" charset="-122"/>
+                <a:cs typeface="Calibri" pitchFamily="34" charset="-120"/>
+              </a:rPr>
+              <a:t>Edmund broke the Witch's wand.</a:t>
+            </a:r>
+            <a:endParaRPr lang="en-US" sz="1600" dirty="0"/>
+          </a:p>
+        </p:txBody>
+      </p:sp>
+      <p:sp>
+        <p:nvSpPr>
+          <p:cNvPr id="13" name="Text 11"/>
+          <p:cNvSpPr/>
+          <p:nvPr/>
+        </p:nvSpPr>
+        <p:spPr>
+          <a:xfrm>
+            <a:off x="365760" y="4050792"/>
+            <a:ext cx="8412480" cy="365760"/>
+          </a:xfrm>
+          <a:prstGeom prst="rect">
+            <a:avLst/>
+          </a:prstGeom>
+          <a:noFill/>
+          <a:ln/>
+        </p:spPr>
+        <p:txBody>
+          <a:bodyPr wrap="square" lIns="0" tIns="0" rIns="0" bIns="0" rtlCol="0" anchor="ctr"/>
+          <a:lstStyle/>
+          <a:p>
+            <a:pPr indent="0" marL="0">
+              <a:buNone/>
+            </a:pPr>
+            <a:r>
+              <a:rPr lang="en-US" sz="1500" i="1" dirty="0">
+                <a:solidFill>
+                  <a:srgbClr val="64748B"/>
+                </a:solidFill>
+                <a:latin typeface="Calibri" pitchFamily="34" charset="0"/>
+                <a:ea typeface="Calibri" pitchFamily="34" charset="-122"/>
+                <a:cs typeface="Calibri" pitchFamily="34" charset="-120"/>
+              </a:rPr>
+              <a:t>Identify the key word or pattern in each sentence. Think: what rule does it follow?</a:t>
+            </a:r>
+            <a:endParaRPr lang="en-US" sz="1500" dirty="0"/>
+          </a:p>
+        </p:txBody>
+      </p:sp>
+    </p:spTree>
+  </p:cSld>
+  <p:clrMapOvr>
+    <a:masterClrMapping/>
+  </p:clrMapOvr>
+</p:sld>
+</file>
+
+<file path=ppt/slides/slide13.xml><?xml version="1.0" encoding="utf-8"?>
+<p:sld xmlns:a="http://schemas.openxmlformats.org/drawingml/2006/main" xmlns:r="http://schemas.openxmlformats.org/officeDocument/2006/relationships" xmlns:p="http://schemas.openxmlformats.org/presentationml/2006/main">
+  <p:cSld name="Slide 13">
+    <p:bg>
+      <p:bgPr>
+        <a:solidFill>
+          <a:srgbClr val="F8FAFC"/>
+        </a:solidFill>
+      </p:bgPr>
+    </p:bg>
+    <p:spTree>
+      <p:nvGrpSpPr>
+        <p:cNvPr id="1" name=""/>
+        <p:cNvGrpSpPr/>
+        <p:nvPr/>
+      </p:nvGrpSpPr>
+      <p:grpSpPr>
+        <a:xfrm>
+          <a:off x="0" y="0"/>
+          <a:ext cx="0" cy="0"/>
+          <a:chOff x="0" y="0"/>
+          <a:chExt cx="0" cy="0"/>
+        </a:xfrm>
+      </p:grpSpPr>
+      <p:sp>
+        <p:nvSpPr>
+          <p:cNvPr id="2" name="Shape 0"/>
+          <p:cNvSpPr/>
+          <p:nvPr/>
+        </p:nvSpPr>
+        <p:spPr>
+          <a:xfrm>
+            <a:off x="0" y="0"/>
+            <a:ext cx="9144000" cy="566928"/>
+          </a:xfrm>
+          <a:prstGeom prst="rect">
+            <a:avLst/>
+          </a:prstGeom>
+          <a:solidFill>
+            <a:srgbClr val="C7922C"/>
+          </a:solidFill>
+          <a:ln/>
+        </p:spPr>
+      </p:sp>
+      <p:sp>
+        <p:nvSpPr>
+          <p:cNvPr id="3" name="Text 1"/>
+          <p:cNvSpPr/>
+          <p:nvPr/>
+        </p:nvSpPr>
+        <p:spPr>
+          <a:xfrm>
+            <a:off x="365760" y="54864"/>
+            <a:ext cx="8412480" cy="457200"/>
+          </a:xfrm>
+          <a:prstGeom prst="rect">
+            <a:avLst/>
+          </a:prstGeom>
+          <a:noFill/>
+          <a:ln/>
+        </p:spPr>
+        <p:txBody>
+          <a:bodyPr wrap="square" lIns="0" tIns="0" rIns="0" bIns="0" rtlCol="0" anchor="ctr"/>
+          <a:lstStyle/>
+          <a:p>
+            <a:pPr indent="0" marL="0">
+              <a:buNone/>
+            </a:pPr>
+            <a:r>
+              <a:rPr lang="en-US" sz="2200" b="1" dirty="0">
+                <a:solidFill>
+                  <a:srgbClr val="FFFFFF"/>
+                </a:solidFill>
+                <a:latin typeface="Calibri" pitchFamily="34" charset="0"/>
+                <a:ea typeface="Calibri" pitchFamily="34" charset="-122"/>
+                <a:cs typeface="Calibri" pitchFamily="34" charset="-120"/>
+              </a:rPr>
+              <a:t>✏️  Grammar</a:t>
+            </a:r>
+            <a:endParaRPr lang="en-US" sz="2200" dirty="0"/>
+          </a:p>
+        </p:txBody>
+      </p:sp>
+      <p:sp>
+        <p:nvSpPr>
+          <p:cNvPr id="4" name="Text 2"/>
+          <p:cNvSpPr/>
+          <p:nvPr/>
+        </p:nvSpPr>
+        <p:spPr>
+          <a:xfrm>
+            <a:off x="365760" y="777240"/>
+            <a:ext cx="8229600" cy="237744"/>
+          </a:xfrm>
+          <a:prstGeom prst="rect">
+            <a:avLst/>
+          </a:prstGeom>
+          <a:noFill/>
+          <a:ln/>
+        </p:spPr>
+        <p:txBody>
+          <a:bodyPr wrap="square" lIns="0" tIns="0" rIns="0" bIns="0" rtlCol="0" anchor="ctr"/>
+          <a:lstStyle/>
+          <a:p>
+            <a:pPr indent="0" marL="0">
+              <a:buNone/>
+            </a:pPr>
+            <a:r>
+              <a:rPr lang="en-US" sz="1100" b="1" spc="100" kern="0" dirty="0">
+                <a:solidFill>
+                  <a:srgbClr val="C7922C"/>
+                </a:solidFill>
+                <a:latin typeface="Calibri" pitchFamily="34" charset="0"/>
+                <a:ea typeface="Calibri" pitchFamily="34" charset="-122"/>
+                <a:cs typeface="Calibri" pitchFamily="34" charset="-120"/>
+              </a:rPr>
+              <a:t>EDITING FOR PUNCTUATION AND CAPITALIZATION</a:t>
+            </a:r>
+            <a:endParaRPr lang="en-US" sz="1100" dirty="0"/>
+          </a:p>
+        </p:txBody>
+      </p:sp>
+      <p:sp>
+        <p:nvSpPr>
+          <p:cNvPr id="5" name="Shape 3"/>
+          <p:cNvSpPr/>
+          <p:nvPr/>
+        </p:nvSpPr>
+        <p:spPr>
+          <a:xfrm>
+            <a:off x="365760" y="1078992"/>
+            <a:ext cx="8412480" cy="658368"/>
+          </a:xfrm>
+          <a:prstGeom prst="roundRect">
+            <a:avLst>
+              <a:gd name="adj" fmla="val 13889"/>
+            </a:avLst>
+          </a:prstGeom>
+          <a:solidFill>
+            <a:srgbClr val="FEF6E8"/>
+          </a:solidFill>
+          <a:ln/>
+          <a:effectLst>
+            <a:outerShdw sx="100000" sy="100000" kx="0" ky="0" algn="bl" rotWithShape="0" blurRad="101600" dist="38100" dir="2700000">
+              <a:srgbClr val="000000">
+                <a:alpha val="12000"/>
+              </a:srgbClr>
+            </a:outerShdw>
+          </a:effectLst>
+        </p:spPr>
+      </p:sp>
+      <p:sp>
+        <p:nvSpPr>
+          <p:cNvPr id="6" name="Text 4"/>
+          <p:cNvSpPr/>
+          <p:nvPr/>
+        </p:nvSpPr>
+        <p:spPr>
+          <a:xfrm>
+            <a:off x="594360" y="1225296"/>
+            <a:ext cx="7863840" cy="402336"/>
+          </a:xfrm>
+          <a:prstGeom prst="rect">
+            <a:avLst/>
+          </a:prstGeom>
+          <a:noFill/>
+          <a:ln/>
+        </p:spPr>
+        <p:txBody>
+          <a:bodyPr wrap="square" lIns="0" tIns="0" rIns="0" bIns="0" rtlCol="0" anchor="ctr"/>
+          <a:lstStyle/>
+          <a:p>
+            <a:pPr indent="0" marL="0">
+              <a:buNone/>
+            </a:pPr>
+            <a:r>
+              <a:rPr lang="en-US" sz="1600" dirty="0">
+                <a:solidFill>
+                  <a:srgbClr val="1E293B"/>
+                </a:solidFill>
+                <a:latin typeface="Calibri" pitchFamily="34" charset="0"/>
+                <a:ea typeface="Calibri" pitchFamily="34" charset="-122"/>
+                <a:cs typeface="Calibri" pitchFamily="34" charset="-120"/>
+              </a:rPr>
+              <a:t>aslan led the army across the field.</a:t>
+            </a:r>
+            <a:endParaRPr lang="en-US" sz="1600" dirty="0"/>
+          </a:p>
+        </p:txBody>
+      </p:sp>
+      <p:sp>
+        <p:nvSpPr>
+          <p:cNvPr id="7" name="Shape 5"/>
+          <p:cNvSpPr/>
+          <p:nvPr/>
+        </p:nvSpPr>
+        <p:spPr>
+          <a:xfrm>
+            <a:off x="365760" y="1810512"/>
+            <a:ext cx="8412480" cy="658368"/>
+          </a:xfrm>
+          <a:prstGeom prst="roundRect">
+            <a:avLst>
+              <a:gd name="adj" fmla="val 13889"/>
+            </a:avLst>
+          </a:prstGeom>
+          <a:solidFill>
+            <a:srgbClr val="FFFFFF"/>
+          </a:solidFill>
+          <a:ln/>
+          <a:effectLst>
+            <a:outerShdw sx="100000" sy="100000" kx="0" ky="0" algn="bl" rotWithShape="0" blurRad="101600" dist="38100" dir="2700000">
+              <a:srgbClr val="000000">
+                <a:alpha val="12000"/>
+              </a:srgbClr>
+            </a:outerShdw>
+          </a:effectLst>
+        </p:spPr>
+      </p:sp>
+      <p:sp>
+        <p:nvSpPr>
+          <p:cNvPr id="8" name="Text 6"/>
+          <p:cNvSpPr/>
+          <p:nvPr/>
+        </p:nvSpPr>
+        <p:spPr>
+          <a:xfrm>
+            <a:off x="594360" y="1956816"/>
+            <a:ext cx="7863840" cy="402336"/>
+          </a:xfrm>
+          <a:prstGeom prst="rect">
+            <a:avLst/>
+          </a:prstGeom>
+          <a:noFill/>
+          <a:ln/>
+        </p:spPr>
+        <p:txBody>
+          <a:bodyPr wrap="square" lIns="0" tIns="0" rIns="0" bIns="0" rtlCol="0" anchor="ctr"/>
+          <a:lstStyle/>
+          <a:p>
+            <a:pPr indent="0" marL="0">
+              <a:buNone/>
+            </a:pPr>
+            <a:r>
+              <a:rPr lang="en-US" sz="1600" dirty="0">
+                <a:solidFill>
+                  <a:srgbClr val="1E293B"/>
+                </a:solidFill>
+                <a:latin typeface="Calibri" pitchFamily="34" charset="0"/>
+                <a:ea typeface="Calibri" pitchFamily="34" charset="-122"/>
+                <a:cs typeface="Calibri" pitchFamily="34" charset="-120"/>
+              </a:rPr>
+              <a:t>the white witch raised her wand.</a:t>
+            </a:r>
+            <a:endParaRPr lang="en-US" sz="1600" dirty="0"/>
+          </a:p>
+        </p:txBody>
+      </p:sp>
+      <p:sp>
+        <p:nvSpPr>
+          <p:cNvPr id="9" name="Shape 7"/>
+          <p:cNvSpPr/>
+          <p:nvPr/>
+        </p:nvSpPr>
+        <p:spPr>
+          <a:xfrm>
+            <a:off x="365760" y="2542032"/>
+            <a:ext cx="8412480" cy="658368"/>
+          </a:xfrm>
+          <a:prstGeom prst="roundRect">
+            <a:avLst>
+              <a:gd name="adj" fmla="val 13889"/>
+            </a:avLst>
+          </a:prstGeom>
+          <a:solidFill>
+            <a:srgbClr val="FEF6E8"/>
+          </a:solidFill>
+          <a:ln/>
+          <a:effectLst>
+            <a:outerShdw sx="100000" sy="100000" kx="0" ky="0" algn="bl" rotWithShape="0" blurRad="101600" dist="38100" dir="2700000">
+              <a:srgbClr val="000000">
+                <a:alpha val="12000"/>
+              </a:srgbClr>
+            </a:outerShdw>
+          </a:effectLst>
+        </p:spPr>
+      </p:sp>
+      <p:sp>
+        <p:nvSpPr>
+          <p:cNvPr id="10" name="Text 8"/>
+          <p:cNvSpPr/>
+          <p:nvPr/>
+        </p:nvSpPr>
+        <p:spPr>
+          <a:xfrm>
+            <a:off x="594360" y="2688336"/>
+            <a:ext cx="7863840" cy="402336"/>
+          </a:xfrm>
+          <a:prstGeom prst="rect">
+            <a:avLst/>
+          </a:prstGeom>
+          <a:noFill/>
+          <a:ln/>
+        </p:spPr>
+        <p:txBody>
+          <a:bodyPr wrap="square" lIns="0" tIns="0" rIns="0" bIns="0" rtlCol="0" anchor="ctr"/>
+          <a:lstStyle/>
+          <a:p>
+            <a:pPr indent="0" marL="0">
+              <a:buNone/>
+            </a:pPr>
+            <a:r>
+              <a:rPr lang="en-US" sz="1600" dirty="0">
+                <a:solidFill>
+                  <a:srgbClr val="1E293B"/>
+                </a:solidFill>
+                <a:latin typeface="Calibri" pitchFamily="34" charset="0"/>
+                <a:ea typeface="Calibri" pitchFamily="34" charset="-122"/>
+                <a:cs typeface="Calibri" pitchFamily="34" charset="-120"/>
+              </a:rPr>
+              <a:t>peter fought bravely.</a:t>
+            </a:r>
+            <a:endParaRPr lang="en-US" sz="1600" dirty="0"/>
+          </a:p>
+        </p:txBody>
+      </p:sp>
+      <p:sp>
+        <p:nvSpPr>
+          <p:cNvPr id="11" name="Shape 9"/>
+          <p:cNvSpPr/>
+          <p:nvPr/>
+        </p:nvSpPr>
+        <p:spPr>
+          <a:xfrm>
+            <a:off x="365760" y="3273552"/>
+            <a:ext cx="8412480" cy="658368"/>
+          </a:xfrm>
+          <a:prstGeom prst="roundRect">
+            <a:avLst>
+              <a:gd name="adj" fmla="val 13889"/>
+            </a:avLst>
+          </a:prstGeom>
+          <a:solidFill>
+            <a:srgbClr val="FFFFFF"/>
+          </a:solidFill>
+          <a:ln/>
+          <a:effectLst>
+            <a:outerShdw sx="100000" sy="100000" kx="0" ky="0" algn="bl" rotWithShape="0" blurRad="101600" dist="38100" dir="2700000">
+              <a:srgbClr val="000000">
+                <a:alpha val="12000"/>
+              </a:srgbClr>
+            </a:outerShdw>
+          </a:effectLst>
+        </p:spPr>
+      </p:sp>
+      <p:sp>
+        <p:nvSpPr>
+          <p:cNvPr id="12" name="Text 10"/>
+          <p:cNvSpPr/>
+          <p:nvPr/>
+        </p:nvSpPr>
+        <p:spPr>
+          <a:xfrm>
+            <a:off x="594360" y="3419856"/>
+            <a:ext cx="7863840" cy="402336"/>
+          </a:xfrm>
+          <a:prstGeom prst="rect">
+            <a:avLst/>
+          </a:prstGeom>
+          <a:noFill/>
+          <a:ln/>
+        </p:spPr>
+        <p:txBody>
+          <a:bodyPr wrap="square" lIns="0" tIns="0" rIns="0" bIns="0" rtlCol="0" anchor="ctr"/>
+          <a:lstStyle/>
+          <a:p>
+            <a:pPr indent="0" marL="0">
+              <a:buNone/>
+            </a:pPr>
+            <a:r>
+              <a:rPr lang="en-US" sz="1600" dirty="0">
+                <a:solidFill>
+                  <a:srgbClr val="1E293B"/>
+                </a:solidFill>
+                <a:latin typeface="Calibri" pitchFamily="34" charset="0"/>
+                <a:ea typeface="Calibri" pitchFamily="34" charset="-122"/>
+                <a:cs typeface="Calibri" pitchFamily="34" charset="-120"/>
+              </a:rPr>
+              <a:t>Edmund broke the Witch's wand.</a:t>
+            </a:r>
+            <a:endParaRPr lang="en-US" sz="1600" dirty="0"/>
+          </a:p>
+        </p:txBody>
+      </p:sp>
+      <p:sp>
+        <p:nvSpPr>
+          <p:cNvPr id="13" name="Text 11"/>
+          <p:cNvSpPr/>
+          <p:nvPr/>
+        </p:nvSpPr>
+        <p:spPr>
+          <a:xfrm>
+            <a:off x="365760" y="4050792"/>
+            <a:ext cx="8412480" cy="365760"/>
+          </a:xfrm>
+          <a:prstGeom prst="rect">
+            <a:avLst/>
+          </a:prstGeom>
+          <a:noFill/>
+          <a:ln/>
+        </p:spPr>
+        <p:txBody>
+          <a:bodyPr wrap="square" lIns="0" tIns="0" rIns="0" bIns="0" rtlCol="0" anchor="ctr"/>
+          <a:lstStyle/>
+          <a:p>
+            <a:pPr indent="0" marL="0">
+              <a:buNone/>
+            </a:pPr>
+            <a:r>
+              <a:rPr lang="en-US" sz="1500" b="1" dirty="0">
+                <a:solidFill>
+                  <a:srgbClr val="34B76F"/>
+                </a:solidFill>
+                <a:latin typeface="Calibri" pitchFamily="34" charset="0"/>
+                <a:ea typeface="Calibri" pitchFamily="34" charset="-122"/>
+                <a:cs typeface="Calibri" pitchFamily="34" charset="-120"/>
+              </a:rPr>
+              <a:t>✅  Answers revealed</a:t>
+            </a:r>
+            <a:endParaRPr lang="en-US" sz="1500" dirty="0"/>
+          </a:p>
+        </p:txBody>
+      </p:sp>
+    </p:spTree>
+  </p:cSld>
+  <p:clrMapOvr>
+    <a:masterClrMapping/>
+  </p:clrMapOvr>
+</p:sld>
+</file>
+
+<file path=ppt/slides/slide14.xml><?xml version="1.0" encoding="utf-8"?>
+<p:sld xmlns:a="http://schemas.openxmlformats.org/drawingml/2006/main" xmlns:r="http://schemas.openxmlformats.org/officeDocument/2006/relationships" xmlns:p="http://schemas.openxmlformats.org/presentationml/2006/main">
+  <p:cSld name="Slide 14">
     <p:bg>
       <p:bgPr>
         <a:solidFill>
@@ -2712,30 +3760,89 @@
       </p:grpSpPr>
       <p:sp>
         <p:nvSpPr>
-          <p:cNvPr id="2" name="Text 0"/>
-          <p:cNvSpPr/>
-          <p:nvPr/>
-        </p:nvSpPr>
-        <p:spPr>
-          <a:xfrm>
-            <a:off x="365760" y="164592"/>
-            <a:ext cx="8412480" cy="566928"/>
-          </a:xfrm>
-          <a:prstGeom prst="rect">
-            <a:avLst/>
-          </a:prstGeom>
-          <a:noFill/>
-          <a:ln/>
-        </p:spPr>
-        <p:txBody>
-          <a:bodyPr wrap="square" lIns="0" tIns="0" rIns="0" bIns="0" rtlCol="0" anchor="ctr"/>
-          <a:lstStyle/>
-          <a:p>
-            <a:pPr algn="l" indent="0" marL="0">
-              <a:buNone/>
-            </a:pPr>
-            <a:r>
-              <a:rPr lang="en-US" sz="2800" b="1" dirty="0">
+          <p:cNvPr id="2" name="Shape 0"/>
+          <p:cNvSpPr/>
+          <p:nvPr/>
+        </p:nvSpPr>
+        <p:spPr>
+          <a:xfrm>
+            <a:off x="0" y="0"/>
+            <a:ext cx="9144000" cy="566928"/>
+          </a:xfrm>
+          <a:prstGeom prst="rect">
+            <a:avLst/>
+          </a:prstGeom>
+          <a:solidFill>
+            <a:srgbClr val="4A90D9"/>
+          </a:solidFill>
+          <a:ln/>
+        </p:spPr>
+      </p:sp>
+      <p:sp>
+        <p:nvSpPr>
+          <p:cNvPr id="3" name="Text 1"/>
+          <p:cNvSpPr/>
+          <p:nvPr/>
+        </p:nvSpPr>
+        <p:spPr>
+          <a:xfrm>
+            <a:off x="365760" y="54864"/>
+            <a:ext cx="8412480" cy="457200"/>
+          </a:xfrm>
+          <a:prstGeom prst="rect">
+            <a:avLst/>
+          </a:prstGeom>
+          <a:noFill/>
+          <a:ln/>
+        </p:spPr>
+        <p:txBody>
+          <a:bodyPr wrap="square" lIns="0" tIns="0" rIns="0" bIns="0" rtlCol="0" anchor="ctr"/>
+          <a:lstStyle/>
+          <a:p>
+            <a:pPr indent="0" marL="0">
+              <a:buNone/>
+            </a:pPr>
+            <a:r>
+              <a:rPr lang="en-US" sz="2200" b="1" dirty="0">
+                <a:solidFill>
+                  <a:srgbClr val="FFFFFF"/>
+                </a:solidFill>
+                <a:latin typeface="Calibri" pitchFamily="34" charset="0"/>
+                <a:ea typeface="Calibri" pitchFamily="34" charset="-122"/>
+                <a:cs typeface="Calibri" pitchFamily="34" charset="-120"/>
+              </a:rPr>
+              <a:t>📕  Read</a:t>
+            </a:r>
+            <a:endParaRPr lang="en-US" sz="2200" dirty="0"/>
+          </a:p>
+        </p:txBody>
+      </p:sp>
+      <p:sp>
+        <p:nvSpPr>
+          <p:cNvPr id="4" name="Text 2"/>
+          <p:cNvSpPr/>
+          <p:nvPr/>
+        </p:nvSpPr>
+        <p:spPr>
+          <a:xfrm>
+            <a:off x="365760" y="868680"/>
+            <a:ext cx="8412480" cy="502920"/>
+          </a:xfrm>
+          <a:prstGeom prst="rect">
+            <a:avLst/>
+          </a:prstGeom>
+          <a:noFill/>
+          <a:ln/>
+        </p:spPr>
+        <p:txBody>
+          <a:bodyPr wrap="square" lIns="0" tIns="0" rIns="0" bIns="0" rtlCol="0" anchor="ctr"/>
+          <a:lstStyle/>
+          <a:p>
+            <a:pPr indent="0" marL="0">
+              <a:buNone/>
+            </a:pPr>
+            <a:r>
+              <a:rPr lang="en-US" sz="2600" b="1" dirty="0">
                 <a:solidFill>
                   <a:srgbClr val="0E1C42"/>
                 </a:solidFill>
@@ -2745,61 +3852,38 @@
               </a:rPr>
               <a:t>Reading: Ch. 16–17 + Synthesis</a:t>
             </a:r>
-            <a:endParaRPr lang="en-US" sz="2800" dirty="0"/>
-          </a:p>
-        </p:txBody>
-      </p:sp>
-      <p:sp>
-        <p:nvSpPr>
-          <p:cNvPr id="3" name="Shape 1"/>
-          <p:cNvSpPr/>
-          <p:nvPr/>
-        </p:nvSpPr>
-        <p:spPr>
-          <a:xfrm>
-            <a:off x="365760" y="749808"/>
-            <a:ext cx="8412480" cy="0"/>
-          </a:xfrm>
-          <a:prstGeom prst="line">
-            <a:avLst/>
-          </a:prstGeom>
-          <a:noFill/>
-          <a:ln w="19050">
-            <a:solidFill>
-              <a:srgbClr val="55C8E8"/>
-            </a:solidFill>
-            <a:prstDash val="solid"/>
-          </a:ln>
-        </p:spPr>
-      </p:sp>
-      <p:sp>
-        <p:nvSpPr>
-          <p:cNvPr id="4" name="Text 2"/>
-          <p:cNvSpPr/>
-          <p:nvPr/>
-        </p:nvSpPr>
-        <p:spPr>
-          <a:xfrm>
-            <a:off x="457200" y="1005840"/>
-            <a:ext cx="8046720" cy="292608"/>
-          </a:xfrm>
-          <a:prstGeom prst="rect">
-            <a:avLst/>
-          </a:prstGeom>
-          <a:noFill/>
-          <a:ln/>
-        </p:spPr>
-        <p:txBody>
-          <a:bodyPr wrap="square" lIns="0" tIns="0" rIns="0" bIns="0" rtlCol="0" anchor="ctr"/>
-          <a:lstStyle/>
-          <a:p>
-            <a:pPr indent="0" marL="0">
-              <a:buNone/>
-            </a:pPr>
-            <a:r>
-              <a:rPr lang="en-US" sz="1100" b="1" spc="200" kern="0" dirty="0">
-                <a:solidFill>
-                  <a:srgbClr val="55C8E8"/>
+            <a:endParaRPr lang="en-US" sz="2600" dirty="0"/>
+          </a:p>
+        </p:txBody>
+      </p:sp>
+      <p:sp>
+        <p:nvSpPr>
+          <p:cNvPr id="5" name="Text 3"/>
+          <p:cNvSpPr/>
+          <p:nvPr/>
+        </p:nvSpPr>
+        <p:spPr>
+          <a:xfrm>
+            <a:off x="365760" y="1463040"/>
+            <a:ext cx="8229600" cy="237744"/>
+          </a:xfrm>
+          <a:prstGeom prst="rect">
+            <a:avLst/>
+          </a:prstGeom>
+          <a:noFill/>
+          <a:ln/>
+        </p:spPr>
+        <p:txBody>
+          <a:bodyPr wrap="square" lIns="0" tIns="0" rIns="0" bIns="0" rtlCol="0" anchor="ctr"/>
+          <a:lstStyle/>
+          <a:p>
+            <a:pPr indent="0" marL="0">
+              <a:buNone/>
+            </a:pPr>
+            <a:r>
+              <a:rPr lang="en-US" sz="1100" b="1" spc="100" kern="0" dirty="0">
+                <a:solidFill>
+                  <a:srgbClr val="C7922C"/>
                 </a:solidFill>
                 <a:latin typeface="Calibri" pitchFamily="34" charset="0"/>
                 <a:ea typeface="Calibri" pitchFamily="34" charset="-122"/>
@@ -2813,30 +3897,30 @@
       </p:sp>
       <p:sp>
         <p:nvSpPr>
-          <p:cNvPr id="5" name="Text 3"/>
-          <p:cNvSpPr/>
-          <p:nvPr/>
-        </p:nvSpPr>
-        <p:spPr>
-          <a:xfrm>
-            <a:off x="640080" y="1325880"/>
-            <a:ext cx="7863840" cy="548640"/>
-          </a:xfrm>
-          <a:prstGeom prst="rect">
-            <a:avLst/>
-          </a:prstGeom>
-          <a:noFill/>
-          <a:ln/>
-        </p:spPr>
-        <p:txBody>
-          <a:bodyPr wrap="square" lIns="0" tIns="0" rIns="0" bIns="0" rtlCol="0" anchor="ctr"/>
-          <a:lstStyle/>
-          <a:p>
-            <a:pPr indent="0" marL="0">
-              <a:buNone/>
-            </a:pPr>
-            <a:r>
-              <a:rPr lang="en-US" sz="1400" i="1" dirty="0">
+          <p:cNvPr id="6" name="Text 4"/>
+          <p:cNvSpPr/>
+          <p:nvPr/>
+        </p:nvSpPr>
+        <p:spPr>
+          <a:xfrm>
+            <a:off x="365760" y="1719072"/>
+            <a:ext cx="8412480" cy="914400"/>
+          </a:xfrm>
+          <a:prstGeom prst="rect">
+            <a:avLst/>
+          </a:prstGeom>
+          <a:noFill/>
+          <a:ln/>
+        </p:spPr>
+        <p:txBody>
+          <a:bodyPr wrap="square" lIns="0" tIns="0" rIns="0" bIns="0" rtlCol="0" anchor="ctr"/>
+          <a:lstStyle/>
+          <a:p>
+            <a:pPr indent="0" marL="0">
+              <a:buNone/>
+            </a:pPr>
+            <a:r>
+              <a:rPr lang="en-US" sz="1500" dirty="0">
                 <a:solidFill>
                   <a:srgbClr val="1E293B"/>
                 </a:solidFill>
@@ -2844,38 +3928,16 @@
                 <a:ea typeface="Calibri" pitchFamily="34" charset="-122"/>
                 <a:cs typeface="Calibri" pitchFamily="34" charset="-120"/>
               </a:rPr>
-              <a:t>As you read today, ask yourself: How do you recognize when a story has truly fulfilled its theme?</a:t>
-            </a:r>
-            <a:endParaRPr lang="en-US" sz="1400" dirty="0"/>
-          </a:p>
-        </p:txBody>
-      </p:sp>
-      <p:sp>
-        <p:nvSpPr>
-          <p:cNvPr id="6" name="Text 4"/>
-          <p:cNvSpPr/>
-          <p:nvPr/>
-        </p:nvSpPr>
-        <p:spPr>
-          <a:xfrm>
-            <a:off x="640080" y="1965960"/>
-            <a:ext cx="7863840" cy="548640"/>
-          </a:xfrm>
-          <a:prstGeom prst="rect">
-            <a:avLst/>
-          </a:prstGeom>
-          <a:noFill/>
-          <a:ln/>
-        </p:spPr>
-        <p:txBody>
-          <a:bodyPr wrap="square" lIns="0" tIns="0" rIns="0" bIns="0" rtlCol="0" anchor="ctr"/>
-          <a:lstStyle/>
-          <a:p>
-            <a:pPr indent="0" marL="0">
-              <a:buNone/>
-            </a:pPr>
-            <a:r>
-              <a:rPr lang="en-US" sz="1400" i="1" dirty="0">
+              <a:t>•  Explain how the ending reveals theme.</a:t>
+            </a:r>
+            <a:endParaRPr lang="en-US" sz="1500" dirty="0"/>
+          </a:p>
+          <a:p>
+            <a:pPr indent="0" marL="0">
+              <a:buNone/>
+            </a:pPr>
+            <a:r>
+              <a:rPr lang="en-US" sz="1500" dirty="0">
                 <a:solidFill>
                   <a:srgbClr val="1E293B"/>
                 </a:solidFill>
@@ -2883,132 +3945,16 @@
                 <a:ea typeface="Calibri" pitchFamily="34" charset="-122"/>
                 <a:cs typeface="Calibri" pitchFamily="34" charset="-120"/>
               </a:rPr>
-              <a:t>Identify three moments from different parts of the novel that all support the same theme. Write the chapter number and a one-sentence explanation for each.</a:t>
-            </a:r>
-            <a:endParaRPr lang="en-US" sz="1400" dirty="0"/>
-          </a:p>
-        </p:txBody>
-      </p:sp>
-    </p:spTree>
-  </p:cSld>
-  <p:clrMapOvr>
-    <a:masterClrMapping/>
-  </p:clrMapOvr>
-</p:sld>
-</file>
-
-<file path=ppt/slides/slide13.xml><?xml version="1.0" encoding="utf-8"?>
-<p:sld xmlns:a="http://schemas.openxmlformats.org/drawingml/2006/main" xmlns:r="http://schemas.openxmlformats.org/officeDocument/2006/relationships" xmlns:p="http://schemas.openxmlformats.org/presentationml/2006/main">
-  <p:cSld name="Slide 13">
-    <p:bg>
-      <p:bgPr>
-        <a:solidFill>
-          <a:srgbClr val="FFFFFF"/>
-        </a:solidFill>
-      </p:bgPr>
-    </p:bg>
-    <p:spTree>
-      <p:nvGrpSpPr>
-        <p:cNvPr id="1" name=""/>
-        <p:cNvGrpSpPr/>
-        <p:nvPr/>
-      </p:nvGrpSpPr>
-      <p:grpSpPr>
-        <a:xfrm>
-          <a:off x="0" y="0"/>
-          <a:ext cx="0" cy="0"/>
-          <a:chOff x="0" y="0"/>
-          <a:chExt cx="0" cy="0"/>
-        </a:xfrm>
-      </p:grpSpPr>
-      <p:sp>
-        <p:nvSpPr>
-          <p:cNvPr id="2" name="Text 0"/>
-          <p:cNvSpPr/>
-          <p:nvPr/>
-        </p:nvSpPr>
-        <p:spPr>
-          <a:xfrm>
-            <a:off x="365760" y="164592"/>
-            <a:ext cx="8412480" cy="566928"/>
-          </a:xfrm>
-          <a:prstGeom prst="rect">
-            <a:avLst/>
-          </a:prstGeom>
-          <a:noFill/>
-          <a:ln/>
-        </p:spPr>
-        <p:txBody>
-          <a:bodyPr wrap="square" lIns="0" tIns="0" rIns="0" bIns="0" rtlCol="0" anchor="ctr"/>
-          <a:lstStyle/>
-          <a:p>
-            <a:pPr algn="l" indent="0" marL="0">
-              <a:buNone/>
-            </a:pPr>
-            <a:r>
-              <a:rPr lang="en-US" sz="2800" b="1" dirty="0">
-                <a:solidFill>
-                  <a:srgbClr val="0E1C42"/>
-                </a:solidFill>
-                <a:latin typeface="Calibri" pitchFamily="34" charset="0"/>
-                <a:ea typeface="Calibri" pitchFamily="34" charset="-122"/>
-                <a:cs typeface="Calibri" pitchFamily="34" charset="-120"/>
-              </a:rPr>
-              <a:t>Writer’s Workshop: Week 30 · FINAL EDIT — Conventions</a:t>
-            </a:r>
-            <a:endParaRPr lang="en-US" sz="2800" dirty="0"/>
-          </a:p>
-        </p:txBody>
-      </p:sp>
-      <p:sp>
-        <p:nvSpPr>
-          <p:cNvPr id="3" name="Shape 1"/>
-          <p:cNvSpPr/>
-          <p:nvPr/>
-        </p:nvSpPr>
-        <p:spPr>
-          <a:xfrm>
-            <a:off x="365760" y="749808"/>
-            <a:ext cx="8412480" cy="0"/>
-          </a:xfrm>
-          <a:prstGeom prst="line">
-            <a:avLst/>
-          </a:prstGeom>
-          <a:noFill/>
-          <a:ln w="19050">
-            <a:solidFill>
-              <a:srgbClr val="34B76F"/>
-            </a:solidFill>
-            <a:prstDash val="solid"/>
-          </a:ln>
-        </p:spPr>
-      </p:sp>
-      <p:sp>
-        <p:nvSpPr>
-          <p:cNvPr id="4" name="Text 2"/>
-          <p:cNvSpPr/>
-          <p:nvPr/>
-        </p:nvSpPr>
-        <p:spPr>
-          <a:xfrm>
-            <a:off x="640080" y="1371600"/>
-            <a:ext cx="7863840" cy="457200"/>
-          </a:xfrm>
-          <a:prstGeom prst="rect">
-            <a:avLst/>
-          </a:prstGeom>
-          <a:noFill/>
-          <a:ln/>
-        </p:spPr>
-        <p:txBody>
-          <a:bodyPr wrap="square" lIns="0" tIns="0" rIns="0" bIns="0" rtlCol="0" anchor="ctr"/>
-          <a:lstStyle/>
-          <a:p>
-            <a:pPr indent="0" marL="0">
-              <a:buNone/>
-            </a:pPr>
-            <a:r>
-              <a:rPr lang="en-US" sz="1600" dirty="0">
+              <a:t>•  As you read today, ask yourself: How do you recognize when a story has truly fulfilled its theme?</a:t>
+            </a:r>
+            <a:endParaRPr lang="en-US" sz="1500" dirty="0"/>
+          </a:p>
+          <a:p>
+            <a:pPr indent="0" marL="0">
+              <a:buNone/>
+            </a:pPr>
+            <a:r>
+              <a:rPr lang="en-US" sz="1500" dirty="0">
                 <a:solidFill>
                   <a:srgbClr val="1E293B"/>
                 </a:solidFill>
@@ -3016,48 +3962,9 @@
                 <a:ea typeface="Calibri" pitchFamily="34" charset="-122"/>
                 <a:cs typeface="Calibri" pitchFamily="34" charset="-120"/>
               </a:rPr>
-              <a:t>Open your writing assignment in Canvas.</a:t>
-            </a:r>
-            <a:endParaRPr lang="en-US" sz="1600" dirty="0"/>
-          </a:p>
-        </p:txBody>
-      </p:sp>
-      <p:sp>
-        <p:nvSpPr>
-          <p:cNvPr id="5" name="Text 3"/>
-          <p:cNvSpPr/>
-          <p:nvPr/>
-        </p:nvSpPr>
-        <p:spPr>
-          <a:xfrm>
-            <a:off x="640080" y="2011680"/>
-            <a:ext cx="7863840" cy="457200"/>
-          </a:xfrm>
-          <a:prstGeom prst="rect">
-            <a:avLst/>
-          </a:prstGeom>
-          <a:noFill/>
-          <a:ln/>
-        </p:spPr>
-        <p:txBody>
-          <a:bodyPr wrap="square" lIns="0" tIns="0" rIns="0" bIns="0" rtlCol="0" anchor="ctr"/>
-          <a:lstStyle/>
-          <a:p>
-            <a:pPr indent="0" marL="0">
-              <a:buNone/>
-            </a:pPr>
-            <a:r>
-              <a:rPr lang="en-US" sz="1400" dirty="0">
-                <a:solidFill>
-                  <a:srgbClr val="64748B"/>
-                </a:solidFill>
-                <a:latin typeface="Calibri" pitchFamily="34" charset="0"/>
-                <a:ea typeface="Calibri" pitchFamily="34" charset="-122"/>
-                <a:cs typeface="Calibri" pitchFamily="34" charset="-120"/>
-              </a:rPr>
-              <a:t>Follow the writing prompt for today's workshop.</a:t>
-            </a:r>
-            <a:endParaRPr lang="en-US" sz="1400" dirty="0"/>
+              <a:t>•  Find the fire that sings. What kind of figurative language is that?</a:t>
+            </a:r>
+            <a:endParaRPr lang="en-US" sz="1500" dirty="0"/>
           </a:p>
         </p:txBody>
       </p:sp>
@@ -3095,65 +4002,62 @@
       </p:grpSpPr>
       <p:sp>
         <p:nvSpPr>
-          <p:cNvPr id="2" name="Text 0"/>
-          <p:cNvSpPr/>
-          <p:nvPr/>
-        </p:nvSpPr>
-        <p:spPr>
-          <a:xfrm>
-            <a:off x="365760" y="164592"/>
-            <a:ext cx="8412480" cy="566928"/>
-          </a:xfrm>
-          <a:prstGeom prst="rect">
-            <a:avLst/>
-          </a:prstGeom>
-          <a:noFill/>
-          <a:ln/>
-        </p:spPr>
-        <p:txBody>
-          <a:bodyPr wrap="square" lIns="0" tIns="0" rIns="0" bIns="0" rtlCol="0" anchor="ctr"/>
-          <a:lstStyle/>
-          <a:p>
-            <a:pPr algn="l" indent="0" marL="0">
-              <a:buNone/>
-            </a:pPr>
-            <a:r>
-              <a:rPr lang="en-US" sz="2800" b="1" dirty="0">
-                <a:solidFill>
-                  <a:srgbClr val="0E1C42"/>
-                </a:solidFill>
-                <a:latin typeface="Calibri" pitchFamily="34" charset="0"/>
-                <a:ea typeface="Calibri" pitchFamily="34" charset="-122"/>
-                <a:cs typeface="Calibri" pitchFamily="34" charset="-120"/>
-              </a:rPr>
-              <a:t>✏️ 10-Minute Write</a:t>
-            </a:r>
-            <a:endParaRPr lang="en-US" sz="2800" dirty="0"/>
-          </a:p>
-        </p:txBody>
-      </p:sp>
-      <p:sp>
-        <p:nvSpPr>
-          <p:cNvPr id="3" name="Shape 1"/>
-          <p:cNvSpPr/>
-          <p:nvPr/>
-        </p:nvSpPr>
-        <p:spPr>
-          <a:xfrm>
-            <a:off x="365760" y="749808"/>
-            <a:ext cx="8412480" cy="0"/>
-          </a:xfrm>
-          <a:prstGeom prst="line">
-            <a:avLst/>
-          </a:prstGeom>
-          <a:noFill/>
-          <a:ln w="19050">
-            <a:solidFill>
-              <a:srgbClr val="C7922C"/>
-            </a:solidFill>
-            <a:prstDash val="solid"/>
-          </a:ln>
-        </p:spPr>
+          <p:cNvPr id="2" name="Shape 0"/>
+          <p:cNvSpPr/>
+          <p:nvPr/>
+        </p:nvSpPr>
+        <p:spPr>
+          <a:xfrm>
+            <a:off x="0" y="0"/>
+            <a:ext cx="9144000" cy="566928"/>
+          </a:xfrm>
+          <a:prstGeom prst="rect">
+            <a:avLst/>
+          </a:prstGeom>
+          <a:solidFill>
+            <a:srgbClr val="C7922C"/>
+          </a:solidFill>
+          <a:ln/>
+        </p:spPr>
+      </p:sp>
+      <p:sp>
+        <p:nvSpPr>
+          <p:cNvPr id="3" name="Text 1"/>
+          <p:cNvSpPr/>
+          <p:nvPr/>
+        </p:nvSpPr>
+        <p:spPr>
+          <a:xfrm>
+            <a:off x="365760" y="54864"/>
+            <a:ext cx="8412480" cy="457200"/>
+          </a:xfrm>
+          <a:prstGeom prst="rect">
+            <a:avLst/>
+          </a:prstGeom>
+          <a:noFill/>
+          <a:ln/>
+        </p:spPr>
+        <p:txBody>
+          <a:bodyPr wrap="square" lIns="0" tIns="0" rIns="0" bIns="0" rtlCol="0" anchor="ctr"/>
+          <a:lstStyle/>
+          <a:p>
+            <a:pPr indent="0" marL="0">
+              <a:buNone/>
+            </a:pPr>
+            <a:r>
+              <a:rPr lang="en-US" sz="2200" b="1" dirty="0">
+                <a:solidFill>
+                  <a:srgbClr val="FFFFFF"/>
+                </a:solidFill>
+                <a:latin typeface="Calibri" pitchFamily="34" charset="0"/>
+                <a:ea typeface="Calibri" pitchFamily="34" charset="-122"/>
+                <a:cs typeface="Calibri" pitchFamily="34" charset="-120"/>
+              </a:rPr>
+              <a:t>✍️  10-Minute Write</a:t>
+            </a:r>
+            <a:endParaRPr lang="en-US" sz="2200" dirty="0"/>
+          </a:p>
+        </p:txBody>
       </p:sp>
       <p:sp>
         <p:nvSpPr>
@@ -3163,24 +4067,24 @@
         </p:nvSpPr>
         <p:spPr>
           <a:xfrm>
-            <a:off x="457200" y="1005840"/>
-            <a:ext cx="8046720" cy="292608"/>
-          </a:xfrm>
-          <a:prstGeom prst="rect">
-            <a:avLst/>
-          </a:prstGeom>
-          <a:noFill/>
-          <a:ln/>
-        </p:spPr>
-        <p:txBody>
-          <a:bodyPr wrap="square" lIns="0" tIns="0" rIns="0" bIns="0" rtlCol="0" anchor="ctr"/>
-          <a:lstStyle/>
-          <a:p>
-            <a:pPr indent="0" marL="0">
-              <a:buNone/>
-            </a:pPr>
-            <a:r>
-              <a:rPr lang="en-US" sz="1100" b="1" spc="200" kern="0" dirty="0">
+            <a:off x="365760" y="822960"/>
+            <a:ext cx="8229600" cy="237744"/>
+          </a:xfrm>
+          <a:prstGeom prst="rect">
+            <a:avLst/>
+          </a:prstGeom>
+          <a:noFill/>
+          <a:ln/>
+        </p:spPr>
+        <p:txBody>
+          <a:bodyPr wrap="square" lIns="0" tIns="0" rIns="0" bIns="0" rtlCol="0" anchor="ctr"/>
+          <a:lstStyle/>
+          <a:p>
+            <a:pPr indent="0" marL="0">
+              <a:buNone/>
+            </a:pPr>
+            <a:r>
+              <a:rPr lang="en-US" sz="1100" b="1" spc="100" kern="0" dirty="0">
                 <a:solidFill>
                   <a:srgbClr val="C7922C"/>
                 </a:solidFill>
@@ -3188,7 +4092,7 @@
                 <a:ea typeface="Calibri" pitchFamily="34" charset="-122"/>
                 <a:cs typeface="Calibri" pitchFamily="34" charset="-120"/>
               </a:rPr>
-              <a:t>📖 READ THE PROMPT — 1 MINUTE</a:t>
+              <a:t>READ THE PROMPT — 1 MINUTE</a:t>
             </a:r>
             <a:endParaRPr lang="en-US" sz="1100" dirty="0"/>
           </a:p>
@@ -3202,18 +4106,18 @@
         </p:nvSpPr>
         <p:spPr>
           <a:xfrm>
-            <a:off x="457200" y="1417320"/>
-            <a:ext cx="8229600" cy="1645920"/>
+            <a:off x="365760" y="1143000"/>
+            <a:ext cx="8412480" cy="1737360"/>
           </a:xfrm>
           <a:prstGeom prst="roundRect">
             <a:avLst>
-              <a:gd name="adj" fmla="val 5556"/>
+              <a:gd name="adj" fmla="val 5263"/>
             </a:avLst>
           </a:prstGeom>
           <a:solidFill>
             <a:srgbClr val="FEF6E8"/>
           </a:solidFill>
-          <a:ln w="12700">
+          <a:ln w="19050">
             <a:solidFill>
               <a:srgbClr val="C7922C"/>
             </a:solidFill>
@@ -3236,24 +4140,24 @@
         </p:nvSpPr>
         <p:spPr>
           <a:xfrm>
-            <a:off x="640080" y="1527048"/>
-            <a:ext cx="7863840" cy="1417320"/>
-          </a:xfrm>
-          <a:prstGeom prst="rect">
-            <a:avLst/>
-          </a:prstGeom>
-          <a:noFill/>
-          <a:ln/>
-        </p:spPr>
-        <p:txBody>
-          <a:bodyPr wrap="square" lIns="0" tIns="0" rIns="0" bIns="0" rtlCol="0" anchor="ctr"/>
-          <a:lstStyle/>
-          <a:p>
-            <a:pPr indent="0" marL="0">
-              <a:buNone/>
-            </a:pPr>
-            <a:r>
-              <a:rPr lang="en-US" sz="1800" i="1" dirty="0">
+            <a:off x="594360" y="1271016"/>
+            <a:ext cx="7955280" cy="1481328"/>
+          </a:xfrm>
+          <a:prstGeom prst="rect">
+            <a:avLst/>
+          </a:prstGeom>
+          <a:noFill/>
+          <a:ln/>
+        </p:spPr>
+        <p:txBody>
+          <a:bodyPr wrap="square" lIns="0" tIns="0" rIns="0" bIns="0" rtlCol="0" anchor="ctr"/>
+          <a:lstStyle/>
+          <a:p>
+            <a:pPr indent="0" marL="0">
+              <a:buNone/>
+            </a:pPr>
+            <a:r>
+              <a:rPr lang="en-US" sz="1700" dirty="0">
                 <a:solidFill>
                   <a:srgbClr val="1E293B"/>
                 </a:solidFill>
@@ -3261,9 +4165,9 @@
                 <a:ea typeface="Calibri" pitchFamily="34" charset="-122"/>
                 <a:cs typeface="Calibri" pitchFamily="34" charset="-120"/>
               </a:rPr>
-              <a:t>Edmund changes the most in this story — from selfish to brave. Think of how YOU have changed this year. What is one way you are different now than you were at the beginning of the year?</a:t>
-            </a:r>
-            <a:endParaRPr lang="en-US" sz="1800" dirty="0"/>
+              <a:t>Aslan slips quietly away. Why do you think he leaves without saying goodbye? Write what you believe.</a:t>
+            </a:r>
+            <a:endParaRPr lang="en-US" sz="1700" dirty="0"/>
           </a:p>
         </p:txBody>
       </p:sp>
@@ -3275,76 +4179,34 @@
         </p:nvSpPr>
         <p:spPr>
           <a:xfrm>
-            <a:off x="640080" y="3246120"/>
-            <a:ext cx="7863840" cy="457200"/>
-          </a:xfrm>
-          <a:prstGeom prst="rect">
-            <a:avLst/>
-          </a:prstGeom>
-          <a:noFill/>
-          <a:ln/>
-        </p:spPr>
-        <p:txBody>
-          <a:bodyPr wrap="square" lIns="0" tIns="0" rIns="0" bIns="0" rtlCol="0" anchor="ctr"/>
-          <a:lstStyle/>
-          <a:p>
-            <a:pPr indent="0" marL="0">
-              <a:buNone/>
-            </a:pPr>
-            <a:r>
-              <a:rPr lang="en-US" sz="1400" b="1" dirty="0">
-                <a:solidFill>
-                  <a:srgbClr val="0E1C42"/>
-                </a:solidFill>
-                <a:latin typeface="Calibri" pitchFamily="34" charset="0"/>
-                <a:ea typeface="Calibri" pitchFamily="34" charset="-122"/>
-                <a:cs typeface="Calibri" pitchFamily="34" charset="-120"/>
-              </a:rPr>
-              <a:t>Type in the chat </a:t>
-            </a:r>
-            <a:pPr indent="0" marL="0">
-              <a:buNone/>
-            </a:pPr>
-            <a:r>
-              <a:rPr lang="en-US" sz="1400" dirty="0">
-                <a:solidFill>
-                  <a:srgbClr val="1E293B"/>
-                </a:solidFill>
-                <a:latin typeface="Calibri" pitchFamily="34" charset="0"/>
-                <a:ea typeface="Calibri" pitchFamily="34" charset="-122"/>
-                <a:cs typeface="Calibri" pitchFamily="34" charset="-120"/>
-              </a:rPr>
-              <a:t>or </a:t>
-            </a:r>
-            <a:pPr indent="0" marL="0">
-              <a:buNone/>
-            </a:pPr>
-            <a:r>
-              <a:rPr lang="en-US" sz="1400" b="1" dirty="0">
-                <a:solidFill>
-                  <a:srgbClr val="0E1C42"/>
-                </a:solidFill>
-                <a:latin typeface="Calibri" pitchFamily="34" charset="0"/>
-                <a:ea typeface="Calibri" pitchFamily="34" charset="-122"/>
-                <a:cs typeface="Calibri" pitchFamily="34" charset="-120"/>
-              </a:rPr>
-              <a:t>write on paper</a:t>
-            </a:r>
-            <a:pPr indent="0" marL="0">
-              <a:buNone/>
-            </a:pPr>
-            <a:r>
-              <a:rPr lang="en-US" sz="1400" dirty="0">
-                <a:solidFill>
-                  <a:srgbClr val="1E293B"/>
-                </a:solidFill>
-                <a:latin typeface="Calibri" pitchFamily="34" charset="0"/>
-                <a:ea typeface="Calibri" pitchFamily="34" charset="-122"/>
-                <a:cs typeface="Calibri" pitchFamily="34" charset="-120"/>
-              </a:rPr>
-              <a:t> to hold up when we share.</a:t>
-            </a:r>
-            <a:endParaRPr lang="en-US" sz="1400" dirty="0"/>
+            <a:off x="365760" y="3063240"/>
+            <a:ext cx="8412480" cy="365760"/>
+          </a:xfrm>
+          <a:prstGeom prst="rect">
+            <a:avLst/>
+          </a:prstGeom>
+          <a:noFill/>
+          <a:ln/>
+        </p:spPr>
+        <p:txBody>
+          <a:bodyPr wrap="square" lIns="0" tIns="0" rIns="0" bIns="0" rtlCol="0" anchor="ctr"/>
+          <a:lstStyle/>
+          <a:p>
+            <a:pPr indent="0" marL="0">
+              <a:buNone/>
+            </a:pPr>
+            <a:r>
+              <a:rPr lang="en-US" sz="1600" i="1" dirty="0">
+                <a:solidFill>
+                  <a:srgbClr val="64748B"/>
+                </a:solidFill>
+                <a:latin typeface="Calibri" pitchFamily="34" charset="0"/>
+                <a:ea typeface="Calibri" pitchFamily="34" charset="-122"/>
+                <a:cs typeface="Calibri" pitchFamily="34" charset="-120"/>
+              </a:rPr>
+              <a:t>Think first. You will have five minutes to write.</a:t>
+            </a:r>
+            <a:endParaRPr lang="en-US" sz="1600" dirty="0"/>
           </a:p>
         </p:txBody>
       </p:sp>
@@ -3382,30 +4244,89 @@
       </p:grpSpPr>
       <p:sp>
         <p:nvSpPr>
-          <p:cNvPr id="2" name="Text 0"/>
-          <p:cNvSpPr/>
-          <p:nvPr/>
-        </p:nvSpPr>
-        <p:spPr>
-          <a:xfrm>
-            <a:off x="457200" y="228600"/>
-            <a:ext cx="8229600" cy="640080"/>
-          </a:xfrm>
-          <a:prstGeom prst="rect">
-            <a:avLst/>
-          </a:prstGeom>
-          <a:noFill/>
-          <a:ln/>
-        </p:spPr>
-        <p:txBody>
-          <a:bodyPr wrap="square" lIns="0" tIns="0" rIns="0" bIns="0" rtlCol="0" anchor="ctr"/>
-          <a:lstStyle/>
-          <a:p>
-            <a:pPr algn="ctr" indent="0" marL="0">
-              <a:buNone/>
-            </a:pPr>
-            <a:r>
-              <a:rPr lang="en-US" sz="3200" b="1" dirty="0">
+          <p:cNvPr id="2" name="Shape 0"/>
+          <p:cNvSpPr/>
+          <p:nvPr/>
+        </p:nvSpPr>
+        <p:spPr>
+          <a:xfrm>
+            <a:off x="0" y="0"/>
+            <a:ext cx="9144000" cy="566928"/>
+          </a:xfrm>
+          <a:prstGeom prst="rect">
+            <a:avLst/>
+          </a:prstGeom>
+          <a:solidFill>
+            <a:srgbClr val="C7922C"/>
+          </a:solidFill>
+          <a:ln/>
+        </p:spPr>
+      </p:sp>
+      <p:sp>
+        <p:nvSpPr>
+          <p:cNvPr id="3" name="Text 1"/>
+          <p:cNvSpPr/>
+          <p:nvPr/>
+        </p:nvSpPr>
+        <p:spPr>
+          <a:xfrm>
+            <a:off x="365760" y="54864"/>
+            <a:ext cx="8412480" cy="457200"/>
+          </a:xfrm>
+          <a:prstGeom prst="rect">
+            <a:avLst/>
+          </a:prstGeom>
+          <a:noFill/>
+          <a:ln/>
+        </p:spPr>
+        <p:txBody>
+          <a:bodyPr wrap="square" lIns="0" tIns="0" rIns="0" bIns="0" rtlCol="0" anchor="ctr"/>
+          <a:lstStyle/>
+          <a:p>
+            <a:pPr indent="0" marL="0">
+              <a:buNone/>
+            </a:pPr>
+            <a:r>
+              <a:rPr lang="en-US" sz="2200" b="1" dirty="0">
+                <a:solidFill>
+                  <a:srgbClr val="FFFFFF"/>
+                </a:solidFill>
+                <a:latin typeface="Calibri" pitchFamily="34" charset="0"/>
+                <a:ea typeface="Calibri" pitchFamily="34" charset="-122"/>
+                <a:cs typeface="Calibri" pitchFamily="34" charset="-120"/>
+              </a:rPr>
+              <a:t>✍️  Writing Time</a:t>
+            </a:r>
+            <a:endParaRPr lang="en-US" sz="2200" dirty="0"/>
+          </a:p>
+        </p:txBody>
+      </p:sp>
+      <p:sp>
+        <p:nvSpPr>
+          <p:cNvPr id="4" name="Text 2"/>
+          <p:cNvSpPr/>
+          <p:nvPr/>
+        </p:nvSpPr>
+        <p:spPr>
+          <a:xfrm>
+            <a:off x="365760" y="868680"/>
+            <a:ext cx="8412480" cy="502920"/>
+          </a:xfrm>
+          <a:prstGeom prst="rect">
+            <a:avLst/>
+          </a:prstGeom>
+          <a:noFill/>
+          <a:ln/>
+        </p:spPr>
+        <p:txBody>
+          <a:bodyPr wrap="square" lIns="0" tIns="0" rIns="0" bIns="0" rtlCol="0" anchor="ctr"/>
+          <a:lstStyle/>
+          <a:p>
+            <a:pPr indent="0" marL="0">
+              <a:buNone/>
+            </a:pPr>
+            <a:r>
+              <a:rPr lang="en-US" sz="2600" b="1" dirty="0">
                 <a:solidFill>
                   <a:srgbClr val="0E1C42"/>
                 </a:solidFill>
@@ -3413,38 +4334,38 @@
                 <a:ea typeface="Calibri" pitchFamily="34" charset="-122"/>
                 <a:cs typeface="Calibri" pitchFamily="34" charset="-120"/>
               </a:rPr>
-              <a:t>✏️  Writing Time</a:t>
-            </a:r>
-            <a:endParaRPr lang="en-US" sz="3200" dirty="0"/>
-          </a:p>
-        </p:txBody>
-      </p:sp>
-      <p:sp>
-        <p:nvSpPr>
-          <p:cNvPr id="3" name="Text 1"/>
-          <p:cNvSpPr/>
-          <p:nvPr/>
-        </p:nvSpPr>
-        <p:spPr>
-          <a:xfrm>
-            <a:off x="914400" y="822960"/>
-            <a:ext cx="7315200" cy="365760"/>
-          </a:xfrm>
-          <a:prstGeom prst="rect">
-            <a:avLst/>
-          </a:prstGeom>
-          <a:noFill/>
-          <a:ln/>
-        </p:spPr>
-        <p:txBody>
-          <a:bodyPr wrap="square" lIns="0" tIns="0" rIns="0" bIns="0" rtlCol="0" anchor="ctr"/>
-          <a:lstStyle/>
-          <a:p>
-            <a:pPr algn="ctr" indent="0" marL="0">
-              <a:buNone/>
-            </a:pPr>
-            <a:r>
-              <a:rPr lang="en-US" sz="1600" dirty="0">
+              <a:t>5 minutes — keep your pencil moving!</a:t>
+            </a:r>
+            <a:endParaRPr lang="en-US" sz="2600" dirty="0"/>
+          </a:p>
+        </p:txBody>
+      </p:sp>
+      <p:sp>
+        <p:nvSpPr>
+          <p:cNvPr id="5" name="Text 3"/>
+          <p:cNvSpPr/>
+          <p:nvPr/>
+        </p:nvSpPr>
+        <p:spPr>
+          <a:xfrm>
+            <a:off x="365760" y="1463040"/>
+            <a:ext cx="8229600" cy="237744"/>
+          </a:xfrm>
+          <a:prstGeom prst="rect">
+            <a:avLst/>
+          </a:prstGeom>
+          <a:noFill/>
+          <a:ln/>
+        </p:spPr>
+        <p:txBody>
+          <a:bodyPr wrap="square" lIns="0" tIns="0" rIns="0" bIns="0" rtlCol="0" anchor="ctr"/>
+          <a:lstStyle/>
+          <a:p>
+            <a:pPr indent="0" marL="0">
+              <a:buNone/>
+            </a:pPr>
+            <a:r>
+              <a:rPr lang="en-US" sz="1100" b="1" spc="100" kern="0" dirty="0">
                 <a:solidFill>
                   <a:srgbClr val="C7922C"/>
                 </a:solidFill>
@@ -3452,32 +4373,32 @@
                 <a:ea typeface="Calibri" pitchFamily="34" charset="-122"/>
                 <a:cs typeface="Calibri" pitchFamily="34" charset="-120"/>
               </a:rPr>
-              <a:t>5 minutes — keep your pencil moving!</a:t>
-            </a:r>
-            <a:endParaRPr lang="en-US" sz="1600" dirty="0"/>
-          </a:p>
-        </p:txBody>
-      </p:sp>
-      <p:sp>
-        <p:nvSpPr>
-          <p:cNvPr id="4" name="Shape 2"/>
-          <p:cNvSpPr/>
-          <p:nvPr/>
-        </p:nvSpPr>
-        <p:spPr>
-          <a:xfrm>
-            <a:off x="457200" y="1371600"/>
-            <a:ext cx="8229600" cy="1280160"/>
+              <a:t>YOUR PROMPT</a:t>
+            </a:r>
+            <a:endParaRPr lang="en-US" sz="1100" dirty="0"/>
+          </a:p>
+        </p:txBody>
+      </p:sp>
+      <p:sp>
+        <p:nvSpPr>
+          <p:cNvPr id="6" name="Shape 4"/>
+          <p:cNvSpPr/>
+          <p:nvPr/>
+        </p:nvSpPr>
+        <p:spPr>
+          <a:xfrm>
+            <a:off x="365760" y="1737360"/>
+            <a:ext cx="8412480" cy="1417320"/>
           </a:xfrm>
           <a:prstGeom prst="roundRect">
             <a:avLst>
-              <a:gd name="adj" fmla="val 7143"/>
+              <a:gd name="adj" fmla="val 6452"/>
             </a:avLst>
           </a:prstGeom>
           <a:solidFill>
             <a:srgbClr val="FFFFFF"/>
           </a:solidFill>
-          <a:ln w="12700">
+          <a:ln w="19050">
             <a:solidFill>
               <a:srgbClr val="C7922C"/>
             </a:solidFill>
@@ -3494,44 +4415,30 @@
       </p:sp>
       <p:sp>
         <p:nvSpPr>
-          <p:cNvPr id="5" name="Text 3"/>
-          <p:cNvSpPr/>
-          <p:nvPr/>
-        </p:nvSpPr>
-        <p:spPr>
-          <a:xfrm>
-            <a:off x="640080" y="1417320"/>
-            <a:ext cx="7863840" cy="1188720"/>
-          </a:xfrm>
-          <a:prstGeom prst="rect">
-            <a:avLst/>
-          </a:prstGeom>
-          <a:noFill/>
-          <a:ln/>
-        </p:spPr>
-        <p:txBody>
-          <a:bodyPr wrap="square" lIns="0" tIns="0" rIns="0" bIns="0" rtlCol="0" anchor="t"/>
-          <a:lstStyle/>
-          <a:p>
-            <a:pPr indent="0" marL="0">
-              <a:buNone/>
-            </a:pPr>
-            <a:r>
-              <a:rPr lang="en-US" sz="1200" b="1" dirty="0">
-                <a:solidFill>
-                  <a:srgbClr val="C7922C"/>
-                </a:solidFill>
-                <a:latin typeface="Calibri" pitchFamily="34" charset="0"/>
-                <a:ea typeface="Calibri" pitchFamily="34" charset="-122"/>
-                <a:cs typeface="Calibri" pitchFamily="34" charset="-120"/>
-              </a:rPr>
-              <a:t>📖 Prompt: </a:t>
-            </a:r>
-            <a:pPr indent="0" marL="0">
-              <a:buNone/>
-            </a:pPr>
-            <a:r>
-              <a:rPr lang="en-US" sz="1200" i="1" dirty="0">
+          <p:cNvPr id="7" name="Text 5"/>
+          <p:cNvSpPr/>
+          <p:nvPr/>
+        </p:nvSpPr>
+        <p:spPr>
+          <a:xfrm>
+            <a:off x="594360" y="1865376"/>
+            <a:ext cx="7955280" cy="1161288"/>
+          </a:xfrm>
+          <a:prstGeom prst="rect">
+            <a:avLst/>
+          </a:prstGeom>
+          <a:noFill/>
+          <a:ln/>
+        </p:spPr>
+        <p:txBody>
+          <a:bodyPr wrap="square" lIns="0" tIns="0" rIns="0" bIns="0" rtlCol="0" anchor="ctr"/>
+          <a:lstStyle/>
+          <a:p>
+            <a:pPr indent="0" marL="0">
+              <a:buNone/>
+            </a:pPr>
+            <a:r>
+              <a:rPr lang="en-US" sz="1700" dirty="0">
                 <a:solidFill>
                   <a:srgbClr val="1E293B"/>
                 </a:solidFill>
@@ -3539,122 +4446,48 @@
                 <a:ea typeface="Calibri" pitchFamily="34" charset="-122"/>
                 <a:cs typeface="Calibri" pitchFamily="34" charset="-120"/>
               </a:rPr>
-              <a:t>Edmund changes the most in this story — from selfish to brave. Think of how YOU have changed this year. What is one way you are different now than you were at the beginning of the year?</a:t>
-            </a:r>
-            <a:endParaRPr lang="en-US" sz="1200" dirty="0"/>
-          </a:p>
-        </p:txBody>
-      </p:sp>
-      <p:sp>
-        <p:nvSpPr>
-          <p:cNvPr id="6" name="Shape 4"/>
-          <p:cNvSpPr/>
-          <p:nvPr/>
-        </p:nvSpPr>
-        <p:spPr>
-          <a:xfrm>
-            <a:off x="2286000" y="2926080"/>
-            <a:ext cx="4572000" cy="1280160"/>
-          </a:xfrm>
-          <a:prstGeom prst="roundRect">
-            <a:avLst>
-              <a:gd name="adj" fmla="val 8571"/>
-            </a:avLst>
-          </a:prstGeom>
-          <a:solidFill>
-            <a:srgbClr val="FFFFFF"/>
-          </a:solidFill>
-          <a:ln/>
-          <a:effectLst>
-            <a:outerShdw sx="100000" sy="100000" kx="0" ky="0" algn="bl" rotWithShape="0" blurRad="101600" dist="38100" dir="2700000">
-              <a:srgbClr val="000000">
-                <a:alpha val="12000"/>
-              </a:srgbClr>
-            </a:outerShdw>
-          </a:effectLst>
-        </p:spPr>
-      </p:sp>
-      <p:sp>
-        <p:nvSpPr>
-          <p:cNvPr id="7" name="Text 5"/>
-          <p:cNvSpPr/>
-          <p:nvPr/>
-        </p:nvSpPr>
-        <p:spPr>
-          <a:xfrm>
-            <a:off x="2468880" y="3017520"/>
-            <a:ext cx="4206240" cy="1097280"/>
-          </a:xfrm>
-          <a:prstGeom prst="rect">
-            <a:avLst/>
-          </a:prstGeom>
-          <a:noFill/>
-          <a:ln/>
-        </p:spPr>
-        <p:txBody>
-          <a:bodyPr wrap="square" lIns="0" tIns="0" rIns="0" bIns="0" rtlCol="0" anchor="t"/>
-          <a:lstStyle/>
-          <a:p>
-            <a:pPr indent="0" marL="0">
-              <a:buNone/>
-            </a:pPr>
-            <a:r>
-              <a:rPr lang="en-US" sz="1400" b="1" dirty="0">
-                <a:solidFill>
-                  <a:srgbClr val="0E1C42"/>
-                </a:solidFill>
-                <a:latin typeface="Calibri" pitchFamily="34" charset="0"/>
-                <a:ea typeface="Calibri" pitchFamily="34" charset="-122"/>
-                <a:cs typeface="Calibri" pitchFamily="34" charset="-120"/>
-              </a:rPr>
-              <a:t>If you get stuck:
-</a:t>
-            </a:r>
-            <a:pPr indent="0" marL="0">
-              <a:buNone/>
-            </a:pPr>
-            <a:r>
-              <a:rPr lang="en-US" sz="1300" dirty="0">
-                <a:solidFill>
-                  <a:srgbClr val="1E293B"/>
-                </a:solidFill>
-                <a:latin typeface="Calibri" pitchFamily="34" charset="0"/>
-                <a:ea typeface="Calibri" pitchFamily="34" charset="-122"/>
-                <a:cs typeface="Calibri" pitchFamily="34" charset="-120"/>
-              </a:rPr>
-              <a:t>• Reread the prompt above
-</a:t>
-            </a:r>
-            <a:pPr indent="0" marL="0">
-              <a:buNone/>
-            </a:pPr>
-            <a:r>
-              <a:rPr lang="en-US" sz="1300" dirty="0">
-                <a:solidFill>
-                  <a:srgbClr val="1E293B"/>
-                </a:solidFill>
-                <a:latin typeface="Calibri" pitchFamily="34" charset="0"/>
-                <a:ea typeface="Calibri" pitchFamily="34" charset="-122"/>
-                <a:cs typeface="Calibri" pitchFamily="34" charset="-120"/>
-              </a:rPr>
-              <a:t>• Write "I'm thinking..." until a new idea comes
-</a:t>
-            </a:r>
-            <a:pPr indent="0" marL="0">
-              <a:buNone/>
-            </a:pPr>
-            <a:r>
-              <a:rPr lang="en-US" sz="1300" dirty="0">
-                <a:solidFill>
-                  <a:srgbClr val="1E293B"/>
-                </a:solidFill>
-                <a:latin typeface="Calibri" pitchFamily="34" charset="0"/>
-                <a:ea typeface="Calibri" pitchFamily="34" charset="-122"/>
-                <a:cs typeface="Calibri" pitchFamily="34" charset="-120"/>
-              </a:rPr>
-              <a:t>• Keep going — don't erase!</a:t>
-            </a:r>
-            <a:endParaRPr lang="en-US" sz="1400" dirty="0"/>
+              <a:t>Aslan slips quietly away. Why do you think he leaves without saying goodbye? Write what you believe.</a:t>
+            </a:r>
+            <a:endParaRPr lang="en-US" sz="1700" dirty="0"/>
+          </a:p>
+        </p:txBody>
+      </p:sp>
+      <p:sp>
+        <p:nvSpPr>
+          <p:cNvPr id="8" name="Text 6"/>
+          <p:cNvSpPr/>
+          <p:nvPr/>
+        </p:nvSpPr>
+        <p:spPr>
+          <a:xfrm>
+            <a:off x="365760" y="3291840"/>
+            <a:ext cx="8412480" cy="365760"/>
+          </a:xfrm>
+          <a:prstGeom prst="rect">
+            <a:avLst/>
+          </a:prstGeom>
+          <a:noFill/>
+          <a:ln/>
+        </p:spPr>
+        <p:txBody>
+          <a:bodyPr wrap="square" lIns="0" tIns="0" rIns="0" bIns="0" rtlCol="0" anchor="ctr"/>
+          <a:lstStyle/>
+          <a:p>
+            <a:pPr indent="0" marL="0">
+              <a:buNone/>
+            </a:pPr>
+            <a:r>
+              <a:rPr lang="en-US" sz="1500" i="1" dirty="0">
+                <a:solidFill>
+                  <a:srgbClr val="64748B"/>
+                </a:solidFill>
+                <a:latin typeface="Calibri" pitchFamily="34" charset="0"/>
+                <a:ea typeface="Calibri" pitchFamily="34" charset="-122"/>
+                <a:cs typeface="Calibri" pitchFamily="34" charset="-120"/>
+              </a:rPr>
+              <a:t>Do not stop to erase. If you get stuck, write the last word again and keep going.</a:t>
+            </a:r>
+            <a:endParaRPr lang="en-US" sz="1500" dirty="0"/>
           </a:p>
         </p:txBody>
       </p:sp>
@@ -3692,39 +4525,23 @@
       </p:grpSpPr>
       <p:sp>
         <p:nvSpPr>
-          <p:cNvPr id="2" name="Text 0"/>
-          <p:cNvSpPr/>
-          <p:nvPr/>
-        </p:nvSpPr>
-        <p:spPr>
-          <a:xfrm>
-            <a:off x="3657600" y="365760"/>
-            <a:ext cx="1828800" cy="640080"/>
-          </a:xfrm>
-          <a:prstGeom prst="rect">
-            <a:avLst/>
-          </a:prstGeom>
-          <a:noFill/>
-          <a:ln/>
-        </p:spPr>
-        <p:txBody>
-          <a:bodyPr wrap="square" lIns="0" tIns="0" rIns="0" bIns="0" rtlCol="0" anchor="ctr"/>
-          <a:lstStyle/>
-          <a:p>
-            <a:pPr algn="ctr" indent="0" marL="0">
-              <a:buNone/>
-            </a:pPr>
-            <a:r>
-              <a:rPr lang="en-US" sz="4000" dirty="0">
-                <a:solidFill>
-                  <a:srgbClr val="000000"/>
-                </a:solidFill>
-              </a:rPr>
-              <a:t>🔍</a:t>
-            </a:r>
-            <a:endParaRPr lang="en-US" sz="4000" dirty="0"/>
-          </a:p>
-        </p:txBody>
+          <p:cNvPr id="2" name="Shape 0"/>
+          <p:cNvSpPr/>
+          <p:nvPr/>
+        </p:nvSpPr>
+        <p:spPr>
+          <a:xfrm>
+            <a:off x="0" y="0"/>
+            <a:ext cx="9144000" cy="566928"/>
+          </a:xfrm>
+          <a:prstGeom prst="rect">
+            <a:avLst/>
+          </a:prstGeom>
+          <a:solidFill>
+            <a:srgbClr val="34B76F"/>
+          </a:solidFill>
+          <a:ln/>
+        </p:spPr>
       </p:sp>
       <p:sp>
         <p:nvSpPr>
@@ -3734,24 +4551,63 @@
         </p:nvSpPr>
         <p:spPr>
           <a:xfrm>
-            <a:off x="914400" y="914400"/>
-            <a:ext cx="7315200" cy="640080"/>
-          </a:xfrm>
-          <a:prstGeom prst="rect">
-            <a:avLst/>
-          </a:prstGeom>
-          <a:noFill/>
-          <a:ln/>
-        </p:spPr>
-        <p:txBody>
-          <a:bodyPr wrap="square" lIns="0" tIns="0" rIns="0" bIns="0" rtlCol="0" anchor="ctr"/>
-          <a:lstStyle/>
-          <a:p>
-            <a:pPr algn="ctr" indent="0" marL="0">
-              <a:buNone/>
-            </a:pPr>
-            <a:r>
-              <a:rPr lang="en-US" sz="3200" b="1" dirty="0">
+            <a:off x="365760" y="54864"/>
+            <a:ext cx="8412480" cy="457200"/>
+          </a:xfrm>
+          <a:prstGeom prst="rect">
+            <a:avLst/>
+          </a:prstGeom>
+          <a:noFill/>
+          <a:ln/>
+        </p:spPr>
+        <p:txBody>
+          <a:bodyPr wrap="square" lIns="0" tIns="0" rIns="0" bIns="0" rtlCol="0" anchor="ctr"/>
+          <a:lstStyle/>
+          <a:p>
+            <a:pPr indent="0" marL="0">
+              <a:buNone/>
+            </a:pPr>
+            <a:r>
+              <a:rPr lang="en-US" sz="2200" b="1" dirty="0">
+                <a:solidFill>
+                  <a:srgbClr val="FFFFFF"/>
+                </a:solidFill>
+                <a:latin typeface="Calibri" pitchFamily="34" charset="0"/>
+                <a:ea typeface="Calibri" pitchFamily="34" charset="-122"/>
+                <a:cs typeface="Calibri" pitchFamily="34" charset="-120"/>
+              </a:rPr>
+              <a:t>🔍  Edit &amp; Revise</a:t>
+            </a:r>
+            <a:endParaRPr lang="en-US" sz="2200" dirty="0"/>
+          </a:p>
+        </p:txBody>
+      </p:sp>
+      <p:sp>
+        <p:nvSpPr>
+          <p:cNvPr id="4" name="Text 2"/>
+          <p:cNvSpPr/>
+          <p:nvPr/>
+        </p:nvSpPr>
+        <p:spPr>
+          <a:xfrm>
+            <a:off x="365760" y="868680"/>
+            <a:ext cx="8412480" cy="457200"/>
+          </a:xfrm>
+          <a:prstGeom prst="rect">
+            <a:avLst/>
+          </a:prstGeom>
+          <a:noFill/>
+          <a:ln/>
+        </p:spPr>
+        <p:txBody>
+          <a:bodyPr wrap="square" lIns="0" tIns="0" rIns="0" bIns="0" rtlCol="0" anchor="ctr"/>
+          <a:lstStyle/>
+          <a:p>
+            <a:pPr indent="0" marL="0">
+              <a:buNone/>
+            </a:pPr>
+            <a:r>
+              <a:rPr lang="en-US" sz="2400" b="1" dirty="0">
                 <a:solidFill>
                   <a:srgbClr val="0E1C42"/>
                 </a:solidFill>
@@ -3759,38 +4615,38 @@
                 <a:ea typeface="Calibri" pitchFamily="34" charset="-122"/>
                 <a:cs typeface="Calibri" pitchFamily="34" charset="-120"/>
               </a:rPr>
-              <a:t>Edit &amp; Revise</a:t>
-            </a:r>
-            <a:endParaRPr lang="en-US" sz="3200" dirty="0"/>
-          </a:p>
-        </p:txBody>
-      </p:sp>
-      <p:sp>
-        <p:nvSpPr>
-          <p:cNvPr id="4" name="Text 2"/>
-          <p:cNvSpPr/>
-          <p:nvPr/>
-        </p:nvSpPr>
-        <p:spPr>
-          <a:xfrm>
-            <a:off x="914400" y="1508760"/>
-            <a:ext cx="7315200" cy="457200"/>
-          </a:xfrm>
-          <a:prstGeom prst="rect">
-            <a:avLst/>
-          </a:prstGeom>
-          <a:noFill/>
-          <a:ln/>
-        </p:spPr>
-        <p:txBody>
-          <a:bodyPr wrap="square" lIns="0" tIns="0" rIns="0" bIns="0" rtlCol="0" anchor="ctr"/>
-          <a:lstStyle/>
-          <a:p>
-            <a:pPr algn="ctr" indent="0" marL="0">
-              <a:buNone/>
-            </a:pPr>
-            <a:r>
-              <a:rPr lang="en-US" sz="1600" dirty="0">
+              <a:t>1 minute — pick ONE thing to fix.</a:t>
+            </a:r>
+            <a:endParaRPr lang="en-US" sz="2400" dirty="0"/>
+          </a:p>
+        </p:txBody>
+      </p:sp>
+      <p:sp>
+        <p:nvSpPr>
+          <p:cNvPr id="5" name="Text 3"/>
+          <p:cNvSpPr/>
+          <p:nvPr/>
+        </p:nvSpPr>
+        <p:spPr>
+          <a:xfrm>
+            <a:off x="365760" y="1417320"/>
+            <a:ext cx="8229600" cy="237744"/>
+          </a:xfrm>
+          <a:prstGeom prst="rect">
+            <a:avLst/>
+          </a:prstGeom>
+          <a:noFill/>
+          <a:ln/>
+        </p:spPr>
+        <p:txBody>
+          <a:bodyPr wrap="square" lIns="0" tIns="0" rIns="0" bIns="0" rtlCol="0" anchor="ctr"/>
+          <a:lstStyle/>
+          <a:p>
+            <a:pPr indent="0" marL="0">
+              <a:buNone/>
+            </a:pPr>
+            <a:r>
+              <a:rPr lang="en-US" sz="1100" b="1" spc="100" kern="0" dirty="0">
                 <a:solidFill>
                   <a:srgbClr val="34B76F"/>
                 </a:solidFill>
@@ -3798,26 +4654,26 @@
                 <a:ea typeface="Calibri" pitchFamily="34" charset="-122"/>
                 <a:cs typeface="Calibri" pitchFamily="34" charset="-120"/>
               </a:rPr>
-              <a:t>1 minute — pick ONE thing to fix</a:t>
-            </a:r>
-            <a:endParaRPr lang="en-US" sz="1600" dirty="0"/>
-          </a:p>
-        </p:txBody>
-      </p:sp>
-      <p:sp>
-        <p:nvSpPr>
-          <p:cNvPr id="5" name="Shape 3"/>
-          <p:cNvSpPr/>
-          <p:nvPr/>
-        </p:nvSpPr>
-        <p:spPr>
-          <a:xfrm>
-            <a:off x="1371600" y="2103120"/>
-            <a:ext cx="6400800" cy="640080"/>
+              <a:t>TODAY'S EDIT FOCUS</a:t>
+            </a:r>
+            <a:endParaRPr lang="en-US" sz="1100" dirty="0"/>
+          </a:p>
+        </p:txBody>
+      </p:sp>
+      <p:sp>
+        <p:nvSpPr>
+          <p:cNvPr id="6" name="Shape 4"/>
+          <p:cNvSpPr/>
+          <p:nvPr/>
+        </p:nvSpPr>
+        <p:spPr>
+          <a:xfrm>
+            <a:off x="365760" y="1691640"/>
+            <a:ext cx="8412480" cy="777240"/>
           </a:xfrm>
           <a:prstGeom prst="roundRect">
             <a:avLst>
-              <a:gd name="adj" fmla="val 14286"/>
+              <a:gd name="adj" fmla="val 11765"/>
             </a:avLst>
           </a:prstGeom>
           <a:solidFill>
@@ -3840,44 +4696,30 @@
       </p:sp>
       <p:sp>
         <p:nvSpPr>
-          <p:cNvPr id="6" name="Text 4"/>
-          <p:cNvSpPr/>
-          <p:nvPr/>
-        </p:nvSpPr>
-        <p:spPr>
-          <a:xfrm>
-            <a:off x="1554480" y="2148840"/>
-            <a:ext cx="6035040" cy="548640"/>
-          </a:xfrm>
-          <a:prstGeom prst="rect">
-            <a:avLst/>
-          </a:prstGeom>
-          <a:noFill/>
-          <a:ln/>
-        </p:spPr>
-        <p:txBody>
-          <a:bodyPr wrap="square" lIns="0" tIns="0" rIns="0" bIns="0" rtlCol="0" anchor="ctr"/>
-          <a:lstStyle/>
-          <a:p>
-            <a:pPr indent="0" marL="0">
-              <a:buNone/>
-            </a:pPr>
-            <a:r>
-              <a:rPr lang="en-US" sz="1400" b="1" dirty="0">
-                <a:solidFill>
-                  <a:srgbClr val="34B76F"/>
-                </a:solidFill>
-                <a:latin typeface="Calibri" pitchFamily="34" charset="0"/>
-                <a:ea typeface="Calibri" pitchFamily="34" charset="-122"/>
-                <a:cs typeface="Calibri" pitchFamily="34" charset="-120"/>
-              </a:rPr>
-              <a:t>Today's check: </a:t>
-            </a:r>
-            <a:pPr indent="0" marL="0">
-              <a:buNone/>
-            </a:pPr>
-            <a:r>
-              <a:rPr lang="en-US" sz="1400" dirty="0">
+          <p:cNvPr id="7" name="Text 5"/>
+          <p:cNvSpPr/>
+          <p:nvPr/>
+        </p:nvSpPr>
+        <p:spPr>
+          <a:xfrm>
+            <a:off x="594360" y="1819656"/>
+            <a:ext cx="7955280" cy="521208"/>
+          </a:xfrm>
+          <a:prstGeom prst="rect">
+            <a:avLst/>
+          </a:prstGeom>
+          <a:noFill/>
+          <a:ln/>
+        </p:spPr>
+        <p:txBody>
+          <a:bodyPr wrap="square" lIns="0" tIns="0" rIns="0" bIns="0" rtlCol="0" anchor="ctr"/>
+          <a:lstStyle/>
+          <a:p>
+            <a:pPr indent="0" marL="0">
+              <a:buNone/>
+            </a:pPr>
+            <a:r>
+              <a:rPr lang="en-US" sz="1700" dirty="0">
                 <a:solidFill>
                   <a:srgbClr val="1E293B"/>
                 </a:solidFill>
@@ -3885,40 +4727,11 @@
                 <a:ea typeface="Calibri" pitchFamily="34" charset="-122"/>
                 <a:cs typeface="Calibri" pitchFamily="34" charset="-120"/>
               </a:rPr>
-              <a:t>Did I explain how I changed, not just that I changed?</a:t>
-            </a:r>
-            <a:endParaRPr lang="en-US" sz="1400" dirty="0"/>
-          </a:p>
-        </p:txBody>
-      </p:sp>
-      <p:sp>
-        <p:nvSpPr>
-          <p:cNvPr id="7" name="Shape 5"/>
-          <p:cNvSpPr/>
-          <p:nvPr/>
-        </p:nvSpPr>
-        <p:spPr>
-          <a:xfrm>
-            <a:off x="1371600" y="2926080"/>
-            <a:ext cx="6400800" cy="1463040"/>
-          </a:xfrm>
-          <a:prstGeom prst="roundRect">
-            <a:avLst>
-              <a:gd name="adj" fmla="val 6250"/>
-            </a:avLst>
-          </a:prstGeom>
-          <a:solidFill>
-            <a:srgbClr val="FFFFFF"/>
-          </a:solidFill>
-          <a:ln/>
-          <a:effectLst>
-            <a:outerShdw sx="100000" sy="100000" kx="0" ky="0" algn="bl" rotWithShape="0" blurRad="101600" dist="38100" dir="2700000">
-              <a:srgbClr val="000000">
-                <a:alpha val="12000"/>
-              </a:srgbClr>
-            </a:outerShdw>
-          </a:effectLst>
-        </p:spPr>
+              <a:t>Did I read my writing out loud to check that it makes sense?</a:t>
+            </a:r>
+            <a:endParaRPr lang="en-US" sz="1700" dirty="0"/>
+          </a:p>
+        </p:txBody>
       </p:sp>
       <p:sp>
         <p:nvSpPr>
@@ -3928,45 +4741,24 @@
         </p:nvSpPr>
         <p:spPr>
           <a:xfrm>
-            <a:off x="1554480" y="3017520"/>
-            <a:ext cx="6035040" cy="1280160"/>
-          </a:xfrm>
-          <a:prstGeom prst="rect">
-            <a:avLst/>
-          </a:prstGeom>
-          <a:noFill/>
-          <a:ln/>
-        </p:spPr>
-        <p:txBody>
-          <a:bodyPr wrap="square" lIns="0" tIns="0" rIns="0" bIns="0" rtlCol="0" anchor="t"/>
-          <a:lstStyle/>
-          <a:p>
-            <a:pPr indent="0" marL="0">
-              <a:spcAft>
-                <a:spcPts val="200"/>
-              </a:spcAft>
-              <a:buNone/>
-            </a:pPr>
-            <a:r>
-              <a:rPr lang="en-US" sz="1300" b="1" dirty="0">
-                <a:solidFill>
-                  <a:srgbClr val="0E1C42"/>
-                </a:solidFill>
-                <a:latin typeface="Calibri" pitchFamily="34" charset="0"/>
-                <a:ea typeface="Calibri" pitchFamily="34" charset="-122"/>
-                <a:cs typeface="Calibri" pitchFamily="34" charset="-120"/>
-              </a:rPr>
-              <a:t>Quick check:
-</a:t>
-            </a:r>
-            <a:pPr indent="0" marL="0">
-              <a:spcAft>
-                <a:spcPts val="200"/>
-              </a:spcAft>
-              <a:buNone/>
-            </a:pPr>
-            <a:r>
-              <a:rPr lang="en-US" sz="1200" dirty="0">
+            <a:off x="365760" y="2651760"/>
+            <a:ext cx="8412480" cy="365760"/>
+          </a:xfrm>
+          <a:prstGeom prst="rect">
+            <a:avLst/>
+          </a:prstGeom>
+          <a:noFill/>
+          <a:ln/>
+        </p:spPr>
+        <p:txBody>
+          <a:bodyPr wrap="square" lIns="0" tIns="0" rIns="0" bIns="0" rtlCol="0" anchor="ctr"/>
+          <a:lstStyle/>
+          <a:p>
+            <a:pPr indent="0" marL="0">
+              <a:buNone/>
+            </a:pPr>
+            <a:r>
+              <a:rPr lang="en-US" sz="1500" b="1" dirty="0">
                 <a:solidFill>
                   <a:srgbClr val="1E293B"/>
                 </a:solidFill>
@@ -3974,17 +4766,13 @@
                 <a:ea typeface="Calibri" pitchFamily="34" charset="-122"/>
                 <a:cs typeface="Calibri" pitchFamily="34" charset="-120"/>
               </a:rPr>
-              <a:t>□ Capital letters at the start of every sentence
-</a:t>
-            </a:r>
-            <a:pPr indent="0" marL="0">
-              <a:spcAft>
-                <a:spcPts val="200"/>
-              </a:spcAft>
-              <a:buNone/>
-            </a:pPr>
-            <a:r>
-              <a:rPr lang="en-US" sz="1200" dirty="0">
+              <a:t>Quick check:  </a:t>
+            </a:r>
+            <a:pPr indent="0" marL="0">
+              <a:buNone/>
+            </a:pPr>
+            <a:r>
+              <a:rPr lang="en-US" sz="1500" dirty="0">
                 <a:solidFill>
                   <a:srgbClr val="1E293B"/>
                 </a:solidFill>
@@ -3992,45 +4780,9 @@
                 <a:ea typeface="Calibri" pitchFamily="34" charset="-122"/>
                 <a:cs typeface="Calibri" pitchFamily="34" charset="-120"/>
               </a:rPr>
-              <a:t>□ End punctuation ( .  ?  ! )
-</a:t>
-            </a:r>
-            <a:pPr indent="0" marL="0">
-              <a:spcAft>
-                <a:spcPts val="200"/>
-              </a:spcAft>
-              <a:buNone/>
-            </a:pPr>
-            <a:r>
-              <a:rPr lang="en-US" sz="1200" dirty="0">
-                <a:solidFill>
-                  <a:srgbClr val="1E293B"/>
-                </a:solidFill>
-                <a:latin typeface="Calibri" pitchFamily="34" charset="0"/>
-                <a:ea typeface="Calibri" pitchFamily="34" charset="-122"/>
-                <a:cs typeface="Calibri" pitchFamily="34" charset="-120"/>
-              </a:rPr>
-              <a:t>□ Spelling — circle any words that look wrong
-</a:t>
-            </a:r>
-            <a:pPr indent="0" marL="0">
-              <a:spcAft>
-                <a:spcPts val="200"/>
-              </a:spcAft>
-              <a:buNone/>
-            </a:pPr>
-            <a:r>
-              <a:rPr lang="en-US" sz="1200" dirty="0">
-                <a:solidFill>
-                  <a:srgbClr val="1E293B"/>
-                </a:solidFill>
-                <a:latin typeface="Calibri" pitchFamily="34" charset="0"/>
-                <a:ea typeface="Calibri" pitchFamily="34" charset="-122"/>
-                <a:cs typeface="Calibri" pitchFamily="34" charset="-120"/>
-              </a:rPr>
-              <a:t>□ Read it quietly to yourself — does it sound right?</a:t>
-            </a:r>
-            <a:endParaRPr lang="en-US" sz="1300" dirty="0"/>
+              <a:t>capitals  ·  end punctuation  ·  circle a word you are unsure of  ·  read it aloud</a:t>
+            </a:r>
+            <a:endParaRPr lang="en-US" sz="1500" dirty="0"/>
           </a:p>
         </p:txBody>
       </p:sp>
@@ -4068,39 +4820,23 @@
       </p:grpSpPr>
       <p:sp>
         <p:nvSpPr>
-          <p:cNvPr id="2" name="Text 0"/>
-          <p:cNvSpPr/>
-          <p:nvPr/>
-        </p:nvSpPr>
-        <p:spPr>
-          <a:xfrm>
-            <a:off x="3657600" y="457200"/>
-            <a:ext cx="1828800" cy="731520"/>
-          </a:xfrm>
-          <a:prstGeom prst="rect">
-            <a:avLst/>
-          </a:prstGeom>
-          <a:noFill/>
-          <a:ln/>
-        </p:spPr>
-        <p:txBody>
-          <a:bodyPr wrap="square" lIns="0" tIns="0" rIns="0" bIns="0" rtlCol="0" anchor="ctr"/>
-          <a:lstStyle/>
-          <a:p>
-            <a:pPr algn="ctr" indent="0" marL="0">
-              <a:buNone/>
-            </a:pPr>
-            <a:r>
-              <a:rPr lang="en-US" sz="4400" dirty="0">
-                <a:solidFill>
-                  <a:srgbClr val="000000"/>
-                </a:solidFill>
-              </a:rPr>
-              <a:t>🗣️</a:t>
-            </a:r>
-            <a:endParaRPr lang="en-US" sz="4400" dirty="0"/>
-          </a:p>
-        </p:txBody>
+          <p:cNvPr id="2" name="Shape 0"/>
+          <p:cNvSpPr/>
+          <p:nvPr/>
+        </p:nvSpPr>
+        <p:spPr>
+          <a:xfrm>
+            <a:off x="0" y="0"/>
+            <a:ext cx="9144000" cy="566928"/>
+          </a:xfrm>
+          <a:prstGeom prst="rect">
+            <a:avLst/>
+          </a:prstGeom>
+          <a:solidFill>
+            <a:srgbClr val="55C8E8"/>
+          </a:solidFill>
+          <a:ln/>
+        </p:spPr>
       </p:sp>
       <p:sp>
         <p:nvSpPr>
@@ -4110,24 +4846,63 @@
         </p:nvSpPr>
         <p:spPr>
           <a:xfrm>
-            <a:off x="914400" y="1097280"/>
-            <a:ext cx="7315200" cy="640080"/>
-          </a:xfrm>
-          <a:prstGeom prst="rect">
-            <a:avLst/>
-          </a:prstGeom>
-          <a:noFill/>
-          <a:ln/>
-        </p:spPr>
-        <p:txBody>
-          <a:bodyPr wrap="square" lIns="0" tIns="0" rIns="0" bIns="0" rtlCol="0" anchor="ctr"/>
-          <a:lstStyle/>
-          <a:p>
-            <a:pPr algn="ctr" indent="0" marL="0">
-              <a:buNone/>
-            </a:pPr>
-            <a:r>
-              <a:rPr lang="en-US" sz="3400" b="1" dirty="0">
+            <a:off x="365760" y="54864"/>
+            <a:ext cx="8412480" cy="457200"/>
+          </a:xfrm>
+          <a:prstGeom prst="rect">
+            <a:avLst/>
+          </a:prstGeom>
+          <a:noFill/>
+          <a:ln/>
+        </p:spPr>
+        <p:txBody>
+          <a:bodyPr wrap="square" lIns="0" tIns="0" rIns="0" bIns="0" rtlCol="0" anchor="ctr"/>
+          <a:lstStyle/>
+          <a:p>
+            <a:pPr indent="0" marL="0">
+              <a:buNone/>
+            </a:pPr>
+            <a:r>
+              <a:rPr lang="en-US" sz="2200" b="1" dirty="0">
+                <a:solidFill>
+                  <a:srgbClr val="FFFFFF"/>
+                </a:solidFill>
+                <a:latin typeface="Calibri" pitchFamily="34" charset="0"/>
+                <a:ea typeface="Calibri" pitchFamily="34" charset="-122"/>
+                <a:cs typeface="Calibri" pitchFamily="34" charset="-120"/>
+              </a:rPr>
+              <a:t>🗣️  Share Time</a:t>
+            </a:r>
+            <a:endParaRPr lang="en-US" sz="2200" dirty="0"/>
+          </a:p>
+        </p:txBody>
+      </p:sp>
+      <p:sp>
+        <p:nvSpPr>
+          <p:cNvPr id="4" name="Text 2"/>
+          <p:cNvSpPr/>
+          <p:nvPr/>
+        </p:nvSpPr>
+        <p:spPr>
+          <a:xfrm>
+            <a:off x="365760" y="1005840"/>
+            <a:ext cx="8412480" cy="548640"/>
+          </a:xfrm>
+          <a:prstGeom prst="rect">
+            <a:avLst/>
+          </a:prstGeom>
+          <a:noFill/>
+          <a:ln/>
+        </p:spPr>
+        <p:txBody>
+          <a:bodyPr wrap="square" lIns="0" tIns="0" rIns="0" bIns="0" rtlCol="0" anchor="ctr"/>
+          <a:lstStyle/>
+          <a:p>
+            <a:pPr indent="0" marL="0">
+              <a:buNone/>
+            </a:pPr>
+            <a:r>
+              <a:rPr lang="en-US" sz="2600" b="1" dirty="0">
                 <a:solidFill>
                   <a:srgbClr val="0E1C42"/>
                 </a:solidFill>
@@ -4135,191 +4910,48 @@
                 <a:ea typeface="Calibri" pitchFamily="34" charset="-122"/>
                 <a:cs typeface="Calibri" pitchFamily="34" charset="-120"/>
               </a:rPr>
-              <a:t>Share Time</a:t>
-            </a:r>
-            <a:endParaRPr lang="en-US" sz="3400" dirty="0"/>
-          </a:p>
-        </p:txBody>
-      </p:sp>
-      <p:sp>
-        <p:nvSpPr>
-          <p:cNvPr id="4" name="Text 2"/>
-          <p:cNvSpPr/>
-          <p:nvPr/>
-        </p:nvSpPr>
-        <p:spPr>
-          <a:xfrm>
-            <a:off x="914400" y="1737360"/>
-            <a:ext cx="7315200" cy="457200"/>
-          </a:xfrm>
-          <a:prstGeom prst="rect">
-            <a:avLst/>
-          </a:prstGeom>
-          <a:noFill/>
-          <a:ln/>
-        </p:spPr>
-        <p:txBody>
-          <a:bodyPr wrap="square" lIns="0" tIns="0" rIns="0" bIns="0" rtlCol="0" anchor="ctr"/>
-          <a:lstStyle/>
-          <a:p>
-            <a:pPr algn="ctr" indent="0" marL="0">
+              <a:t>3 minutes — let's hear your writing!</a:t>
+            </a:r>
+            <a:endParaRPr lang="en-US" sz="2600" dirty="0"/>
+          </a:p>
+        </p:txBody>
+      </p:sp>
+      <p:sp>
+        <p:nvSpPr>
+          <p:cNvPr id="5" name="Text 3"/>
+          <p:cNvSpPr/>
+          <p:nvPr/>
+        </p:nvSpPr>
+        <p:spPr>
+          <a:xfrm>
+            <a:off x="365760" y="1691640"/>
+            <a:ext cx="8412480" cy="457200"/>
+          </a:xfrm>
+          <a:prstGeom prst="rect">
+            <a:avLst/>
+          </a:prstGeom>
+          <a:noFill/>
+          <a:ln/>
+        </p:spPr>
+        <p:txBody>
+          <a:bodyPr wrap="square" lIns="0" tIns="0" rIns="0" bIns="0" rtlCol="0" anchor="ctr"/>
+          <a:lstStyle/>
+          <a:p>
+            <a:pPr indent="0" marL="0">
               <a:buNone/>
             </a:pPr>
             <a:r>
               <a:rPr lang="en-US" sz="1700" dirty="0">
                 <a:solidFill>
-                  <a:srgbClr val="55C8E8"/>
-                </a:solidFill>
-                <a:latin typeface="Calibri" pitchFamily="34" charset="0"/>
-                <a:ea typeface="Calibri" pitchFamily="34" charset="-122"/>
-                <a:cs typeface="Calibri" pitchFamily="34" charset="-120"/>
-              </a:rPr>
-              <a:t>3 minutes — let's hear your writing!</a:t>
+                  <a:srgbClr val="1E293B"/>
+                </a:solidFill>
+                <a:latin typeface="Calibri" pitchFamily="34" charset="0"/>
+                <a:ea typeface="Calibri" pitchFamily="34" charset="-122"/>
+                <a:cs typeface="Calibri" pitchFamily="34" charset="-120"/>
+              </a:rPr>
+              <a:t>Raise your hand  ·  paste it in the chat  ·  or hold your paper up to the camera</a:t>
             </a:r>
             <a:endParaRPr lang="en-US" sz="1700" dirty="0"/>
-          </a:p>
-        </p:txBody>
-      </p:sp>
-      <p:sp>
-        <p:nvSpPr>
-          <p:cNvPr id="5" name="Shape 3"/>
-          <p:cNvSpPr/>
-          <p:nvPr/>
-        </p:nvSpPr>
-        <p:spPr>
-          <a:xfrm>
-            <a:off x="1828800" y="2468880"/>
-            <a:ext cx="5486400" cy="1645920"/>
-          </a:xfrm>
-          <a:prstGeom prst="roundRect">
-            <a:avLst>
-              <a:gd name="adj" fmla="val 6667"/>
-            </a:avLst>
-          </a:prstGeom>
-          <a:solidFill>
-            <a:srgbClr val="FFFFFF"/>
-          </a:solidFill>
-          <a:ln/>
-          <a:effectLst>
-            <a:outerShdw sx="100000" sy="100000" kx="0" ky="0" algn="bl" rotWithShape="0" blurRad="101600" dist="38100" dir="2700000">
-              <a:srgbClr val="000000">
-                <a:alpha val="12000"/>
-              </a:srgbClr>
-            </a:outerShdw>
-          </a:effectLst>
-        </p:spPr>
-      </p:sp>
-      <p:sp>
-        <p:nvSpPr>
-          <p:cNvPr id="6" name="Text 4"/>
-          <p:cNvSpPr/>
-          <p:nvPr/>
-        </p:nvSpPr>
-        <p:spPr>
-          <a:xfrm>
-            <a:off x="2103120" y="2560320"/>
-            <a:ext cx="4937760" cy="1463040"/>
-          </a:xfrm>
-          <a:prstGeom prst="rect">
-            <a:avLst/>
-          </a:prstGeom>
-          <a:noFill/>
-          <a:ln/>
-        </p:spPr>
-        <p:txBody>
-          <a:bodyPr wrap="square" lIns="0" tIns="0" rIns="0" bIns="0" rtlCol="0" anchor="t"/>
-          <a:lstStyle/>
-          <a:p>
-            <a:pPr indent="0" marL="0">
-              <a:spcAft>
-                <a:spcPts val="200"/>
-              </a:spcAft>
-              <a:buNone/>
-            </a:pPr>
-            <a:r>
-              <a:rPr lang="en-US" sz="1400" b="1" dirty="0">
-                <a:solidFill>
-                  <a:srgbClr val="0E1C42"/>
-                </a:solidFill>
-                <a:latin typeface="Calibri" pitchFamily="34" charset="0"/>
-                <a:ea typeface="Calibri" pitchFamily="34" charset="-122"/>
-                <a:cs typeface="Calibri" pitchFamily="34" charset="-120"/>
-              </a:rPr>
-              <a:t>How to share:
-</a:t>
-            </a:r>
-            <a:pPr indent="0" marL="0">
-              <a:spcAft>
-                <a:spcPts val="200"/>
-              </a:spcAft>
-              <a:buNone/>
-            </a:pPr>
-            <a:r>
-              <a:rPr lang="en-US" sz="1300" dirty="0">
-                <a:solidFill>
-                  <a:srgbClr val="1E293B"/>
-                </a:solidFill>
-                <a:latin typeface="Calibri" pitchFamily="34" charset="0"/>
-                <a:ea typeface="Calibri" pitchFamily="34" charset="-122"/>
-                <a:cs typeface="Calibri" pitchFamily="34" charset="-120"/>
-              </a:rPr>
-              <a:t>✋ Raise your hand if you want to read yours aloud
-</a:t>
-            </a:r>
-            <a:pPr indent="0" marL="0">
-              <a:spcAft>
-                <a:spcPts val="200"/>
-              </a:spcAft>
-              <a:buNone/>
-            </a:pPr>
-            <a:r>
-              <a:rPr lang="en-US" sz="1300" dirty="0">
-                <a:solidFill>
-                  <a:srgbClr val="1E293B"/>
-                </a:solidFill>
-                <a:latin typeface="Calibri" pitchFamily="34" charset="0"/>
-                <a:ea typeface="Calibri" pitchFamily="34" charset="-122"/>
-                <a:cs typeface="Calibri" pitchFamily="34" charset="-120"/>
-              </a:rPr>
-              <a:t>💬 Or paste your writing in the chat
-</a:t>
-            </a:r>
-            <a:pPr indent="0" marL="0">
-              <a:spcAft>
-                <a:spcPts val="200"/>
-              </a:spcAft>
-              <a:buNone/>
-            </a:pPr>
-            <a:r>
-              <a:rPr lang="en-US" sz="1300" dirty="0">
-                <a:solidFill>
-                  <a:srgbClr val="1E293B"/>
-                </a:solidFill>
-                <a:latin typeface="Calibri" pitchFamily="34" charset="0"/>
-                <a:ea typeface="Calibri" pitchFamily="34" charset="-122"/>
-                <a:cs typeface="Calibri" pitchFamily="34" charset="-120"/>
-              </a:rPr>
-              <a:t>👂 Listen respectfully when others share
-</a:t>
-            </a:r>
-            <a:pPr indent="0" marL="0">
-              <a:spcAft>
-                <a:spcPts val="200"/>
-              </a:spcAft>
-              <a:buNone/>
-            </a:pPr>
-            <a:r>
-              <a:rPr lang="en-US" sz="1200" i="1" dirty="0">
-                <a:solidFill>
-                  <a:srgbClr val="64748B"/>
-                </a:solidFill>
-                <a:latin typeface="Calibri" pitchFamily="34" charset="0"/>
-                <a:ea typeface="Calibri" pitchFamily="34" charset="-122"/>
-                <a:cs typeface="Calibri" pitchFamily="34" charset="-120"/>
-              </a:rPr>
-              <a:t>Every writer's ideas matter — there are no wrong answers.</a:t>
-            </a:r>
-            <a:endParaRPr lang="en-US" sz="1400" dirty="0"/>
           </a:p>
         </p:txBody>
       </p:sp>
@@ -4337,7 +4969,7 @@
     <p:bg>
       <p:bgPr>
         <a:solidFill>
-          <a:srgbClr val="E5F7FC"/>
+          <a:srgbClr val="F8FAFC"/>
         </a:solidFill>
       </p:bgPr>
     </p:bg>
@@ -4357,81 +4989,17 @@
       </p:grpSpPr>
       <p:sp>
         <p:nvSpPr>
-          <p:cNvPr id="2" name="Text 0"/>
-          <p:cNvSpPr/>
-          <p:nvPr/>
-        </p:nvSpPr>
-        <p:spPr>
-          <a:xfrm>
-            <a:off x="365760" y="164592"/>
-            <a:ext cx="5943600" cy="566928"/>
-          </a:xfrm>
-          <a:prstGeom prst="rect">
-            <a:avLst/>
-          </a:prstGeom>
-          <a:noFill/>
-          <a:ln/>
-        </p:spPr>
-        <p:txBody>
-          <a:bodyPr wrap="square" lIns="0" tIns="0" rIns="0" bIns="0" rtlCol="0" anchor="ctr"/>
-          <a:lstStyle/>
-          <a:p>
-            <a:pPr algn="l" indent="0" marL="0">
-              <a:buNone/>
-            </a:pPr>
-            <a:r>
-              <a:rPr lang="en-US" sz="2800" b="1" dirty="0">
-                <a:solidFill>
-                  <a:srgbClr val="0E1C42"/>
-                </a:solidFill>
-                <a:latin typeface="Calibri" pitchFamily="34" charset="0"/>
-                <a:ea typeface="Calibri" pitchFamily="34" charset="-122"/>
-                <a:cs typeface="Calibri" pitchFamily="34" charset="-120"/>
-              </a:rPr>
-              <a:t>💡 Today's Focus</a:t>
-            </a:r>
-            <a:endParaRPr lang="en-US" sz="2800" dirty="0"/>
-          </a:p>
-        </p:txBody>
-      </p:sp>
-      <p:sp>
-        <p:nvSpPr>
-          <p:cNvPr id="3" name="Shape 1"/>
-          <p:cNvSpPr/>
-          <p:nvPr/>
-        </p:nvSpPr>
-        <p:spPr>
-          <a:xfrm>
-            <a:off x="365760" y="749808"/>
-            <a:ext cx="8412480" cy="0"/>
-          </a:xfrm>
-          <a:prstGeom prst="line">
-            <a:avLst/>
-          </a:prstGeom>
-          <a:noFill/>
-          <a:ln w="19050">
-            <a:solidFill>
-              <a:srgbClr val="4A90D9"/>
-            </a:solidFill>
-            <a:prstDash val="solid"/>
-          </a:ln>
-        </p:spPr>
-      </p:sp>
-      <p:sp>
-        <p:nvSpPr>
-          <p:cNvPr id="4" name="Shape 2"/>
-          <p:cNvSpPr/>
-          <p:nvPr/>
-        </p:nvSpPr>
-        <p:spPr>
-          <a:xfrm>
-            <a:off x="6492240" y="173736"/>
-            <a:ext cx="2286000" cy="502920"/>
-          </a:xfrm>
-          <a:prstGeom prst="roundRect">
-            <a:avLst>
-              <a:gd name="adj" fmla="val 21818"/>
-            </a:avLst>
+          <p:cNvPr id="2" name="Shape 0"/>
+          <p:cNvSpPr/>
+          <p:nvPr/>
+        </p:nvSpPr>
+        <p:spPr>
+          <a:xfrm>
+            <a:off x="0" y="0"/>
+            <a:ext cx="9144000" cy="566928"/>
+          </a:xfrm>
+          <a:prstGeom prst="rect">
+            <a:avLst/>
           </a:prstGeom>
           <a:solidFill>
             <a:srgbClr val="4A90D9"/>
@@ -4441,30 +5009,108 @@
       </p:sp>
       <p:sp>
         <p:nvSpPr>
+          <p:cNvPr id="3" name="Text 1"/>
+          <p:cNvSpPr/>
+          <p:nvPr/>
+        </p:nvSpPr>
+        <p:spPr>
+          <a:xfrm>
+            <a:off x="365760" y="54864"/>
+            <a:ext cx="8412480" cy="457200"/>
+          </a:xfrm>
+          <a:prstGeom prst="rect">
+            <a:avLst/>
+          </a:prstGeom>
+          <a:noFill/>
+          <a:ln/>
+        </p:spPr>
+        <p:txBody>
+          <a:bodyPr wrap="square" lIns="0" tIns="0" rIns="0" bIns="0" rtlCol="0" anchor="ctr"/>
+          <a:lstStyle/>
+          <a:p>
+            <a:pPr indent="0" marL="0">
+              <a:buNone/>
+            </a:pPr>
+            <a:r>
+              <a:rPr lang="en-US" sz="2200" b="1" dirty="0">
+                <a:solidFill>
+                  <a:srgbClr val="FFFFFF"/>
+                </a:solidFill>
+                <a:latin typeface="Calibri" pitchFamily="34" charset="0"/>
+                <a:ea typeface="Calibri" pitchFamily="34" charset="-122"/>
+                <a:cs typeface="Calibri" pitchFamily="34" charset="-120"/>
+              </a:rPr>
+              <a:t>📖  Today</a:t>
+            </a:r>
+            <a:endParaRPr lang="en-US" sz="2200" dirty="0"/>
+          </a:p>
+        </p:txBody>
+      </p:sp>
+      <p:sp>
+        <p:nvSpPr>
+          <p:cNvPr id="4" name="Text 2"/>
+          <p:cNvSpPr/>
+          <p:nvPr/>
+        </p:nvSpPr>
+        <p:spPr>
+          <a:xfrm>
+            <a:off x="365760" y="777240"/>
+            <a:ext cx="8229600" cy="237744"/>
+          </a:xfrm>
+          <a:prstGeom prst="rect">
+            <a:avLst/>
+          </a:prstGeom>
+          <a:noFill/>
+          <a:ln/>
+        </p:spPr>
+        <p:txBody>
+          <a:bodyPr wrap="square" lIns="0" tIns="0" rIns="0" bIns="0" rtlCol="0" anchor="ctr"/>
+          <a:lstStyle/>
+          <a:p>
+            <a:pPr indent="0" marL="0">
+              <a:buNone/>
+            </a:pPr>
+            <a:r>
+              <a:rPr lang="en-US" sz="1100" b="1" spc="100" kern="0" dirty="0">
+                <a:solidFill>
+                  <a:srgbClr val="8B6FC0"/>
+                </a:solidFill>
+                <a:latin typeface="Calibri" pitchFamily="34" charset="0"/>
+                <a:ea typeface="Calibri" pitchFamily="34" charset="-122"/>
+                <a:cs typeface="Calibri" pitchFamily="34" charset="-120"/>
+              </a:rPr>
+              <a:t>READING</a:t>
+            </a:r>
+            <a:endParaRPr lang="en-US" sz="1100" dirty="0"/>
+          </a:p>
+        </p:txBody>
+      </p:sp>
+      <p:sp>
+        <p:nvSpPr>
           <p:cNvPr id="5" name="Text 3"/>
           <p:cNvSpPr/>
           <p:nvPr/>
         </p:nvSpPr>
         <p:spPr>
           <a:xfrm>
-            <a:off x="6492240" y="173736"/>
-            <a:ext cx="2286000" cy="502920"/>
-          </a:xfrm>
-          <a:prstGeom prst="rect">
-            <a:avLst/>
-          </a:prstGeom>
-          <a:noFill/>
-          <a:ln/>
-        </p:spPr>
-        <p:txBody>
-          <a:bodyPr wrap="square" lIns="0" tIns="0" rIns="0" bIns="0" rtlCol="0" anchor="ctr"/>
-          <a:lstStyle/>
-          <a:p>
-            <a:pPr algn="ctr" indent="0" marL="0">
-              <a:buNone/>
-            </a:pPr>
-            <a:r>
-              <a:rPr lang="en-US" sz="1100" b="1" dirty="0">
+            <a:off x="365760" y="1014984"/>
+            <a:ext cx="8412480" cy="365760"/>
+          </a:xfrm>
+          <a:prstGeom prst="rect">
+            <a:avLst/>
+          </a:prstGeom>
+          <a:noFill/>
+          <a:ln/>
+        </p:spPr>
+        <p:txBody>
+          <a:bodyPr wrap="square" lIns="0" tIns="0" rIns="0" bIns="0" rtlCol="0" anchor="ctr"/>
+          <a:lstStyle/>
+          <a:p>
+            <a:pPr indent="0" marL="0">
+              <a:buNone/>
+            </a:pPr>
+            <a:r>
+              <a:rPr lang="en-US" sz="2000" b="1" dirty="0">
                 <a:solidFill>
                   <a:srgbClr val="0E1C42"/>
                 </a:solidFill>
@@ -4472,7 +5118,46 @@
                 <a:ea typeface="Calibri" pitchFamily="34" charset="-122"/>
                 <a:cs typeface="Calibri" pitchFamily="34" charset="-120"/>
               </a:rPr>
-              <a:t>CHAT PROMPT</a:t>
+              <a:t>Reading: Ch. 16–17 + Synthesis</a:t>
+            </a:r>
+            <a:endParaRPr lang="en-US" sz="2000" dirty="0"/>
+          </a:p>
+        </p:txBody>
+      </p:sp>
+      <p:sp>
+        <p:nvSpPr>
+          <p:cNvPr id="6" name="Text 4"/>
+          <p:cNvSpPr/>
+          <p:nvPr/>
+        </p:nvSpPr>
+        <p:spPr>
+          <a:xfrm>
+            <a:off x="365760" y="1508760"/>
+            <a:ext cx="8229600" cy="237744"/>
+          </a:xfrm>
+          <a:prstGeom prst="rect">
+            <a:avLst/>
+          </a:prstGeom>
+          <a:noFill/>
+          <a:ln/>
+        </p:spPr>
+        <p:txBody>
+          <a:bodyPr wrap="square" lIns="0" tIns="0" rIns="0" bIns="0" rtlCol="0" anchor="ctr"/>
+          <a:lstStyle/>
+          <a:p>
+            <a:pPr indent="0" marL="0">
+              <a:buNone/>
+            </a:pPr>
+            <a:r>
+              <a:rPr lang="en-US" sz="1100" b="1" spc="100" kern="0" dirty="0">
+                <a:solidFill>
+                  <a:srgbClr val="C7922C"/>
+                </a:solidFill>
+                <a:latin typeface="Calibri" pitchFamily="34" charset="0"/>
+                <a:ea typeface="Calibri" pitchFamily="34" charset="-122"/>
+                <a:cs typeface="Calibri" pitchFamily="34" charset="-120"/>
+              </a:rPr>
+              <a:t>BIG QUESTION</a:t>
             </a:r>
             <a:endParaRPr lang="en-US" sz="1100" dirty="0"/>
           </a:p>
@@ -4480,63 +5165,24 @@
       </p:sp>
       <p:sp>
         <p:nvSpPr>
-          <p:cNvPr id="6" name="Text 4"/>
-          <p:cNvSpPr/>
-          <p:nvPr/>
-        </p:nvSpPr>
-        <p:spPr>
-          <a:xfrm>
-            <a:off x="457200" y="914400"/>
-            <a:ext cx="8046720" cy="292608"/>
-          </a:xfrm>
-          <a:prstGeom prst="rect">
-            <a:avLst/>
-          </a:prstGeom>
-          <a:noFill/>
-          <a:ln/>
-        </p:spPr>
-        <p:txBody>
-          <a:bodyPr wrap="square" lIns="0" tIns="0" rIns="0" bIns="0" rtlCol="0" anchor="ctr"/>
-          <a:lstStyle/>
-          <a:p>
-            <a:pPr indent="0" marL="0">
-              <a:buNone/>
-            </a:pPr>
-            <a:r>
-              <a:rPr lang="en-US" sz="1100" b="1" spc="200" kern="0" dirty="0">
-                <a:solidFill>
-                  <a:srgbClr val="C7922C"/>
-                </a:solidFill>
-                <a:latin typeface="Calibri" pitchFamily="34" charset="0"/>
-                <a:ea typeface="Calibri" pitchFamily="34" charset="-122"/>
-                <a:cs typeface="Calibri" pitchFamily="34" charset="-120"/>
-              </a:rPr>
-              <a:t>BIG QUESTION</a:t>
-            </a:r>
-            <a:endParaRPr lang="en-US" sz="1100" dirty="0"/>
-          </a:p>
-        </p:txBody>
-      </p:sp>
-      <p:sp>
-        <p:nvSpPr>
           <p:cNvPr id="7" name="Shape 5"/>
           <p:cNvSpPr/>
           <p:nvPr/>
         </p:nvSpPr>
         <p:spPr>
           <a:xfrm>
-            <a:off x="457200" y="1234440"/>
-            <a:ext cx="8229600" cy="640080"/>
+            <a:off x="365760" y="1746504"/>
+            <a:ext cx="8412480" cy="731520"/>
           </a:xfrm>
           <a:prstGeom prst="roundRect">
             <a:avLst>
-              <a:gd name="adj" fmla="val 14286"/>
+              <a:gd name="adj" fmla="val 12500"/>
             </a:avLst>
           </a:prstGeom>
           <a:solidFill>
             <a:srgbClr val="FEF6E8"/>
           </a:solidFill>
-          <a:ln w="12700">
+          <a:ln w="19050">
             <a:solidFill>
               <a:srgbClr val="C7922C"/>
             </a:solidFill>
@@ -4559,24 +5205,24 @@
         </p:nvSpPr>
         <p:spPr>
           <a:xfrm>
-            <a:off x="640080" y="1344168"/>
-            <a:ext cx="7863840" cy="411480"/>
-          </a:xfrm>
-          <a:prstGeom prst="rect">
-            <a:avLst/>
-          </a:prstGeom>
-          <a:noFill/>
-          <a:ln/>
-        </p:spPr>
-        <p:txBody>
-          <a:bodyPr wrap="square" lIns="0" tIns="0" rIns="0" bIns="0" rtlCol="0" anchor="ctr"/>
-          <a:lstStyle/>
-          <a:p>
-            <a:pPr indent="0" marL="0">
-              <a:buNone/>
-            </a:pPr>
-            <a:r>
-              <a:rPr lang="en-US" sz="1800" i="1" dirty="0">
+            <a:off x="594360" y="1874520"/>
+            <a:ext cx="7955280" cy="475488"/>
+          </a:xfrm>
+          <a:prstGeom prst="rect">
+            <a:avLst/>
+          </a:prstGeom>
+          <a:noFill/>
+          <a:ln/>
+        </p:spPr>
+        <p:txBody>
+          <a:bodyPr wrap="square" lIns="0" tIns="0" rIns="0" bIns="0" rtlCol="0" anchor="ctr"/>
+          <a:lstStyle/>
+          <a:p>
+            <a:pPr indent="0" marL="0">
+              <a:buNone/>
+            </a:pPr>
+            <a:r>
+              <a:rPr lang="en-US" sz="1700" dirty="0">
                 <a:solidFill>
                   <a:srgbClr val="1E293B"/>
                 </a:solidFill>
@@ -4586,43 +5232,48 @@
               </a:rPr>
               <a:t>Explain how the ending reveals theme.</a:t>
             </a:r>
-            <a:endParaRPr lang="en-US" sz="1800" dirty="0"/>
-          </a:p>
-        </p:txBody>
-      </p:sp>
-      <p:sp>
-        <p:nvSpPr>
-          <p:cNvPr id="9" name="Shape 7"/>
-          <p:cNvSpPr/>
-          <p:nvPr/>
-        </p:nvSpPr>
-        <p:spPr>
-          <a:xfrm>
-            <a:off x="457200" y="1965960"/>
-            <a:ext cx="8229600" cy="640080"/>
-          </a:xfrm>
-          <a:prstGeom prst="roundRect">
-            <a:avLst>
-              <a:gd name="adj" fmla="val 14286"/>
-            </a:avLst>
-          </a:prstGeom>
-          <a:solidFill>
-            <a:srgbClr val="FEF6E8"/>
-          </a:solidFill>
-          <a:ln w="12700">
-            <a:solidFill>
-              <a:srgbClr val="C7922C"/>
-            </a:solidFill>
-            <a:prstDash val="solid"/>
-          </a:ln>
-          <a:effectLst>
-            <a:outerShdw sx="100000" sy="100000" kx="0" ky="0" algn="bl" rotWithShape="0" blurRad="101600" dist="38100" dir="2700000">
-              <a:srgbClr val="000000">
-                <a:alpha val="12000"/>
-              </a:srgbClr>
-            </a:outerShdw>
-          </a:effectLst>
-        </p:spPr>
+            <a:endParaRPr lang="en-US" sz="1700" dirty="0"/>
+          </a:p>
+        </p:txBody>
+      </p:sp>
+      <p:sp>
+        <p:nvSpPr>
+          <p:cNvPr id="9" name="Text 7"/>
+          <p:cNvSpPr/>
+          <p:nvPr/>
+        </p:nvSpPr>
+        <p:spPr>
+          <a:xfrm>
+            <a:off x="365760" y="2606040"/>
+            <a:ext cx="8229600" cy="237744"/>
+          </a:xfrm>
+          <a:prstGeom prst="rect">
+            <a:avLst/>
+          </a:prstGeom>
+          <a:noFill/>
+          <a:ln/>
+        </p:spPr>
+        <p:txBody>
+          <a:bodyPr wrap="square" lIns="0" tIns="0" rIns="0" bIns="0" rtlCol="0" anchor="ctr"/>
+          <a:lstStyle/>
+          <a:p>
+            <a:pPr indent="0" marL="0">
+              <a:buNone/>
+            </a:pPr>
+            <a:r>
+              <a:rPr lang="en-US" sz="1100" b="1" spc="100" kern="0" dirty="0">
+                <a:solidFill>
+                  <a:srgbClr val="55C8E8"/>
+                </a:solidFill>
+                <a:latin typeface="Calibri" pitchFamily="34" charset="0"/>
+                <a:ea typeface="Calibri" pitchFamily="34" charset="-122"/>
+                <a:cs typeface="Calibri" pitchFamily="34" charset="-120"/>
+              </a:rPr>
+              <a:t>READING LENS</a:t>
+            </a:r>
+            <a:endParaRPr lang="en-US" sz="1100" dirty="0"/>
+          </a:p>
+        </p:txBody>
       </p:sp>
       <p:sp>
         <p:nvSpPr>
@@ -4632,159 +5283,8 @@
         </p:nvSpPr>
         <p:spPr>
           <a:xfrm>
-            <a:off x="640080" y="2075688"/>
-            <a:ext cx="7863840" cy="411480"/>
-          </a:xfrm>
-          <a:prstGeom prst="rect">
-            <a:avLst/>
-          </a:prstGeom>
-          <a:noFill/>
-          <a:ln/>
-        </p:spPr>
-        <p:txBody>
-          <a:bodyPr wrap="square" lIns="0" tIns="0" rIns="0" bIns="0" rtlCol="0" anchor="ctr"/>
-          <a:lstStyle/>
-          <a:p>
-            <a:pPr indent="0" marL="0">
-              <a:buNone/>
-            </a:pPr>
-            <a:r>
-              <a:rPr lang="en-US" sz="1800" i="1" dirty="0">
-                <a:solidFill>
-                  <a:srgbClr val="1E293B"/>
-                </a:solidFill>
-                <a:latin typeface="Calibri" pitchFamily="34" charset="0"/>
-                <a:ea typeface="Calibri" pitchFamily="34" charset="-122"/>
-                <a:cs typeface="Calibri" pitchFamily="34" charset="-120"/>
-              </a:rPr>
-              <a:t>As you read today, ask yourself: How do you recognize when a story has truly fulfilled its theme?</a:t>
-            </a:r>
-            <a:endParaRPr lang="en-US" sz="1800" dirty="0"/>
-          </a:p>
-        </p:txBody>
-      </p:sp>
-      <p:sp>
-        <p:nvSpPr>
-          <p:cNvPr id="11" name="Shape 9"/>
-          <p:cNvSpPr/>
-          <p:nvPr/>
-        </p:nvSpPr>
-        <p:spPr>
-          <a:xfrm>
-            <a:off x="457200" y="2697480"/>
-            <a:ext cx="8229600" cy="640080"/>
-          </a:xfrm>
-          <a:prstGeom prst="roundRect">
-            <a:avLst>
-              <a:gd name="adj" fmla="val 14286"/>
-            </a:avLst>
-          </a:prstGeom>
-          <a:solidFill>
-            <a:srgbClr val="FEF6E8"/>
-          </a:solidFill>
-          <a:ln w="12700">
-            <a:solidFill>
-              <a:srgbClr val="C7922C"/>
-            </a:solidFill>
-            <a:prstDash val="solid"/>
-          </a:ln>
-          <a:effectLst>
-            <a:outerShdw sx="100000" sy="100000" kx="0" ky="0" algn="bl" rotWithShape="0" blurRad="101600" dist="38100" dir="2700000">
-              <a:srgbClr val="000000">
-                <a:alpha val="12000"/>
-              </a:srgbClr>
-            </a:outerShdw>
-          </a:effectLst>
-        </p:spPr>
-      </p:sp>
-      <p:sp>
-        <p:nvSpPr>
-          <p:cNvPr id="12" name="Text 10"/>
-          <p:cNvSpPr/>
-          <p:nvPr/>
-        </p:nvSpPr>
-        <p:spPr>
-          <a:xfrm>
-            <a:off x="640080" y="2807208"/>
-            <a:ext cx="7863840" cy="411480"/>
-          </a:xfrm>
-          <a:prstGeom prst="rect">
-            <a:avLst/>
-          </a:prstGeom>
-          <a:noFill/>
-          <a:ln/>
-        </p:spPr>
-        <p:txBody>
-          <a:bodyPr wrap="square" lIns="0" tIns="0" rIns="0" bIns="0" rtlCol="0" anchor="ctr"/>
-          <a:lstStyle/>
-          <a:p>
-            <a:pPr indent="0" marL="0">
-              <a:buNone/>
-            </a:pPr>
-            <a:r>
-              <a:rPr lang="en-US" sz="1800" i="1" dirty="0">
-                <a:solidFill>
-                  <a:srgbClr val="1E293B"/>
-                </a:solidFill>
-                <a:latin typeface="Calibri" pitchFamily="34" charset="0"/>
-                <a:ea typeface="Calibri" pitchFamily="34" charset="-122"/>
-                <a:cs typeface="Calibri" pitchFamily="34" charset="-120"/>
-              </a:rPr>
-              <a:t>Identify three moments from different parts of the novel that all support the same theme. Write the chapter number and a one-sentence explanation for each.</a:t>
-            </a:r>
-            <a:endParaRPr lang="en-US" sz="1800" dirty="0"/>
-          </a:p>
-        </p:txBody>
-      </p:sp>
-      <p:sp>
-        <p:nvSpPr>
-          <p:cNvPr id="13" name="Text 11"/>
-          <p:cNvSpPr/>
-          <p:nvPr/>
-        </p:nvSpPr>
-        <p:spPr>
-          <a:xfrm>
-            <a:off x="457200" y="3429000"/>
-            <a:ext cx="8046720" cy="292608"/>
-          </a:xfrm>
-          <a:prstGeom prst="rect">
-            <a:avLst/>
-          </a:prstGeom>
-          <a:noFill/>
-          <a:ln/>
-        </p:spPr>
-        <p:txBody>
-          <a:bodyPr wrap="square" lIns="0" tIns="0" rIns="0" bIns="0" rtlCol="0" anchor="ctr"/>
-          <a:lstStyle/>
-          <a:p>
-            <a:pPr indent="0" marL="0">
-              <a:buNone/>
-            </a:pPr>
-            <a:r>
-              <a:rPr lang="en-US" sz="1100" b="1" spc="200" kern="0" dirty="0">
-                <a:solidFill>
-                  <a:srgbClr val="8B6FC0"/>
-                </a:solidFill>
-                <a:latin typeface="Calibri" pitchFamily="34" charset="0"/>
-                <a:ea typeface="Calibri" pitchFamily="34" charset="-122"/>
-                <a:cs typeface="Calibri" pitchFamily="34" charset="-120"/>
-              </a:rPr>
-              <a:t>READING LENS</a:t>
-            </a:r>
-            <a:endParaRPr lang="en-US" sz="1100" dirty="0"/>
-          </a:p>
-        </p:txBody>
-      </p:sp>
-      <p:sp>
-        <p:nvSpPr>
-          <p:cNvPr id="14" name="Text 12"/>
-          <p:cNvSpPr/>
-          <p:nvPr/>
-        </p:nvSpPr>
-        <p:spPr>
-          <a:xfrm>
-            <a:off x="640080" y="3749040"/>
-            <a:ext cx="7863840" cy="731520"/>
+            <a:off x="365760" y="2843784"/>
+            <a:ext cx="8412480" cy="914400"/>
           </a:xfrm>
           <a:prstGeom prst="rect">
             <a:avLst/>
@@ -4848,91 +5348,122 @@
       </p:grpSpPr>
       <p:sp>
         <p:nvSpPr>
-          <p:cNvPr id="2" name="Text 0"/>
-          <p:cNvSpPr/>
-          <p:nvPr/>
-        </p:nvSpPr>
-        <p:spPr>
-          <a:xfrm>
-            <a:off x="365760" y="164592"/>
-            <a:ext cx="8412480" cy="566928"/>
-          </a:xfrm>
-          <a:prstGeom prst="rect">
-            <a:avLst/>
-          </a:prstGeom>
-          <a:noFill/>
-          <a:ln/>
-        </p:spPr>
-        <p:txBody>
-          <a:bodyPr wrap="square" lIns="0" tIns="0" rIns="0" bIns="0" rtlCol="0" anchor="ctr"/>
-          <a:lstStyle/>
-          <a:p>
-            <a:pPr algn="l" indent="0" marL="0">
-              <a:buNone/>
-            </a:pPr>
-            <a:r>
-              <a:rPr lang="en-US" sz="2800" b="1" dirty="0">
-                <a:solidFill>
-                  <a:srgbClr val="0E1C42"/>
-                </a:solidFill>
-                <a:latin typeface="Calibri" pitchFamily="34" charset="0"/>
-                <a:ea typeface="Calibri" pitchFamily="34" charset="-122"/>
-                <a:cs typeface="Calibri" pitchFamily="34" charset="-120"/>
-              </a:rPr>
-              <a:t>✅ Model Sentence — Study What's Right</a:t>
-            </a:r>
-            <a:endParaRPr lang="en-US" sz="2800" dirty="0"/>
-          </a:p>
-        </p:txBody>
-      </p:sp>
-      <p:sp>
-        <p:nvSpPr>
-          <p:cNvPr id="3" name="Shape 1"/>
-          <p:cNvSpPr/>
-          <p:nvPr/>
-        </p:nvSpPr>
-        <p:spPr>
-          <a:xfrm>
-            <a:off x="365760" y="749808"/>
-            <a:ext cx="8412480" cy="0"/>
-          </a:xfrm>
-          <a:prstGeom prst="line">
-            <a:avLst/>
-          </a:prstGeom>
-          <a:noFill/>
-          <a:ln w="19050">
-            <a:solidFill>
-              <a:srgbClr val="34B76F"/>
-            </a:solidFill>
-            <a:prstDash val="solid"/>
-          </a:ln>
-        </p:spPr>
-      </p:sp>
-      <p:sp>
-        <p:nvSpPr>
-          <p:cNvPr id="4" name="Shape 2"/>
-          <p:cNvSpPr/>
-          <p:nvPr/>
-        </p:nvSpPr>
-        <p:spPr>
-          <a:xfrm>
-            <a:off x="457200" y="1097280"/>
-            <a:ext cx="8229600" cy="914400"/>
+          <p:cNvPr id="2" name="Shape 0"/>
+          <p:cNvSpPr/>
+          <p:nvPr/>
+        </p:nvSpPr>
+        <p:spPr>
+          <a:xfrm>
+            <a:off x="0" y="0"/>
+            <a:ext cx="9144000" cy="566928"/>
+          </a:xfrm>
+          <a:prstGeom prst="rect">
+            <a:avLst/>
+          </a:prstGeom>
+          <a:solidFill>
+            <a:srgbClr val="55C8E8"/>
+          </a:solidFill>
+          <a:ln/>
+        </p:spPr>
+      </p:sp>
+      <p:sp>
+        <p:nvSpPr>
+          <p:cNvPr id="3" name="Text 1"/>
+          <p:cNvSpPr/>
+          <p:nvPr/>
+        </p:nvSpPr>
+        <p:spPr>
+          <a:xfrm>
+            <a:off x="365760" y="54864"/>
+            <a:ext cx="8412480" cy="457200"/>
+          </a:xfrm>
+          <a:prstGeom prst="rect">
+            <a:avLst/>
+          </a:prstGeom>
+          <a:noFill/>
+          <a:ln/>
+        </p:spPr>
+        <p:txBody>
+          <a:bodyPr wrap="square" lIns="0" tIns="0" rIns="0" bIns="0" rtlCol="0" anchor="ctr"/>
+          <a:lstStyle/>
+          <a:p>
+            <a:pPr indent="0" marL="0">
+              <a:buNone/>
+            </a:pPr>
+            <a:r>
+              <a:rPr lang="en-US" sz="2200" b="1" dirty="0">
+                <a:solidFill>
+                  <a:srgbClr val="FFFFFF"/>
+                </a:solidFill>
+                <a:latin typeface="Calibri" pitchFamily="34" charset="0"/>
+                <a:ea typeface="Calibri" pitchFamily="34" charset="-122"/>
+                <a:cs typeface="Calibri" pitchFamily="34" charset="-120"/>
+              </a:rPr>
+              <a:t>✏️  Daily Oral Language</a:t>
+            </a:r>
+            <a:endParaRPr lang="en-US" sz="2200" dirty="0"/>
+          </a:p>
+        </p:txBody>
+      </p:sp>
+      <p:sp>
+        <p:nvSpPr>
+          <p:cNvPr id="4" name="Text 2"/>
+          <p:cNvSpPr/>
+          <p:nvPr/>
+        </p:nvSpPr>
+        <p:spPr>
+          <a:xfrm>
+            <a:off x="365760" y="804672"/>
+            <a:ext cx="8229600" cy="237744"/>
+          </a:xfrm>
+          <a:prstGeom prst="rect">
+            <a:avLst/>
+          </a:prstGeom>
+          <a:noFill/>
+          <a:ln/>
+        </p:spPr>
+        <p:txBody>
+          <a:bodyPr wrap="square" lIns="0" tIns="0" rIns="0" bIns="0" rtlCol="0" anchor="ctr"/>
+          <a:lstStyle/>
+          <a:p>
+            <a:pPr indent="0" marL="0">
+              <a:buNone/>
+            </a:pPr>
+            <a:r>
+              <a:rPr lang="en-US" sz="1100" b="1" spc="100" kern="0" dirty="0">
+                <a:solidFill>
+                  <a:srgbClr val="55C8E8"/>
+                </a:solidFill>
+                <a:latin typeface="Calibri" pitchFamily="34" charset="0"/>
+                <a:ea typeface="Calibri" pitchFamily="34" charset="-122"/>
+                <a:cs typeface="Calibri" pitchFamily="34" charset="-120"/>
+              </a:rPr>
+              <a:t>KEY GRAMMAR POINTS IN THE MODEL</a:t>
+            </a:r>
+            <a:endParaRPr lang="en-US" sz="1100" dirty="0"/>
+          </a:p>
+        </p:txBody>
+      </p:sp>
+      <p:sp>
+        <p:nvSpPr>
+          <p:cNvPr id="5" name="Shape 3"/>
+          <p:cNvSpPr/>
+          <p:nvPr/>
+        </p:nvSpPr>
+        <p:spPr>
+          <a:xfrm>
+            <a:off x="365760" y="1097280"/>
+            <a:ext cx="8412480" cy="548640"/>
           </a:xfrm>
           <a:prstGeom prst="roundRect">
             <a:avLst>
-              <a:gd name="adj" fmla="val 10000"/>
+              <a:gd name="adj" fmla="val 16667"/>
             </a:avLst>
           </a:prstGeom>
           <a:solidFill>
-            <a:srgbClr val="E8F8EF"/>
+            <a:srgbClr val="F8FAFC"/>
           </a:solidFill>
-          <a:ln w="12700">
-            <a:solidFill>
-              <a:srgbClr val="34B76F"/>
-            </a:solidFill>
-            <a:prstDash val="solid"/>
-          </a:ln>
+          <a:ln/>
           <a:effectLst>
             <a:outerShdw sx="100000" sy="100000" kx="0" ky="0" algn="bl" rotWithShape="0" blurRad="101600" dist="38100" dir="2700000">
               <a:srgbClr val="000000">
@@ -4944,30 +5475,44 @@
       </p:sp>
       <p:sp>
         <p:nvSpPr>
-          <p:cNvPr id="5" name="Text 3"/>
-          <p:cNvSpPr/>
-          <p:nvPr/>
-        </p:nvSpPr>
-        <p:spPr>
-          <a:xfrm>
-            <a:off x="640080" y="1207008"/>
-            <a:ext cx="7863840" cy="685800"/>
-          </a:xfrm>
-          <a:prstGeom prst="rect">
-            <a:avLst/>
-          </a:prstGeom>
-          <a:noFill/>
-          <a:ln/>
-        </p:spPr>
-        <p:txBody>
-          <a:bodyPr wrap="square" lIns="0" tIns="0" rIns="0" bIns="0" rtlCol="0" anchor="ctr"/>
-          <a:lstStyle/>
-          <a:p>
-            <a:pPr indent="0" marL="0">
-              <a:buNone/>
-            </a:pPr>
-            <a:r>
-              <a:rPr lang="en-US" sz="1800" i="1" dirty="0">
+          <p:cNvPr id="6" name="Text 4"/>
+          <p:cNvSpPr/>
+          <p:nvPr/>
+        </p:nvSpPr>
+        <p:spPr>
+          <a:xfrm>
+            <a:off x="594360" y="1188720"/>
+            <a:ext cx="7863840" cy="365760"/>
+          </a:xfrm>
+          <a:prstGeom prst="rect">
+            <a:avLst/>
+          </a:prstGeom>
+          <a:noFill/>
+          <a:ln/>
+        </p:spPr>
+        <p:txBody>
+          <a:bodyPr wrap="square" lIns="0" tIns="0" rIns="0" bIns="0" rtlCol="0" anchor="ctr"/>
+          <a:lstStyle/>
+          <a:p>
+            <a:pPr indent="0" marL="0">
+              <a:buNone/>
+            </a:pPr>
+            <a:r>
+              <a:rPr lang="en-US" sz="1500" b="1" dirty="0">
+                <a:solidFill>
+                  <a:srgbClr val="0E1C42"/>
+                </a:solidFill>
+                <a:latin typeface="Calibri" pitchFamily="34" charset="0"/>
+                <a:ea typeface="Calibri" pitchFamily="34" charset="-122"/>
+                <a:cs typeface="Calibri" pitchFamily="34" charset="-120"/>
+              </a:rPr>
+              <a:t>Edmund  </a:t>
+            </a:r>
+            <a:pPr indent="0" marL="0">
+              <a:buNone/>
+            </a:pPr>
+            <a:r>
+              <a:rPr lang="en-US" sz="1300" dirty="0">
                 <a:solidFill>
                   <a:srgbClr val="1E293B"/>
                 </a:solidFill>
@@ -4975,9 +5520,255 @@
                 <a:ea typeface="Calibri" pitchFamily="34" charset="-122"/>
                 <a:cs typeface="Calibri" pitchFamily="34" charset="-120"/>
               </a:rPr>
-              <a:t>Edmund fought bravely battle, Peter battlefield.</a:t>
-            </a:r>
-            <a:endParaRPr lang="en-US" sz="1800" dirty="0"/>
+              <a:t>Proper noun — capital E.</a:t>
+            </a:r>
+            <a:endParaRPr lang="en-US" sz="1500" dirty="0"/>
+          </a:p>
+        </p:txBody>
+      </p:sp>
+      <p:sp>
+        <p:nvSpPr>
+          <p:cNvPr id="7" name="Shape 5"/>
+          <p:cNvSpPr/>
+          <p:nvPr/>
+        </p:nvSpPr>
+        <p:spPr>
+          <a:xfrm>
+            <a:off x="365760" y="1719072"/>
+            <a:ext cx="8412480" cy="548640"/>
+          </a:xfrm>
+          <a:prstGeom prst="roundRect">
+            <a:avLst>
+              <a:gd name="adj" fmla="val 16667"/>
+            </a:avLst>
+          </a:prstGeom>
+          <a:solidFill>
+            <a:srgbClr val="FFFFFF"/>
+          </a:solidFill>
+          <a:ln/>
+          <a:effectLst>
+            <a:outerShdw sx="100000" sy="100000" kx="0" ky="0" algn="bl" rotWithShape="0" blurRad="101600" dist="38100" dir="2700000">
+              <a:srgbClr val="000000">
+                <a:alpha val="12000"/>
+              </a:srgbClr>
+            </a:outerShdw>
+          </a:effectLst>
+        </p:spPr>
+      </p:sp>
+      <p:sp>
+        <p:nvSpPr>
+          <p:cNvPr id="8" name="Text 6"/>
+          <p:cNvSpPr/>
+          <p:nvPr/>
+        </p:nvSpPr>
+        <p:spPr>
+          <a:xfrm>
+            <a:off x="594360" y="1810512"/>
+            <a:ext cx="7863840" cy="365760"/>
+          </a:xfrm>
+          <a:prstGeom prst="rect">
+            <a:avLst/>
+          </a:prstGeom>
+          <a:noFill/>
+          <a:ln/>
+        </p:spPr>
+        <p:txBody>
+          <a:bodyPr wrap="square" lIns="0" tIns="0" rIns="0" bIns="0" rtlCol="0" anchor="ctr"/>
+          <a:lstStyle/>
+          <a:p>
+            <a:pPr indent="0" marL="0">
+              <a:buNone/>
+            </a:pPr>
+            <a:r>
+              <a:rPr lang="en-US" sz="1500" b="1" dirty="0">
+                <a:solidFill>
+                  <a:srgbClr val="0E1C42"/>
+                </a:solidFill>
+                <a:latin typeface="Calibri" pitchFamily="34" charset="0"/>
+                <a:ea typeface="Calibri" pitchFamily="34" charset="-122"/>
+                <a:cs typeface="Calibri" pitchFamily="34" charset="-120"/>
+              </a:rPr>
+              <a:t>fought  </a:t>
+            </a:r>
+            <a:pPr indent="0" marL="0">
+              <a:buNone/>
+            </a:pPr>
+            <a:r>
+              <a:rPr lang="en-US" sz="1300" dirty="0">
+                <a:solidFill>
+                  <a:srgbClr val="1E293B"/>
+                </a:solidFill>
+                <a:latin typeface="Calibri" pitchFamily="34" charset="0"/>
+                <a:ea typeface="Calibri" pitchFamily="34" charset="-122"/>
+                <a:cs typeface="Calibri" pitchFamily="34" charset="-120"/>
+              </a:rPr>
+              <a:t>Irregular past tense of fight.</a:t>
+            </a:r>
+            <a:endParaRPr lang="en-US" sz="1500" dirty="0"/>
+          </a:p>
+        </p:txBody>
+      </p:sp>
+      <p:sp>
+        <p:nvSpPr>
+          <p:cNvPr id="9" name="Shape 7"/>
+          <p:cNvSpPr/>
+          <p:nvPr/>
+        </p:nvSpPr>
+        <p:spPr>
+          <a:xfrm>
+            <a:off x="365760" y="2340864"/>
+            <a:ext cx="8412480" cy="548640"/>
+          </a:xfrm>
+          <a:prstGeom prst="roundRect">
+            <a:avLst>
+              <a:gd name="adj" fmla="val 16667"/>
+            </a:avLst>
+          </a:prstGeom>
+          <a:solidFill>
+            <a:srgbClr val="F8FAFC"/>
+          </a:solidFill>
+          <a:ln/>
+          <a:effectLst>
+            <a:outerShdw sx="100000" sy="100000" kx="0" ky="0" algn="bl" rotWithShape="0" blurRad="101600" dist="38100" dir="2700000">
+              <a:srgbClr val="000000">
+                <a:alpha val="12000"/>
+              </a:srgbClr>
+            </a:outerShdw>
+          </a:effectLst>
+        </p:spPr>
+      </p:sp>
+      <p:sp>
+        <p:nvSpPr>
+          <p:cNvPr id="10" name="Text 8"/>
+          <p:cNvSpPr/>
+          <p:nvPr/>
+        </p:nvSpPr>
+        <p:spPr>
+          <a:xfrm>
+            <a:off x="594360" y="2432304"/>
+            <a:ext cx="7863840" cy="365760"/>
+          </a:xfrm>
+          <a:prstGeom prst="rect">
+            <a:avLst/>
+          </a:prstGeom>
+          <a:noFill/>
+          <a:ln/>
+        </p:spPr>
+        <p:txBody>
+          <a:bodyPr wrap="square" lIns="0" tIns="0" rIns="0" bIns="0" rtlCol="0" anchor="ctr"/>
+          <a:lstStyle/>
+          <a:p>
+            <a:pPr indent="0" marL="0">
+              <a:buNone/>
+            </a:pPr>
+            <a:r>
+              <a:rPr lang="en-US" sz="1500" b="1" dirty="0">
+                <a:solidFill>
+                  <a:srgbClr val="0E1C42"/>
+                </a:solidFill>
+                <a:latin typeface="Calibri" pitchFamily="34" charset="0"/>
+                <a:ea typeface="Calibri" pitchFamily="34" charset="-122"/>
+                <a:cs typeface="Calibri" pitchFamily="34" charset="-120"/>
+              </a:rPr>
+              <a:t>bravely  </a:t>
+            </a:r>
+            <a:pPr indent="0" marL="0">
+              <a:buNone/>
+            </a:pPr>
+            <a:r>
+              <a:rPr lang="en-US" sz="1300" dirty="0">
+                <a:solidFill>
+                  <a:srgbClr val="1E293B"/>
+                </a:solidFill>
+                <a:latin typeface="Calibri" pitchFamily="34" charset="0"/>
+                <a:ea typeface="Calibri" pitchFamily="34" charset="-122"/>
+                <a:cs typeface="Calibri" pitchFamily="34" charset="-120"/>
+              </a:rPr>
+              <a:t>Adverb — tells how he fought.</a:t>
+            </a:r>
+            <a:endParaRPr lang="en-US" sz="1500" dirty="0"/>
+          </a:p>
+        </p:txBody>
+      </p:sp>
+      <p:sp>
+        <p:nvSpPr>
+          <p:cNvPr id="11" name="Shape 9"/>
+          <p:cNvSpPr/>
+          <p:nvPr/>
+        </p:nvSpPr>
+        <p:spPr>
+          <a:xfrm>
+            <a:off x="365760" y="2962656"/>
+            <a:ext cx="8412480" cy="548640"/>
+          </a:xfrm>
+          <a:prstGeom prst="roundRect">
+            <a:avLst>
+              <a:gd name="adj" fmla="val 16667"/>
+            </a:avLst>
+          </a:prstGeom>
+          <a:solidFill>
+            <a:srgbClr val="FFFFFF"/>
+          </a:solidFill>
+          <a:ln/>
+          <a:effectLst>
+            <a:outerShdw sx="100000" sy="100000" kx="0" ky="0" algn="bl" rotWithShape="0" blurRad="101600" dist="38100" dir="2700000">
+              <a:srgbClr val="000000">
+                <a:alpha val="12000"/>
+              </a:srgbClr>
+            </a:outerShdw>
+          </a:effectLst>
+        </p:spPr>
+      </p:sp>
+      <p:sp>
+        <p:nvSpPr>
+          <p:cNvPr id="12" name="Text 10"/>
+          <p:cNvSpPr/>
+          <p:nvPr/>
+        </p:nvSpPr>
+        <p:spPr>
+          <a:xfrm>
+            <a:off x="594360" y="3054096"/>
+            <a:ext cx="7863840" cy="365760"/>
+          </a:xfrm>
+          <a:prstGeom prst="rect">
+            <a:avLst/>
+          </a:prstGeom>
+          <a:noFill/>
+          <a:ln/>
+        </p:spPr>
+        <p:txBody>
+          <a:bodyPr wrap="square" lIns="0" tIns="0" rIns="0" bIns="0" rtlCol="0" anchor="ctr"/>
+          <a:lstStyle/>
+          <a:p>
+            <a:pPr indent="0" marL="0">
+              <a:buNone/>
+            </a:pPr>
+            <a:r>
+              <a:rPr lang="en-US" sz="1500" b="1" dirty="0">
+                <a:solidFill>
+                  <a:srgbClr val="0E1C42"/>
+                </a:solidFill>
+                <a:latin typeface="Calibri" pitchFamily="34" charset="0"/>
+                <a:ea typeface="Calibri" pitchFamily="34" charset="-122"/>
+                <a:cs typeface="Calibri" pitchFamily="34" charset="-120"/>
+              </a:rPr>
+              <a:t>battle,  </a:t>
+            </a:r>
+            <a:pPr indent="0" marL="0">
+              <a:buNone/>
+            </a:pPr>
+            <a:r>
+              <a:rPr lang="en-US" sz="1300" dirty="0">
+                <a:solidFill>
+                  <a:srgbClr val="1E293B"/>
+                </a:solidFill>
+                <a:latin typeface="Calibri" pitchFamily="34" charset="0"/>
+                <a:ea typeface="Calibri" pitchFamily="34" charset="-122"/>
+                <a:cs typeface="Calibri" pitchFamily="34" charset="-120"/>
+              </a:rPr>
+              <a:t>Comma before and joining two independent clauses.</a:t>
+            </a:r>
+            <a:endParaRPr lang="en-US" sz="1500" dirty="0"/>
           </a:p>
         </p:txBody>
       </p:sp>
@@ -4995,7 +5786,7 @@
     <p:bg>
       <p:bgPr>
         <a:solidFill>
-          <a:srgbClr val="E5F7FC"/>
+          <a:srgbClr val="F8FAFC"/>
         </a:solidFill>
       </p:bgPr>
     </p:bg>
@@ -5015,149 +5806,124 @@
       </p:grpSpPr>
       <p:sp>
         <p:nvSpPr>
-          <p:cNvPr id="2" name="Text 0"/>
-          <p:cNvSpPr/>
-          <p:nvPr/>
-        </p:nvSpPr>
-        <p:spPr>
-          <a:xfrm>
-            <a:off x="365760" y="164592"/>
-            <a:ext cx="5943600" cy="566928"/>
-          </a:xfrm>
-          <a:prstGeom prst="rect">
-            <a:avLst/>
-          </a:prstGeom>
-          <a:noFill/>
-          <a:ln/>
-        </p:spPr>
-        <p:txBody>
-          <a:bodyPr wrap="square" lIns="0" tIns="0" rIns="0" bIns="0" rtlCol="0" anchor="ctr"/>
-          <a:lstStyle/>
-          <a:p>
-            <a:pPr algn="l" indent="0" marL="0">
-              <a:buNone/>
-            </a:pPr>
-            <a:r>
-              <a:rPr lang="en-US" sz="2800" b="1" dirty="0">
-                <a:solidFill>
-                  <a:srgbClr val="0E1C42"/>
-                </a:solidFill>
-                <a:latin typeface="Calibri" pitchFamily="34" charset="0"/>
-                <a:ea typeface="Calibri" pitchFamily="34" charset="-122"/>
-                <a:cs typeface="Calibri" pitchFamily="34" charset="-120"/>
-              </a:rPr>
-              <a:t>🔧 Fix-It Sentence — Now You Try</a:t>
-            </a:r>
-            <a:endParaRPr lang="en-US" sz="2800" dirty="0"/>
-          </a:p>
-        </p:txBody>
-      </p:sp>
-      <p:sp>
-        <p:nvSpPr>
-          <p:cNvPr id="3" name="Shape 1"/>
+          <p:cNvPr id="2" name="Shape 0"/>
+          <p:cNvSpPr/>
+          <p:nvPr/>
+        </p:nvSpPr>
+        <p:spPr>
+          <a:xfrm>
+            <a:off x="0" y="0"/>
+            <a:ext cx="9144000" cy="566928"/>
+          </a:xfrm>
+          <a:prstGeom prst="rect">
+            <a:avLst/>
+          </a:prstGeom>
+          <a:solidFill>
+            <a:srgbClr val="55C8E8"/>
+          </a:solidFill>
+          <a:ln/>
+        </p:spPr>
+      </p:sp>
+      <p:sp>
+        <p:nvSpPr>
+          <p:cNvPr id="3" name="Text 1"/>
+          <p:cNvSpPr/>
+          <p:nvPr/>
+        </p:nvSpPr>
+        <p:spPr>
+          <a:xfrm>
+            <a:off x="365760" y="54864"/>
+            <a:ext cx="8412480" cy="457200"/>
+          </a:xfrm>
+          <a:prstGeom prst="rect">
+            <a:avLst/>
+          </a:prstGeom>
+          <a:noFill/>
+          <a:ln/>
+        </p:spPr>
+        <p:txBody>
+          <a:bodyPr wrap="square" lIns="0" tIns="0" rIns="0" bIns="0" rtlCol="0" anchor="ctr"/>
+          <a:lstStyle/>
+          <a:p>
+            <a:pPr indent="0" marL="0">
+              <a:buNone/>
+            </a:pPr>
+            <a:r>
+              <a:rPr lang="en-US" sz="2200" b="1" dirty="0">
+                <a:solidFill>
+                  <a:srgbClr val="FFFFFF"/>
+                </a:solidFill>
+                <a:latin typeface="Calibri" pitchFamily="34" charset="0"/>
+                <a:ea typeface="Calibri" pitchFamily="34" charset="-122"/>
+                <a:cs typeface="Calibri" pitchFamily="34" charset="-120"/>
+              </a:rPr>
+              <a:t>✏️  Daily Oral Language</a:t>
+            </a:r>
+            <a:endParaRPr lang="en-US" sz="2200" dirty="0"/>
+          </a:p>
+        </p:txBody>
+      </p:sp>
+      <p:sp>
+        <p:nvSpPr>
+          <p:cNvPr id="4" name="Text 2"/>
           <p:cNvSpPr/>
           <p:nvPr/>
         </p:nvSpPr>
         <p:spPr>
           <a:xfrm>
             <a:off x="365760" y="749808"/>
-            <a:ext cx="8412480" cy="0"/>
-          </a:xfrm>
-          <a:prstGeom prst="line">
-            <a:avLst/>
-          </a:prstGeom>
-          <a:noFill/>
+            <a:ext cx="8229600" cy="237744"/>
+          </a:xfrm>
+          <a:prstGeom prst="rect">
+            <a:avLst/>
+          </a:prstGeom>
+          <a:noFill/>
+          <a:ln/>
+        </p:spPr>
+        <p:txBody>
+          <a:bodyPr wrap="square" lIns="0" tIns="0" rIns="0" bIns="0" rtlCol="0" anchor="ctr"/>
+          <a:lstStyle/>
+          <a:p>
+            <a:pPr indent="0" marL="0">
+              <a:buNone/>
+            </a:pPr>
+            <a:r>
+              <a:rPr lang="en-US" sz="1100" b="1" spc="100" kern="0" dirty="0">
+                <a:solidFill>
+                  <a:srgbClr val="55C8E8"/>
+                </a:solidFill>
+                <a:latin typeface="Calibri" pitchFamily="34" charset="0"/>
+                <a:ea typeface="Calibri" pitchFamily="34" charset="-122"/>
+                <a:cs typeface="Calibri" pitchFamily="34" charset="-120"/>
+              </a:rPr>
+              <a:t>NOW FIX THIS ONE</a:t>
+            </a:r>
+            <a:endParaRPr lang="en-US" sz="1100" dirty="0"/>
+          </a:p>
+        </p:txBody>
+      </p:sp>
+      <p:sp>
+        <p:nvSpPr>
+          <p:cNvPr id="5" name="Shape 3"/>
+          <p:cNvSpPr/>
+          <p:nvPr/>
+        </p:nvSpPr>
+        <p:spPr>
+          <a:xfrm>
+            <a:off x="365760" y="1024128"/>
+            <a:ext cx="8412480" cy="777240"/>
+          </a:xfrm>
+          <a:prstGeom prst="roundRect">
+            <a:avLst>
+              <a:gd name="adj" fmla="val 11765"/>
+            </a:avLst>
+          </a:prstGeom>
+          <a:solidFill>
+            <a:srgbClr val="FFFFFF"/>
+          </a:solidFill>
           <a:ln w="19050">
             <a:solidFill>
-              <a:srgbClr val="4A90D9"/>
-            </a:solidFill>
-            <a:prstDash val="solid"/>
-          </a:ln>
-        </p:spPr>
-      </p:sp>
-      <p:sp>
-        <p:nvSpPr>
-          <p:cNvPr id="4" name="Shape 2"/>
-          <p:cNvSpPr/>
-          <p:nvPr/>
-        </p:nvSpPr>
-        <p:spPr>
-          <a:xfrm>
-            <a:off x="6492240" y="173736"/>
-            <a:ext cx="2286000" cy="502920"/>
-          </a:xfrm>
-          <a:prstGeom prst="roundRect">
-            <a:avLst>
-              <a:gd name="adj" fmla="val 21818"/>
-            </a:avLst>
-          </a:prstGeom>
-          <a:solidFill>
-            <a:srgbClr val="4A90D9"/>
-          </a:solidFill>
-          <a:ln/>
-        </p:spPr>
-      </p:sp>
-      <p:sp>
-        <p:nvSpPr>
-          <p:cNvPr id="5" name="Text 3"/>
-          <p:cNvSpPr/>
-          <p:nvPr/>
-        </p:nvSpPr>
-        <p:spPr>
-          <a:xfrm>
-            <a:off x="6492240" y="173736"/>
-            <a:ext cx="2286000" cy="502920"/>
-          </a:xfrm>
-          <a:prstGeom prst="rect">
-            <a:avLst/>
-          </a:prstGeom>
-          <a:noFill/>
-          <a:ln/>
-        </p:spPr>
-        <p:txBody>
-          <a:bodyPr wrap="square" lIns="0" tIns="0" rIns="0" bIns="0" rtlCol="0" anchor="ctr"/>
-          <a:lstStyle/>
-          <a:p>
-            <a:pPr algn="ctr" indent="0" marL="0">
-              <a:buNone/>
-            </a:pPr>
-            <a:r>
-              <a:rPr lang="en-US" sz="1100" b="1" dirty="0">
-                <a:solidFill>
-                  <a:srgbClr val="0E1C42"/>
-                </a:solidFill>
-                <a:latin typeface="Calibri" pitchFamily="34" charset="0"/>
-                <a:ea typeface="Calibri" pitchFamily="34" charset="-122"/>
-                <a:cs typeface="Calibri" pitchFamily="34" charset="-120"/>
-              </a:rPr>
-              <a:t>CHAT PROMPT</a:t>
-            </a:r>
-            <a:endParaRPr lang="en-US" sz="1100" dirty="0"/>
-          </a:p>
-        </p:txBody>
-      </p:sp>
-      <p:sp>
-        <p:nvSpPr>
-          <p:cNvPr id="6" name="Shape 4"/>
-          <p:cNvSpPr/>
-          <p:nvPr/>
-        </p:nvSpPr>
-        <p:spPr>
-          <a:xfrm>
-            <a:off x="457200" y="1005840"/>
-            <a:ext cx="8229600" cy="640080"/>
-          </a:xfrm>
-          <a:prstGeom prst="roundRect">
-            <a:avLst>
-              <a:gd name="adj" fmla="val 14286"/>
-            </a:avLst>
-          </a:prstGeom>
-          <a:solidFill>
-            <a:srgbClr val="F8FAFC"/>
-          </a:solidFill>
-          <a:ln w="12700">
-            <a:solidFill>
-              <a:srgbClr val="C7922C"/>
+              <a:srgbClr val="55C8E8"/>
             </a:solidFill>
             <a:prstDash val="solid"/>
           </a:ln>
@@ -5172,40 +5938,79 @@
       </p:sp>
       <p:sp>
         <p:nvSpPr>
+          <p:cNvPr id="6" name="Text 4"/>
+          <p:cNvSpPr/>
+          <p:nvPr/>
+        </p:nvSpPr>
+        <p:spPr>
+          <a:xfrm>
+            <a:off x="594360" y="1152144"/>
+            <a:ext cx="7955280" cy="521208"/>
+          </a:xfrm>
+          <a:prstGeom prst="rect">
+            <a:avLst/>
+          </a:prstGeom>
+          <a:noFill/>
+          <a:ln/>
+        </p:spPr>
+        <p:txBody>
+          <a:bodyPr wrap="square" lIns="0" tIns="0" rIns="0" bIns="0" rtlCol="0" anchor="ctr"/>
+          <a:lstStyle/>
+          <a:p>
+            <a:pPr indent="0" marL="0">
+              <a:buNone/>
+            </a:pPr>
+            <a:r>
+              <a:rPr lang="en-US" sz="1700" dirty="0">
+                <a:solidFill>
+                  <a:srgbClr val="1E293B"/>
+                </a:solidFill>
+                <a:latin typeface="Calibri" pitchFamily="34" charset="0"/>
+                <a:ea typeface="Calibri" pitchFamily="34" charset="-122"/>
+                <a:cs typeface="Calibri" pitchFamily="34" charset="-120"/>
+              </a:rPr>
+              <a:t>the white witch was defeated at last and narnia had four kings and queens for the first time</a:t>
+            </a:r>
+            <a:endParaRPr lang="en-US" sz="1700" dirty="0"/>
+          </a:p>
+        </p:txBody>
+      </p:sp>
+      <p:sp>
+        <p:nvSpPr>
           <p:cNvPr id="7" name="Text 5"/>
           <p:cNvSpPr/>
           <p:nvPr/>
         </p:nvSpPr>
         <p:spPr>
           <a:xfrm>
-            <a:off x="640080" y="1115568"/>
-            <a:ext cx="7863840" cy="411480"/>
-          </a:xfrm>
-          <a:prstGeom prst="rect">
-            <a:avLst/>
-          </a:prstGeom>
-          <a:noFill/>
-          <a:ln/>
-        </p:spPr>
-        <p:txBody>
-          <a:bodyPr wrap="square" lIns="0" tIns="0" rIns="0" bIns="0" rtlCol="0" anchor="ctr"/>
-          <a:lstStyle/>
-          <a:p>
-            <a:pPr indent="0" marL="0">
-              <a:buNone/>
-            </a:pPr>
-            <a:r>
-              <a:rPr lang="en-US" sz="1800" i="1" dirty="0">
-                <a:solidFill>
-                  <a:srgbClr val="1E293B"/>
-                </a:solidFill>
-                <a:latin typeface="Calibri" pitchFamily="34" charset="0"/>
-                <a:ea typeface="Calibri" pitchFamily="34" charset="-122"/>
-                <a:cs typeface="Calibri" pitchFamily="34" charset="-120"/>
-              </a:rPr>
-              <a:t>the white witch was defeated at last and narnia had four kings and queens for the first time</a:t>
-            </a:r>
-            <a:endParaRPr lang="en-US" sz="1800" dirty="0"/>
+            <a:off x="365760" y="2788920"/>
+            <a:ext cx="8412480" cy="365760"/>
+          </a:xfrm>
+          <a:prstGeom prst="rect">
+            <a:avLst/>
+          </a:prstGeom>
+          <a:noFill/>
+          <a:ln/>
+        </p:spPr>
+        <p:txBody>
+          <a:bodyPr wrap="square" lIns="0" tIns="0" rIns="0" bIns="0" rtlCol="0" anchor="ctr"/>
+          <a:lstStyle/>
+          <a:p>
+            <a:pPr indent="0" marL="0">
+              <a:buNone/>
+            </a:pPr>
+            <a:r>
+              <a:rPr lang="en-US" sz="1600" b="1" dirty="0">
+                <a:solidFill>
+                  <a:srgbClr val="0E1C42"/>
+                </a:solidFill>
+                <a:latin typeface="Calibri" pitchFamily="34" charset="0"/>
+                <a:ea typeface="Calibri" pitchFamily="34" charset="-122"/>
+                <a:cs typeface="Calibri" pitchFamily="34" charset="-120"/>
+              </a:rPr>
+              <a:t>Rewrite the sentence correctly in your notebook.</a:t>
+            </a:r>
+            <a:endParaRPr lang="en-US" sz="1600" dirty="0"/>
           </a:p>
         </p:txBody>
       </p:sp>
@@ -5223,7 +6028,7 @@
     <p:bg>
       <p:bgPr>
         <a:solidFill>
-          <a:srgbClr val="E5F7FC"/>
+          <a:srgbClr val="F8FAFC"/>
         </a:solidFill>
       </p:bgPr>
     </p:bg>
@@ -5243,149 +6048,124 @@
       </p:grpSpPr>
       <p:sp>
         <p:nvSpPr>
-          <p:cNvPr id="2" name="Text 0"/>
-          <p:cNvSpPr/>
-          <p:nvPr/>
-        </p:nvSpPr>
-        <p:spPr>
-          <a:xfrm>
-            <a:off x="365760" y="164592"/>
-            <a:ext cx="5943600" cy="566928"/>
-          </a:xfrm>
-          <a:prstGeom prst="rect">
-            <a:avLst/>
-          </a:prstGeom>
-          <a:noFill/>
-          <a:ln/>
-        </p:spPr>
-        <p:txBody>
-          <a:bodyPr wrap="square" lIns="0" tIns="0" rIns="0" bIns="0" rtlCol="0" anchor="ctr"/>
-          <a:lstStyle/>
-          <a:p>
-            <a:pPr algn="l" indent="0" marL="0">
-              <a:buNone/>
-            </a:pPr>
-            <a:r>
-              <a:rPr lang="en-US" sz="2800" b="1" dirty="0">
-                <a:solidFill>
-                  <a:srgbClr val="0E1C42"/>
-                </a:solidFill>
-                <a:latin typeface="Calibri" pitchFamily="34" charset="0"/>
-                <a:ea typeface="Calibri" pitchFamily="34" charset="-122"/>
-                <a:cs typeface="Calibri" pitchFamily="34" charset="-120"/>
-              </a:rPr>
-              <a:t>🔧 Fix-It Sentence — Answer Revealed</a:t>
-            </a:r>
-            <a:endParaRPr lang="en-US" sz="2800" dirty="0"/>
-          </a:p>
-        </p:txBody>
-      </p:sp>
-      <p:sp>
-        <p:nvSpPr>
-          <p:cNvPr id="3" name="Shape 1"/>
+          <p:cNvPr id="2" name="Shape 0"/>
+          <p:cNvSpPr/>
+          <p:nvPr/>
+        </p:nvSpPr>
+        <p:spPr>
+          <a:xfrm>
+            <a:off x="0" y="0"/>
+            <a:ext cx="9144000" cy="566928"/>
+          </a:xfrm>
+          <a:prstGeom prst="rect">
+            <a:avLst/>
+          </a:prstGeom>
+          <a:solidFill>
+            <a:srgbClr val="55C8E8"/>
+          </a:solidFill>
+          <a:ln/>
+        </p:spPr>
+      </p:sp>
+      <p:sp>
+        <p:nvSpPr>
+          <p:cNvPr id="3" name="Text 1"/>
+          <p:cNvSpPr/>
+          <p:nvPr/>
+        </p:nvSpPr>
+        <p:spPr>
+          <a:xfrm>
+            <a:off x="365760" y="54864"/>
+            <a:ext cx="8412480" cy="457200"/>
+          </a:xfrm>
+          <a:prstGeom prst="rect">
+            <a:avLst/>
+          </a:prstGeom>
+          <a:noFill/>
+          <a:ln/>
+        </p:spPr>
+        <p:txBody>
+          <a:bodyPr wrap="square" lIns="0" tIns="0" rIns="0" bIns="0" rtlCol="0" anchor="ctr"/>
+          <a:lstStyle/>
+          <a:p>
+            <a:pPr indent="0" marL="0">
+              <a:buNone/>
+            </a:pPr>
+            <a:r>
+              <a:rPr lang="en-US" sz="2200" b="1" dirty="0">
+                <a:solidFill>
+                  <a:srgbClr val="FFFFFF"/>
+                </a:solidFill>
+                <a:latin typeface="Calibri" pitchFamily="34" charset="0"/>
+                <a:ea typeface="Calibri" pitchFamily="34" charset="-122"/>
+                <a:cs typeface="Calibri" pitchFamily="34" charset="-120"/>
+              </a:rPr>
+              <a:t>✏️  Daily Oral Language</a:t>
+            </a:r>
+            <a:endParaRPr lang="en-US" sz="2200" dirty="0"/>
+          </a:p>
+        </p:txBody>
+      </p:sp>
+      <p:sp>
+        <p:nvSpPr>
+          <p:cNvPr id="4" name="Text 2"/>
           <p:cNvSpPr/>
           <p:nvPr/>
         </p:nvSpPr>
         <p:spPr>
           <a:xfrm>
             <a:off x="365760" y="749808"/>
-            <a:ext cx="8412480" cy="0"/>
-          </a:xfrm>
-          <a:prstGeom prst="line">
-            <a:avLst/>
-          </a:prstGeom>
-          <a:noFill/>
+            <a:ext cx="8229600" cy="237744"/>
+          </a:xfrm>
+          <a:prstGeom prst="rect">
+            <a:avLst/>
+          </a:prstGeom>
+          <a:noFill/>
+          <a:ln/>
+        </p:spPr>
+        <p:txBody>
+          <a:bodyPr wrap="square" lIns="0" tIns="0" rIns="0" bIns="0" rtlCol="0" anchor="ctr"/>
+          <a:lstStyle/>
+          <a:p>
+            <a:pPr indent="0" marL="0">
+              <a:buNone/>
+            </a:pPr>
+            <a:r>
+              <a:rPr lang="en-US" sz="1100" b="1" spc="100" kern="0" dirty="0">
+                <a:solidFill>
+                  <a:srgbClr val="55C8E8"/>
+                </a:solidFill>
+                <a:latin typeface="Calibri" pitchFamily="34" charset="0"/>
+                <a:ea typeface="Calibri" pitchFamily="34" charset="-122"/>
+                <a:cs typeface="Calibri" pitchFamily="34" charset="-120"/>
+              </a:rPr>
+              <a:t>NOW FIX THIS ONE</a:t>
+            </a:r>
+            <a:endParaRPr lang="en-US" sz="1100" dirty="0"/>
+          </a:p>
+        </p:txBody>
+      </p:sp>
+      <p:sp>
+        <p:nvSpPr>
+          <p:cNvPr id="5" name="Shape 3"/>
+          <p:cNvSpPr/>
+          <p:nvPr/>
+        </p:nvSpPr>
+        <p:spPr>
+          <a:xfrm>
+            <a:off x="365760" y="1024128"/>
+            <a:ext cx="8412480" cy="777240"/>
+          </a:xfrm>
+          <a:prstGeom prst="roundRect">
+            <a:avLst>
+              <a:gd name="adj" fmla="val 11765"/>
+            </a:avLst>
+          </a:prstGeom>
+          <a:solidFill>
+            <a:srgbClr val="FFFFFF"/>
+          </a:solidFill>
           <a:ln w="19050">
             <a:solidFill>
-              <a:srgbClr val="4A90D9"/>
-            </a:solidFill>
-            <a:prstDash val="solid"/>
-          </a:ln>
-        </p:spPr>
-      </p:sp>
-      <p:sp>
-        <p:nvSpPr>
-          <p:cNvPr id="4" name="Shape 2"/>
-          <p:cNvSpPr/>
-          <p:nvPr/>
-        </p:nvSpPr>
-        <p:spPr>
-          <a:xfrm>
-            <a:off x="6492240" y="173736"/>
-            <a:ext cx="2286000" cy="502920"/>
-          </a:xfrm>
-          <a:prstGeom prst="roundRect">
-            <a:avLst>
-              <a:gd name="adj" fmla="val 21818"/>
-            </a:avLst>
-          </a:prstGeom>
-          <a:solidFill>
-            <a:srgbClr val="4A90D9"/>
-          </a:solidFill>
-          <a:ln/>
-        </p:spPr>
-      </p:sp>
-      <p:sp>
-        <p:nvSpPr>
-          <p:cNvPr id="5" name="Text 3"/>
-          <p:cNvSpPr/>
-          <p:nvPr/>
-        </p:nvSpPr>
-        <p:spPr>
-          <a:xfrm>
-            <a:off x="6492240" y="173736"/>
-            <a:ext cx="2286000" cy="502920"/>
-          </a:xfrm>
-          <a:prstGeom prst="rect">
-            <a:avLst/>
-          </a:prstGeom>
-          <a:noFill/>
-          <a:ln/>
-        </p:spPr>
-        <p:txBody>
-          <a:bodyPr wrap="square" lIns="0" tIns="0" rIns="0" bIns="0" rtlCol="0" anchor="ctr"/>
-          <a:lstStyle/>
-          <a:p>
-            <a:pPr algn="ctr" indent="0" marL="0">
-              <a:buNone/>
-            </a:pPr>
-            <a:r>
-              <a:rPr lang="en-US" sz="1100" b="1" dirty="0">
-                <a:solidFill>
-                  <a:srgbClr val="0E1C42"/>
-                </a:solidFill>
-                <a:latin typeface="Calibri" pitchFamily="34" charset="0"/>
-                <a:ea typeface="Calibri" pitchFamily="34" charset="-122"/>
-                <a:cs typeface="Calibri" pitchFamily="34" charset="-120"/>
-              </a:rPr>
-              <a:t>CHAT PROMPT</a:t>
-            </a:r>
-            <a:endParaRPr lang="en-US" sz="1100" dirty="0"/>
-          </a:p>
-        </p:txBody>
-      </p:sp>
-      <p:sp>
-        <p:nvSpPr>
-          <p:cNvPr id="6" name="Shape 4"/>
-          <p:cNvSpPr/>
-          <p:nvPr/>
-        </p:nvSpPr>
-        <p:spPr>
-          <a:xfrm>
-            <a:off x="457200" y="1005840"/>
-            <a:ext cx="8229600" cy="640080"/>
-          </a:xfrm>
-          <a:prstGeom prst="roundRect">
-            <a:avLst>
-              <a:gd name="adj" fmla="val 14286"/>
-            </a:avLst>
-          </a:prstGeom>
-          <a:solidFill>
-            <a:srgbClr val="F8FAFC"/>
-          </a:solidFill>
-          <a:ln w="12700">
-            <a:solidFill>
-              <a:srgbClr val="C7922C"/>
+              <a:srgbClr val="55C8E8"/>
             </a:solidFill>
             <a:prstDash val="solid"/>
           </a:ln>
@@ -5400,30 +6180,30 @@
       </p:sp>
       <p:sp>
         <p:nvSpPr>
-          <p:cNvPr id="7" name="Text 5"/>
-          <p:cNvSpPr/>
-          <p:nvPr/>
-        </p:nvSpPr>
-        <p:spPr>
-          <a:xfrm>
-            <a:off x="640080" y="1115568"/>
-            <a:ext cx="7863840" cy="411480"/>
-          </a:xfrm>
-          <a:prstGeom prst="rect">
-            <a:avLst/>
-          </a:prstGeom>
-          <a:noFill/>
-          <a:ln/>
-        </p:spPr>
-        <p:txBody>
-          <a:bodyPr wrap="square" lIns="0" tIns="0" rIns="0" bIns="0" rtlCol="0" anchor="ctr"/>
-          <a:lstStyle/>
-          <a:p>
-            <a:pPr indent="0" marL="0">
-              <a:buNone/>
-            </a:pPr>
-            <a:r>
-              <a:rPr lang="en-US" sz="1800" i="1" dirty="0">
+          <p:cNvPr id="6" name="Text 4"/>
+          <p:cNvSpPr/>
+          <p:nvPr/>
+        </p:nvSpPr>
+        <p:spPr>
+          <a:xfrm>
+            <a:off x="594360" y="1152144"/>
+            <a:ext cx="7955280" cy="521208"/>
+          </a:xfrm>
+          <a:prstGeom prst="rect">
+            <a:avLst/>
+          </a:prstGeom>
+          <a:noFill/>
+          <a:ln/>
+        </p:spPr>
+        <p:txBody>
+          <a:bodyPr wrap="square" lIns="0" tIns="0" rIns="0" bIns="0" rtlCol="0" anchor="ctr"/>
+          <a:lstStyle/>
+          <a:p>
+            <a:pPr indent="0" marL="0">
+              <a:buNone/>
+            </a:pPr>
+            <a:r>
+              <a:rPr lang="en-US" sz="1700" dirty="0">
                 <a:solidFill>
                   <a:srgbClr val="1E293B"/>
                 </a:solidFill>
@@ -5433,9 +6213,38 @@
               </a:rPr>
               <a:t>the white witch was defeated at last and narnia had four kings and queens for the first time</a:t>
             </a:r>
-            <a:endParaRPr lang="en-US" sz="1800" dirty="0"/>
-          </a:p>
-        </p:txBody>
+            <a:endParaRPr lang="en-US" sz="1700" dirty="0"/>
+          </a:p>
+        </p:txBody>
+      </p:sp>
+      <p:sp>
+        <p:nvSpPr>
+          <p:cNvPr id="7" name="Shape 5"/>
+          <p:cNvSpPr/>
+          <p:nvPr/>
+        </p:nvSpPr>
+        <p:spPr>
+          <a:xfrm>
+            <a:off x="365760" y="2743200"/>
+            <a:ext cx="8412480" cy="1417320"/>
+          </a:xfrm>
+          <a:prstGeom prst="roundRect">
+            <a:avLst>
+              <a:gd name="adj" fmla="val 6452"/>
+            </a:avLst>
+          </a:prstGeom>
+          <a:solidFill>
+            <a:srgbClr val="E8F8EF"/>
+          </a:solidFill>
+          <a:ln/>
+          <a:effectLst>
+            <a:outerShdw sx="100000" sy="100000" kx="0" ky="0" algn="bl" rotWithShape="0" blurRad="101600" dist="38100" dir="2700000">
+              <a:srgbClr val="000000">
+                <a:alpha val="12000"/>
+              </a:srgbClr>
+            </a:outerShdw>
+          </a:effectLst>
+        </p:spPr>
       </p:sp>
       <p:sp>
         <p:nvSpPr>
@@ -5445,24 +6254,108 @@
         </p:nvSpPr>
         <p:spPr>
           <a:xfrm>
-            <a:off x="457200" y="1737360"/>
-            <a:ext cx="8046720" cy="292608"/>
-          </a:xfrm>
-          <a:prstGeom prst="rect">
-            <a:avLst/>
-          </a:prstGeom>
-          <a:noFill/>
-          <a:ln/>
-        </p:spPr>
-        <p:txBody>
-          <a:bodyPr wrap="square" lIns="0" tIns="0" rIns="0" bIns="0" rtlCol="0" anchor="ctr"/>
-          <a:lstStyle/>
-          <a:p>
-            <a:pPr indent="0" marL="0">
-              <a:buNone/>
-            </a:pPr>
-            <a:r>
-              <a:rPr lang="en-US" sz="1100" b="1" spc="200" kern="0" dirty="0">
+            <a:off x="566928" y="2816352"/>
+            <a:ext cx="8229600" cy="237744"/>
+          </a:xfrm>
+          <a:prstGeom prst="rect">
+            <a:avLst/>
+          </a:prstGeom>
+          <a:noFill/>
+          <a:ln/>
+        </p:spPr>
+        <p:txBody>
+          <a:bodyPr wrap="square" lIns="0" tIns="0" rIns="0" bIns="0" rtlCol="0" anchor="ctr"/>
+          <a:lstStyle/>
+          <a:p>
+            <a:pPr indent="0" marL="0">
+              <a:buNone/>
+            </a:pPr>
+            <a:r>
+              <a:rPr lang="en-US" sz="1100" b="1" spc="100" kern="0" dirty="0">
+                <a:solidFill>
+                  <a:srgbClr val="34B76F"/>
+                </a:solidFill>
+                <a:latin typeface="Calibri" pitchFamily="34" charset="0"/>
+                <a:ea typeface="Calibri" pitchFamily="34" charset="-122"/>
+                <a:cs typeface="Calibri" pitchFamily="34" charset="-120"/>
+              </a:rPr>
+              <a:t>✅  CORRECTED</a:t>
+            </a:r>
+            <a:endParaRPr lang="en-US" sz="1100" dirty="0"/>
+          </a:p>
+        </p:txBody>
+      </p:sp>
+      <p:sp>
+        <p:nvSpPr>
+          <p:cNvPr id="9" name="Text 7"/>
+          <p:cNvSpPr/>
+          <p:nvPr/>
+        </p:nvSpPr>
+        <p:spPr>
+          <a:xfrm>
+            <a:off x="566928" y="3072384"/>
+            <a:ext cx="8010144" cy="685800"/>
+          </a:xfrm>
+          <a:prstGeom prst="rect">
+            <a:avLst/>
+          </a:prstGeom>
+          <a:noFill/>
+          <a:ln/>
+        </p:spPr>
+        <p:txBody>
+          <a:bodyPr wrap="square" lIns="0" tIns="0" rIns="0" bIns="0" rtlCol="0" anchor="ctr"/>
+          <a:lstStyle/>
+          <a:p>
+            <a:pPr indent="0" marL="0">
+              <a:buNone/>
+            </a:pPr>
+            <a:r>
+              <a:rPr lang="en-US" sz="1400" i="1" dirty="0">
+                <a:solidFill>
+                  <a:srgbClr val="1E293B"/>
+                </a:solidFill>
+                <a:latin typeface="Calibri" pitchFamily="34" charset="0"/>
+                <a:ea typeface="Calibri" pitchFamily="34" charset="-122"/>
+                <a:cs typeface="Calibri" pitchFamily="34" charset="-120"/>
+              </a:rPr>
+              <a:t>Corrected: The White Witch was defeated at last, and Narnia had four kings and queens for the first time.</a:t>
+            </a:r>
+            <a:endParaRPr lang="en-US" sz="1400" dirty="0"/>
+          </a:p>
+          <a:p>
+            <a:pPr indent="0" marL="0">
+              <a:buNone/>
+            </a:pPr>
+            <a:endParaRPr lang="en-US" sz="1400" dirty="0"/>
+          </a:p>
+        </p:txBody>
+      </p:sp>
+      <p:sp>
+        <p:nvSpPr>
+          <p:cNvPr id="10" name="Text 8"/>
+          <p:cNvSpPr/>
+          <p:nvPr/>
+        </p:nvSpPr>
+        <p:spPr>
+          <a:xfrm>
+            <a:off x="566928" y="3767328"/>
+            <a:ext cx="8010144" cy="320040"/>
+          </a:xfrm>
+          <a:prstGeom prst="rect">
+            <a:avLst/>
+          </a:prstGeom>
+          <a:noFill/>
+          <a:ln/>
+        </p:spPr>
+        <p:txBody>
+          <a:bodyPr wrap="square" lIns="0" tIns="0" rIns="0" bIns="0" rtlCol="0" anchor="ctr"/>
+          <a:lstStyle/>
+          <a:p>
+            <a:pPr indent="0" marL="0">
+              <a:buNone/>
+            </a:pPr>
+            <a:r>
+              <a:rPr lang="en-US" sz="1200" dirty="0">
                 <a:solidFill>
                   <a:srgbClr val="64748B"/>
                 </a:solidFill>
@@ -5470,48 +6363,9 @@
                 <a:ea typeface="Calibri" pitchFamily="34" charset="-122"/>
                 <a:cs typeface="Calibri" pitchFamily="34" charset="-120"/>
               </a:rPr>
-              <a:t>WHY</a:t>
-            </a:r>
-            <a:endParaRPr lang="en-US" sz="1100" dirty="0"/>
-          </a:p>
-        </p:txBody>
-      </p:sp>
-      <p:sp>
-        <p:nvSpPr>
-          <p:cNvPr id="9" name="Text 7"/>
-          <p:cNvSpPr/>
-          <p:nvPr/>
-        </p:nvSpPr>
-        <p:spPr>
-          <a:xfrm>
-            <a:off x="640080" y="2011680"/>
-            <a:ext cx="7863840" cy="502920"/>
-          </a:xfrm>
-          <a:prstGeom prst="rect">
-            <a:avLst/>
-          </a:prstGeom>
-          <a:noFill/>
-          <a:ln/>
-        </p:spPr>
-        <p:txBody>
-          <a:bodyPr wrap="square" lIns="0" tIns="0" rIns="0" bIns="0" rtlCol="0" anchor="ctr"/>
-          <a:lstStyle/>
-          <a:p>
-            <a:pPr indent="0" marL="0">
-              <a:buNone/>
-            </a:pPr>
-            <a:r>
-              <a:rPr lang="en-US" sz="1300" i="1" dirty="0">
-                <a:solidFill>
-                  <a:srgbClr val="64748B"/>
-                </a:solidFill>
-                <a:latin typeface="Calibri" pitchFamily="34" charset="0"/>
-                <a:ea typeface="Calibri" pitchFamily="34" charset="-122"/>
-                <a:cs typeface="Calibri" pitchFamily="34" charset="-120"/>
-              </a:rPr>
               <a:t>The White Witch = proper noun (capital W for Witch); comma before and joining two clauses; Narnia = proper noun (capital N); period ends.</a:t>
             </a:r>
-            <a:endParaRPr lang="en-US" sz="1300" dirty="0"/>
+            <a:endParaRPr lang="en-US" sz="1200" dirty="0"/>
           </a:p>
         </p:txBody>
       </p:sp>

--- a/Planning docs/Slides/lesson-30-2-teacher-slides.pptx
+++ b/Planning docs/Slides/lesson-30-2-teacher-slides.pptx
@@ -515,7 +515,7 @@
           <a:p>
             <a:r>
               <a:rPr lang="en-US" dirty="0"/>
-              <a:t>Lesson 30.2. Reading: Reading: Ch. 16–17 + Synthesis.</a:t>
+              <a:t>Lesson 30.2. Reading: .</a:t>
             </a:r>
             <a:endParaRPr lang="en-US" dirty="0"/>
           </a:p>
@@ -2143,7 +2143,7 @@
                 <a:ea typeface="Calibri" pitchFamily="34" charset="-122"/>
                 <a:cs typeface="Calibri" pitchFamily="34" charset="-120"/>
               </a:rPr>
-              <a:t>Lesson 30.2  ·  Reading: Ch. 16–17 + Synthesis</a:t>
+              <a:t>Lesson 30.2</a:t>
             </a:r>
             <a:endParaRPr lang="en-US" sz="2000" dirty="0"/>
           </a:p>
@@ -3850,121 +3850,9 @@
                 <a:ea typeface="Calibri" pitchFamily="34" charset="-122"/>
                 <a:cs typeface="Calibri" pitchFamily="34" charset="-120"/>
               </a:rPr>
-              <a:t>Reading: Ch. 16–17 + Synthesis</a:t>
+              <a:t>Today’s chapters</a:t>
             </a:r>
             <a:endParaRPr lang="en-US" sz="2600" dirty="0"/>
-          </a:p>
-        </p:txBody>
-      </p:sp>
-      <p:sp>
-        <p:nvSpPr>
-          <p:cNvPr id="5" name="Text 3"/>
-          <p:cNvSpPr/>
-          <p:nvPr/>
-        </p:nvSpPr>
-        <p:spPr>
-          <a:xfrm>
-            <a:off x="365760" y="1463040"/>
-            <a:ext cx="8229600" cy="237744"/>
-          </a:xfrm>
-          <a:prstGeom prst="rect">
-            <a:avLst/>
-          </a:prstGeom>
-          <a:noFill/>
-          <a:ln/>
-        </p:spPr>
-        <p:txBody>
-          <a:bodyPr wrap="square" lIns="0" tIns="0" rIns="0" bIns="0" rtlCol="0" anchor="ctr"/>
-          <a:lstStyle/>
-          <a:p>
-            <a:pPr indent="0" marL="0">
-              <a:buNone/>
-            </a:pPr>
-            <a:r>
-              <a:rPr lang="en-US" sz="1100" b="1" spc="100" kern="0" dirty="0">
-                <a:solidFill>
-                  <a:srgbClr val="C7922C"/>
-                </a:solidFill>
-                <a:latin typeface="Calibri" pitchFamily="34" charset="0"/>
-                <a:ea typeface="Calibri" pitchFamily="34" charset="-122"/>
-                <a:cs typeface="Calibri" pitchFamily="34" charset="-120"/>
-              </a:rPr>
-              <a:t>PAUSE &amp; THINK</a:t>
-            </a:r>
-            <a:endParaRPr lang="en-US" sz="1100" dirty="0"/>
-          </a:p>
-        </p:txBody>
-      </p:sp>
-      <p:sp>
-        <p:nvSpPr>
-          <p:cNvPr id="6" name="Text 4"/>
-          <p:cNvSpPr/>
-          <p:nvPr/>
-        </p:nvSpPr>
-        <p:spPr>
-          <a:xfrm>
-            <a:off x="365760" y="1719072"/>
-            <a:ext cx="8412480" cy="914400"/>
-          </a:xfrm>
-          <a:prstGeom prst="rect">
-            <a:avLst/>
-          </a:prstGeom>
-          <a:noFill/>
-          <a:ln/>
-        </p:spPr>
-        <p:txBody>
-          <a:bodyPr wrap="square" lIns="0" tIns="0" rIns="0" bIns="0" rtlCol="0" anchor="ctr"/>
-          <a:lstStyle/>
-          <a:p>
-            <a:pPr indent="0" marL="0">
-              <a:buNone/>
-            </a:pPr>
-            <a:r>
-              <a:rPr lang="en-US" sz="1500" dirty="0">
-                <a:solidFill>
-                  <a:srgbClr val="1E293B"/>
-                </a:solidFill>
-                <a:latin typeface="Calibri" pitchFamily="34" charset="0"/>
-                <a:ea typeface="Calibri" pitchFamily="34" charset="-122"/>
-                <a:cs typeface="Calibri" pitchFamily="34" charset="-120"/>
-              </a:rPr>
-              <a:t>•  Explain how the ending reveals theme.</a:t>
-            </a:r>
-            <a:endParaRPr lang="en-US" sz="1500" dirty="0"/>
-          </a:p>
-          <a:p>
-            <a:pPr indent="0" marL="0">
-              <a:buNone/>
-            </a:pPr>
-            <a:r>
-              <a:rPr lang="en-US" sz="1500" dirty="0">
-                <a:solidFill>
-                  <a:srgbClr val="1E293B"/>
-                </a:solidFill>
-                <a:latin typeface="Calibri" pitchFamily="34" charset="0"/>
-                <a:ea typeface="Calibri" pitchFamily="34" charset="-122"/>
-                <a:cs typeface="Calibri" pitchFamily="34" charset="-120"/>
-              </a:rPr>
-              <a:t>•  As you read today, ask yourself: How do you recognize when a story has truly fulfilled its theme?</a:t>
-            </a:r>
-            <a:endParaRPr lang="en-US" sz="1500" dirty="0"/>
-          </a:p>
-          <a:p>
-            <a:pPr indent="0" marL="0">
-              <a:buNone/>
-            </a:pPr>
-            <a:r>
-              <a:rPr lang="en-US" sz="1500" dirty="0">
-                <a:solidFill>
-                  <a:srgbClr val="1E293B"/>
-                </a:solidFill>
-                <a:latin typeface="Calibri" pitchFamily="34" charset="0"/>
-                <a:ea typeface="Calibri" pitchFamily="34" charset="-122"/>
-                <a:cs typeface="Calibri" pitchFamily="34" charset="-120"/>
-              </a:rPr>
-              <a:t>•  Find the fire that sings. What kind of figurative language is that?</a:t>
-            </a:r>
-            <a:endParaRPr lang="en-US" sz="1500" dirty="0"/>
           </a:p>
         </p:txBody>
       </p:sp>
@@ -5073,13 +4961,13 @@
             <a:r>
               <a:rPr lang="en-US" sz="1100" b="1" spc="100" kern="0" dirty="0">
                 <a:solidFill>
-                  <a:srgbClr val="8B6FC0"/>
-                </a:solidFill>
-                <a:latin typeface="Calibri" pitchFamily="34" charset="0"/>
-                <a:ea typeface="Calibri" pitchFamily="34" charset="-122"/>
-                <a:cs typeface="Calibri" pitchFamily="34" charset="-120"/>
-              </a:rPr>
-              <a:t>READING</a:t>
+                  <a:srgbClr val="C7922C"/>
+                </a:solidFill>
+                <a:latin typeface="Calibri" pitchFamily="34" charset="0"/>
+                <a:ea typeface="Calibri" pitchFamily="34" charset="-122"/>
+                <a:cs typeface="Calibri" pitchFamily="34" charset="-120"/>
+              </a:rPr>
+              <a:t>BIG QUESTION</a:t>
             </a:r>
             <a:endParaRPr lang="en-US" sz="1100" dirty="0"/>
           </a:p>
@@ -5087,91 +4975,13 @@
       </p:sp>
       <p:sp>
         <p:nvSpPr>
-          <p:cNvPr id="5" name="Text 3"/>
+          <p:cNvPr id="5" name="Shape 3"/>
           <p:cNvSpPr/>
           <p:nvPr/>
         </p:nvSpPr>
         <p:spPr>
           <a:xfrm>
             <a:off x="365760" y="1014984"/>
-            <a:ext cx="8412480" cy="365760"/>
-          </a:xfrm>
-          <a:prstGeom prst="rect">
-            <a:avLst/>
-          </a:prstGeom>
-          <a:noFill/>
-          <a:ln/>
-        </p:spPr>
-        <p:txBody>
-          <a:bodyPr wrap="square" lIns="0" tIns="0" rIns="0" bIns="0" rtlCol="0" anchor="ctr"/>
-          <a:lstStyle/>
-          <a:p>
-            <a:pPr indent="0" marL="0">
-              <a:buNone/>
-            </a:pPr>
-            <a:r>
-              <a:rPr lang="en-US" sz="2000" b="1" dirty="0">
-                <a:solidFill>
-                  <a:srgbClr val="0E1C42"/>
-                </a:solidFill>
-                <a:latin typeface="Calibri" pitchFamily="34" charset="0"/>
-                <a:ea typeface="Calibri" pitchFamily="34" charset="-122"/>
-                <a:cs typeface="Calibri" pitchFamily="34" charset="-120"/>
-              </a:rPr>
-              <a:t>Reading: Ch. 16–17 + Synthesis</a:t>
-            </a:r>
-            <a:endParaRPr lang="en-US" sz="2000" dirty="0"/>
-          </a:p>
-        </p:txBody>
-      </p:sp>
-      <p:sp>
-        <p:nvSpPr>
-          <p:cNvPr id="6" name="Text 4"/>
-          <p:cNvSpPr/>
-          <p:nvPr/>
-        </p:nvSpPr>
-        <p:spPr>
-          <a:xfrm>
-            <a:off x="365760" y="1508760"/>
-            <a:ext cx="8229600" cy="237744"/>
-          </a:xfrm>
-          <a:prstGeom prst="rect">
-            <a:avLst/>
-          </a:prstGeom>
-          <a:noFill/>
-          <a:ln/>
-        </p:spPr>
-        <p:txBody>
-          <a:bodyPr wrap="square" lIns="0" tIns="0" rIns="0" bIns="0" rtlCol="0" anchor="ctr"/>
-          <a:lstStyle/>
-          <a:p>
-            <a:pPr indent="0" marL="0">
-              <a:buNone/>
-            </a:pPr>
-            <a:r>
-              <a:rPr lang="en-US" sz="1100" b="1" spc="100" kern="0" dirty="0">
-                <a:solidFill>
-                  <a:srgbClr val="C7922C"/>
-                </a:solidFill>
-                <a:latin typeface="Calibri" pitchFamily="34" charset="0"/>
-                <a:ea typeface="Calibri" pitchFamily="34" charset="-122"/>
-                <a:cs typeface="Calibri" pitchFamily="34" charset="-120"/>
-              </a:rPr>
-              <a:t>BIG QUESTION</a:t>
-            </a:r>
-            <a:endParaRPr lang="en-US" sz="1100" dirty="0"/>
-          </a:p>
-        </p:txBody>
-      </p:sp>
-      <p:sp>
-        <p:nvSpPr>
-          <p:cNvPr id="7" name="Shape 5"/>
-          <p:cNvSpPr/>
-          <p:nvPr/>
-        </p:nvSpPr>
-        <p:spPr>
-          <a:xfrm>
-            <a:off x="365760" y="1746504"/>
             <a:ext cx="8412480" cy="731520"/>
           </a:xfrm>
           <a:prstGeom prst="roundRect">
@@ -5199,91 +5009,91 @@
       </p:sp>
       <p:sp>
         <p:nvSpPr>
+          <p:cNvPr id="6" name="Text 4"/>
+          <p:cNvSpPr/>
+          <p:nvPr/>
+        </p:nvSpPr>
+        <p:spPr>
+          <a:xfrm>
+            <a:off x="594360" y="1143000"/>
+            <a:ext cx="7955280" cy="475488"/>
+          </a:xfrm>
+          <a:prstGeom prst="rect">
+            <a:avLst/>
+          </a:prstGeom>
+          <a:noFill/>
+          <a:ln/>
+        </p:spPr>
+        <p:txBody>
+          <a:bodyPr wrap="square" lIns="0" tIns="0" rIns="0" bIns="0" rtlCol="0" anchor="ctr"/>
+          <a:lstStyle/>
+          <a:p>
+            <a:pPr indent="0" marL="0">
+              <a:buNone/>
+            </a:pPr>
+            <a:r>
+              <a:rPr lang="en-US" sz="1700" dirty="0">
+                <a:solidFill>
+                  <a:srgbClr val="1E293B"/>
+                </a:solidFill>
+                <a:latin typeface="Calibri" pitchFamily="34" charset="0"/>
+                <a:ea typeface="Calibri" pitchFamily="34" charset="-122"/>
+                <a:cs typeface="Calibri" pitchFamily="34" charset="-120"/>
+              </a:rPr>
+              <a:t>Explain how the ending reveals theme.</a:t>
+            </a:r>
+            <a:endParaRPr lang="en-US" sz="1700" dirty="0"/>
+          </a:p>
+        </p:txBody>
+      </p:sp>
+      <p:sp>
+        <p:nvSpPr>
+          <p:cNvPr id="7" name="Text 5"/>
+          <p:cNvSpPr/>
+          <p:nvPr/>
+        </p:nvSpPr>
+        <p:spPr>
+          <a:xfrm>
+            <a:off x="365760" y="1874520"/>
+            <a:ext cx="8229600" cy="237744"/>
+          </a:xfrm>
+          <a:prstGeom prst="rect">
+            <a:avLst/>
+          </a:prstGeom>
+          <a:noFill/>
+          <a:ln/>
+        </p:spPr>
+        <p:txBody>
+          <a:bodyPr wrap="square" lIns="0" tIns="0" rIns="0" bIns="0" rtlCol="0" anchor="ctr"/>
+          <a:lstStyle/>
+          <a:p>
+            <a:pPr indent="0" marL="0">
+              <a:buNone/>
+            </a:pPr>
+            <a:r>
+              <a:rPr lang="en-US" sz="1100" b="1" spc="100" kern="0" dirty="0">
+                <a:solidFill>
+                  <a:srgbClr val="55C8E8"/>
+                </a:solidFill>
+                <a:latin typeface="Calibri" pitchFamily="34" charset="0"/>
+                <a:ea typeface="Calibri" pitchFamily="34" charset="-122"/>
+                <a:cs typeface="Calibri" pitchFamily="34" charset="-120"/>
+              </a:rPr>
+              <a:t>READING LENS</a:t>
+            </a:r>
+            <a:endParaRPr lang="en-US" sz="1100" dirty="0"/>
+          </a:p>
+        </p:txBody>
+      </p:sp>
+      <p:sp>
+        <p:nvSpPr>
           <p:cNvPr id="8" name="Text 6"/>
           <p:cNvSpPr/>
           <p:nvPr/>
         </p:nvSpPr>
         <p:spPr>
           <a:xfrm>
-            <a:off x="594360" y="1874520"/>
-            <a:ext cx="7955280" cy="475488"/>
-          </a:xfrm>
-          <a:prstGeom prst="rect">
-            <a:avLst/>
-          </a:prstGeom>
-          <a:noFill/>
-          <a:ln/>
-        </p:spPr>
-        <p:txBody>
-          <a:bodyPr wrap="square" lIns="0" tIns="0" rIns="0" bIns="0" rtlCol="0" anchor="ctr"/>
-          <a:lstStyle/>
-          <a:p>
-            <a:pPr indent="0" marL="0">
-              <a:buNone/>
-            </a:pPr>
-            <a:r>
-              <a:rPr lang="en-US" sz="1700" dirty="0">
-                <a:solidFill>
-                  <a:srgbClr val="1E293B"/>
-                </a:solidFill>
-                <a:latin typeface="Calibri" pitchFamily="34" charset="0"/>
-                <a:ea typeface="Calibri" pitchFamily="34" charset="-122"/>
-                <a:cs typeface="Calibri" pitchFamily="34" charset="-120"/>
-              </a:rPr>
-              <a:t>Explain how the ending reveals theme.</a:t>
-            </a:r>
-            <a:endParaRPr lang="en-US" sz="1700" dirty="0"/>
-          </a:p>
-        </p:txBody>
-      </p:sp>
-      <p:sp>
-        <p:nvSpPr>
-          <p:cNvPr id="9" name="Text 7"/>
-          <p:cNvSpPr/>
-          <p:nvPr/>
-        </p:nvSpPr>
-        <p:spPr>
-          <a:xfrm>
-            <a:off x="365760" y="2606040"/>
-            <a:ext cx="8229600" cy="237744"/>
-          </a:xfrm>
-          <a:prstGeom prst="rect">
-            <a:avLst/>
-          </a:prstGeom>
-          <a:noFill/>
-          <a:ln/>
-        </p:spPr>
-        <p:txBody>
-          <a:bodyPr wrap="square" lIns="0" tIns="0" rIns="0" bIns="0" rtlCol="0" anchor="ctr"/>
-          <a:lstStyle/>
-          <a:p>
-            <a:pPr indent="0" marL="0">
-              <a:buNone/>
-            </a:pPr>
-            <a:r>
-              <a:rPr lang="en-US" sz="1100" b="1" spc="100" kern="0" dirty="0">
-                <a:solidFill>
-                  <a:srgbClr val="55C8E8"/>
-                </a:solidFill>
-                <a:latin typeface="Calibri" pitchFamily="34" charset="0"/>
-                <a:ea typeface="Calibri" pitchFamily="34" charset="-122"/>
-                <a:cs typeface="Calibri" pitchFamily="34" charset="-120"/>
-              </a:rPr>
-              <a:t>READING LENS</a:t>
-            </a:r>
-            <a:endParaRPr lang="en-US" sz="1100" dirty="0"/>
-          </a:p>
-        </p:txBody>
-      </p:sp>
-      <p:sp>
-        <p:nvSpPr>
-          <p:cNvPr id="10" name="Text 8"/>
-          <p:cNvSpPr/>
-          <p:nvPr/>
-        </p:nvSpPr>
-        <p:spPr>
-          <a:xfrm>
-            <a:off x="365760" y="2843784"/>
+            <a:off x="365760" y="2112264"/>
             <a:ext cx="8412480" cy="914400"/>
           </a:xfrm>
           <a:prstGeom prst="rect">
